--- a/Lectures/Lecture13.pptx
+++ b/Lectures/Lecture13.pptx
@@ -230,10 +230,21 @@
       </p14:sectionLst>
     </p:ext>
     <p:ext uri="{EFAFB233-063F-42B5-8137-9DF3F51BA10A}">
-      <p15:sldGuideLst xmlns:p15="http://schemas.microsoft.com/office/powerpoint/2012/main" xmlns=""/>
+      <p15:sldGuideLst xmlns:p15="http://schemas.microsoft.com/office/powerpoint/2012/main">
+        <p15:guide id="1" orient="horz" pos="2160">
+          <p15:clr>
+            <a:srgbClr val="A4A3A4"/>
+          </p15:clr>
+        </p15:guide>
+        <p15:guide id="2" pos="3840">
+          <p15:clr>
+            <a:srgbClr val="A4A3A4"/>
+          </p15:clr>
+        </p15:guide>
+      </p15:sldGuideLst>
     </p:ext>
     <p:ext uri="{2D200454-40CA-4A62-9FC3-DE9A4176ACB9}">
-      <p15:notesGuideLst xmlns:p15="http://schemas.microsoft.com/office/powerpoint/2012/main" xmlns=""/>
+      <p15:notesGuideLst xmlns:p15="http://schemas.microsoft.com/office/powerpoint/2012/main"/>
     </p:ext>
   </p:extLst>
 </p:presentation>
@@ -321,7 +332,7 @@
           <a:p>
             <a:fld id="{CBA08D16-15DC-4E25-BDC3-F25146157B16}" type="datetimeFigureOut">
               <a:rPr lang="ru-RU" smtClean="0"/>
-              <a:t>12.12.2024</a:t>
+              <a:t>03.12.2025</a:t>
             </a:fld>
             <a:endParaRPr lang="ru-RU"/>
           </a:p>
@@ -385,38 +396,37 @@
           <a:p>
             <a:pPr lvl="0"/>
             <a:r>
-              <a:rPr lang="ru-RU" smtClean="0"/>
+              <a:rPr lang="ru-RU"/>
               <a:t>Образец текста</a:t>
             </a:r>
           </a:p>
           <a:p>
             <a:pPr lvl="1"/>
             <a:r>
-              <a:rPr lang="ru-RU" smtClean="0"/>
+              <a:rPr lang="ru-RU"/>
               <a:t>Второй уровень</a:t>
             </a:r>
           </a:p>
           <a:p>
             <a:pPr lvl="2"/>
             <a:r>
-              <a:rPr lang="ru-RU" smtClean="0"/>
+              <a:rPr lang="ru-RU"/>
               <a:t>Третий уровень</a:t>
             </a:r>
           </a:p>
           <a:p>
             <a:pPr lvl="3"/>
             <a:r>
-              <a:rPr lang="ru-RU" smtClean="0"/>
+              <a:rPr lang="ru-RU"/>
               <a:t>Четвертый уровень</a:t>
             </a:r>
           </a:p>
           <a:p>
             <a:pPr lvl="4"/>
             <a:r>
-              <a:rPr lang="ru-RU" smtClean="0"/>
+              <a:rPr lang="ru-RU"/>
               <a:t>Пятый уровень</a:t>
             </a:r>
-            <a:endParaRPr lang="ru-RU"/>
           </a:p>
         </p:txBody>
       </p:sp>
@@ -631,10 +641,9 @@
           </a:lstStyle>
           <a:p>
             <a:r>
-              <a:rPr lang="ru-RU" smtClean="0"/>
+              <a:rPr lang="ru-RU"/>
               <a:t>Образец заголовка</a:t>
             </a:r>
-            <a:endParaRPr lang="ru-RU"/>
           </a:p>
         </p:txBody>
       </p:sp>
@@ -696,10 +705,9 @@
           </a:lstStyle>
           <a:p>
             <a:r>
-              <a:rPr lang="ru-RU" smtClean="0"/>
+              <a:rPr lang="ru-RU"/>
               <a:t>Образец подзаголовка</a:t>
             </a:r>
-            <a:endParaRPr lang="ru-RU"/>
           </a:p>
         </p:txBody>
       </p:sp>
@@ -720,7 +728,7 @@
           <a:p>
             <a:fld id="{FCEC8293-DB51-454A-BE81-EC8FCB31EBA2}" type="datetime1">
               <a:rPr lang="ru-RU" smtClean="0"/>
-              <a:t>12.12.2024</a:t>
+              <a:t>03.12.2025</a:t>
             </a:fld>
             <a:endParaRPr lang="ru-RU"/>
           </a:p>
@@ -742,10 +750,9 @@
           <a:lstStyle/>
           <a:p>
             <a:r>
-              <a:rPr lang="ru-RU" smtClean="0"/>
+              <a:rPr lang="ru-RU"/>
               <a:t>Артём Макаров</a:t>
             </a:r>
-            <a:endParaRPr lang="ru-RU"/>
           </a:p>
         </p:txBody>
       </p:sp>
@@ -818,10 +825,9 @@
           <a:lstStyle/>
           <a:p>
             <a:r>
-              <a:rPr lang="ru-RU" smtClean="0"/>
+              <a:rPr lang="ru-RU"/>
               <a:t>Образец заголовка</a:t>
             </a:r>
-            <a:endParaRPr lang="ru-RU"/>
           </a:p>
         </p:txBody>
       </p:sp>
@@ -842,38 +848,37 @@
           <a:p>
             <a:pPr lvl="0"/>
             <a:r>
-              <a:rPr lang="ru-RU" smtClean="0"/>
+              <a:rPr lang="ru-RU"/>
               <a:t>Образец текста</a:t>
             </a:r>
           </a:p>
           <a:p>
             <a:pPr lvl="1"/>
             <a:r>
-              <a:rPr lang="ru-RU" smtClean="0"/>
+              <a:rPr lang="ru-RU"/>
               <a:t>Второй уровень</a:t>
             </a:r>
           </a:p>
           <a:p>
             <a:pPr lvl="2"/>
             <a:r>
-              <a:rPr lang="ru-RU" smtClean="0"/>
+              <a:rPr lang="ru-RU"/>
               <a:t>Третий уровень</a:t>
             </a:r>
           </a:p>
           <a:p>
             <a:pPr lvl="3"/>
             <a:r>
-              <a:rPr lang="ru-RU" smtClean="0"/>
+              <a:rPr lang="ru-RU"/>
               <a:t>Четвертый уровень</a:t>
             </a:r>
           </a:p>
           <a:p>
             <a:pPr lvl="4"/>
             <a:r>
-              <a:rPr lang="ru-RU" smtClean="0"/>
+              <a:rPr lang="ru-RU"/>
               <a:t>Пятый уровень</a:t>
             </a:r>
-            <a:endParaRPr lang="ru-RU"/>
           </a:p>
         </p:txBody>
       </p:sp>
@@ -894,7 +899,7 @@
           <a:p>
             <a:fld id="{241C87B1-1C35-4DBD-BC18-2BC72E776603}" type="datetime1">
               <a:rPr lang="ru-RU" smtClean="0"/>
-              <a:t>12.12.2024</a:t>
+              <a:t>03.12.2025</a:t>
             </a:fld>
             <a:endParaRPr lang="ru-RU"/>
           </a:p>
@@ -916,10 +921,9 @@
           <a:lstStyle/>
           <a:p>
             <a:r>
-              <a:rPr lang="ru-RU" smtClean="0"/>
+              <a:rPr lang="ru-RU"/>
               <a:t>Артём Макаров</a:t>
             </a:r>
-            <a:endParaRPr lang="ru-RU"/>
           </a:p>
         </p:txBody>
       </p:sp>
@@ -997,10 +1001,9 @@
           <a:lstStyle/>
           <a:p>
             <a:r>
-              <a:rPr lang="ru-RU" smtClean="0"/>
+              <a:rPr lang="ru-RU"/>
               <a:t>Образец заголовка</a:t>
             </a:r>
-            <a:endParaRPr lang="ru-RU"/>
           </a:p>
         </p:txBody>
       </p:sp>
@@ -1026,38 +1029,37 @@
           <a:p>
             <a:pPr lvl="0"/>
             <a:r>
-              <a:rPr lang="ru-RU" smtClean="0"/>
+              <a:rPr lang="ru-RU"/>
               <a:t>Образец текста</a:t>
             </a:r>
           </a:p>
           <a:p>
             <a:pPr lvl="1"/>
             <a:r>
-              <a:rPr lang="ru-RU" smtClean="0"/>
+              <a:rPr lang="ru-RU"/>
               <a:t>Второй уровень</a:t>
             </a:r>
           </a:p>
           <a:p>
             <a:pPr lvl="2"/>
             <a:r>
-              <a:rPr lang="ru-RU" smtClean="0"/>
+              <a:rPr lang="ru-RU"/>
               <a:t>Третий уровень</a:t>
             </a:r>
           </a:p>
           <a:p>
             <a:pPr lvl="3"/>
             <a:r>
-              <a:rPr lang="ru-RU" smtClean="0"/>
+              <a:rPr lang="ru-RU"/>
               <a:t>Четвертый уровень</a:t>
             </a:r>
           </a:p>
           <a:p>
             <a:pPr lvl="4"/>
             <a:r>
-              <a:rPr lang="ru-RU" smtClean="0"/>
+              <a:rPr lang="ru-RU"/>
               <a:t>Пятый уровень</a:t>
             </a:r>
-            <a:endParaRPr lang="ru-RU"/>
           </a:p>
         </p:txBody>
       </p:sp>
@@ -1078,7 +1080,7 @@
           <a:p>
             <a:fld id="{3134C275-26C0-42CD-9111-9ADE65922AF9}" type="datetime1">
               <a:rPr lang="ru-RU" smtClean="0"/>
-              <a:t>12.12.2024</a:t>
+              <a:t>03.12.2025</a:t>
             </a:fld>
             <a:endParaRPr lang="ru-RU"/>
           </a:p>
@@ -1100,10 +1102,9 @@
           <a:lstStyle/>
           <a:p>
             <a:r>
-              <a:rPr lang="ru-RU" smtClean="0"/>
+              <a:rPr lang="ru-RU"/>
               <a:t>Артём Макаров</a:t>
             </a:r>
-            <a:endParaRPr lang="ru-RU"/>
           </a:p>
         </p:txBody>
       </p:sp>
@@ -1176,10 +1177,9 @@
           <a:lstStyle/>
           <a:p>
             <a:r>
-              <a:rPr lang="ru-RU" smtClean="0"/>
+              <a:rPr lang="ru-RU"/>
               <a:t>Образец заголовка</a:t>
             </a:r>
-            <a:endParaRPr lang="ru-RU"/>
           </a:p>
         </p:txBody>
       </p:sp>
@@ -1200,38 +1200,37 @@
           <a:p>
             <a:pPr lvl="0"/>
             <a:r>
-              <a:rPr lang="ru-RU" dirty="0" smtClean="0"/>
+              <a:rPr lang="ru-RU" dirty="0"/>
               <a:t>Образец текста</a:t>
             </a:r>
           </a:p>
           <a:p>
             <a:pPr lvl="1"/>
             <a:r>
-              <a:rPr lang="ru-RU" dirty="0" smtClean="0"/>
+              <a:rPr lang="ru-RU" dirty="0"/>
               <a:t>Второй уровень</a:t>
             </a:r>
           </a:p>
           <a:p>
             <a:pPr lvl="2"/>
             <a:r>
-              <a:rPr lang="ru-RU" dirty="0" smtClean="0"/>
+              <a:rPr lang="ru-RU" dirty="0"/>
               <a:t>Третий уровень</a:t>
             </a:r>
           </a:p>
           <a:p>
             <a:pPr lvl="3"/>
             <a:r>
-              <a:rPr lang="ru-RU" dirty="0" smtClean="0"/>
+              <a:rPr lang="ru-RU" dirty="0"/>
               <a:t>Четвертый уровень</a:t>
             </a:r>
           </a:p>
           <a:p>
             <a:pPr lvl="4"/>
             <a:r>
-              <a:rPr lang="ru-RU" dirty="0" smtClean="0"/>
+              <a:rPr lang="ru-RU" dirty="0"/>
               <a:t>Пятый уровень</a:t>
             </a:r>
-            <a:endParaRPr lang="ru-RU" dirty="0"/>
           </a:p>
         </p:txBody>
       </p:sp>
@@ -1252,7 +1251,7 @@
           <a:p>
             <a:fld id="{C1A9A50B-C350-45F5-8AAB-ADB9E670AF2E}" type="datetime1">
               <a:rPr lang="ru-RU" smtClean="0"/>
-              <a:t>12.12.2024</a:t>
+              <a:t>03.12.2025</a:t>
             </a:fld>
             <a:endParaRPr lang="ru-RU"/>
           </a:p>
@@ -1274,10 +1273,9 @@
           <a:lstStyle/>
           <a:p>
             <a:r>
-              <a:rPr lang="ru-RU" smtClean="0"/>
+              <a:rPr lang="ru-RU"/>
               <a:t>Артём Макаров</a:t>
             </a:r>
-            <a:endParaRPr lang="ru-RU"/>
           </a:p>
         </p:txBody>
       </p:sp>
@@ -1359,10 +1357,9 @@
           </a:lstStyle>
           <a:p>
             <a:r>
-              <a:rPr lang="ru-RU" smtClean="0"/>
+              <a:rPr lang="ru-RU"/>
               <a:t>Образец заголовка</a:t>
             </a:r>
-            <a:endParaRPr lang="ru-RU"/>
           </a:p>
         </p:txBody>
       </p:sp>
@@ -1479,7 +1476,7 @@
           <a:p>
             <a:pPr lvl="0"/>
             <a:r>
-              <a:rPr lang="ru-RU" smtClean="0"/>
+              <a:rPr lang="ru-RU"/>
               <a:t>Образец текста</a:t>
             </a:r>
           </a:p>
@@ -1502,7 +1499,7 @@
           <a:p>
             <a:fld id="{089688C9-348F-42F9-B6C0-5990DDE0C5B2}" type="datetime1">
               <a:rPr lang="ru-RU" smtClean="0"/>
-              <a:t>12.12.2024</a:t>
+              <a:t>03.12.2025</a:t>
             </a:fld>
             <a:endParaRPr lang="ru-RU"/>
           </a:p>
@@ -1524,10 +1521,9 @@
           <a:lstStyle/>
           <a:p>
             <a:r>
-              <a:rPr lang="ru-RU" smtClean="0"/>
+              <a:rPr lang="ru-RU"/>
               <a:t>Артём Макаров</a:t>
             </a:r>
-            <a:endParaRPr lang="ru-RU"/>
           </a:p>
         </p:txBody>
       </p:sp>
@@ -1600,10 +1596,9 @@
           <a:lstStyle/>
           <a:p>
             <a:r>
-              <a:rPr lang="ru-RU" smtClean="0"/>
+              <a:rPr lang="ru-RU"/>
               <a:t>Образец заголовка</a:t>
             </a:r>
-            <a:endParaRPr lang="ru-RU"/>
           </a:p>
         </p:txBody>
       </p:sp>
@@ -1629,38 +1624,37 @@
           <a:p>
             <a:pPr lvl="0"/>
             <a:r>
-              <a:rPr lang="ru-RU" smtClean="0"/>
+              <a:rPr lang="ru-RU"/>
               <a:t>Образец текста</a:t>
             </a:r>
           </a:p>
           <a:p>
             <a:pPr lvl="1"/>
             <a:r>
-              <a:rPr lang="ru-RU" smtClean="0"/>
+              <a:rPr lang="ru-RU"/>
               <a:t>Второй уровень</a:t>
             </a:r>
           </a:p>
           <a:p>
             <a:pPr lvl="2"/>
             <a:r>
-              <a:rPr lang="ru-RU" smtClean="0"/>
+              <a:rPr lang="ru-RU"/>
               <a:t>Третий уровень</a:t>
             </a:r>
           </a:p>
           <a:p>
             <a:pPr lvl="3"/>
             <a:r>
-              <a:rPr lang="ru-RU" smtClean="0"/>
+              <a:rPr lang="ru-RU"/>
               <a:t>Четвертый уровень</a:t>
             </a:r>
           </a:p>
           <a:p>
             <a:pPr lvl="4"/>
             <a:r>
-              <a:rPr lang="ru-RU" smtClean="0"/>
+              <a:rPr lang="ru-RU"/>
               <a:t>Пятый уровень</a:t>
             </a:r>
-            <a:endParaRPr lang="ru-RU"/>
           </a:p>
         </p:txBody>
       </p:sp>
@@ -1686,38 +1680,37 @@
           <a:p>
             <a:pPr lvl="0"/>
             <a:r>
-              <a:rPr lang="ru-RU" smtClean="0"/>
+              <a:rPr lang="ru-RU"/>
               <a:t>Образец текста</a:t>
             </a:r>
           </a:p>
           <a:p>
             <a:pPr lvl="1"/>
             <a:r>
-              <a:rPr lang="ru-RU" smtClean="0"/>
+              <a:rPr lang="ru-RU"/>
               <a:t>Второй уровень</a:t>
             </a:r>
           </a:p>
           <a:p>
             <a:pPr lvl="2"/>
             <a:r>
-              <a:rPr lang="ru-RU" smtClean="0"/>
+              <a:rPr lang="ru-RU"/>
               <a:t>Третий уровень</a:t>
             </a:r>
           </a:p>
           <a:p>
             <a:pPr lvl="3"/>
             <a:r>
-              <a:rPr lang="ru-RU" smtClean="0"/>
+              <a:rPr lang="ru-RU"/>
               <a:t>Четвертый уровень</a:t>
             </a:r>
           </a:p>
           <a:p>
             <a:pPr lvl="4"/>
             <a:r>
-              <a:rPr lang="ru-RU" smtClean="0"/>
+              <a:rPr lang="ru-RU"/>
               <a:t>Пятый уровень</a:t>
             </a:r>
-            <a:endParaRPr lang="ru-RU"/>
           </a:p>
         </p:txBody>
       </p:sp>
@@ -1738,7 +1731,7 @@
           <a:p>
             <a:fld id="{684AFD8F-6DD9-4AD3-A505-FDC3F5C5F3F6}" type="datetime1">
               <a:rPr lang="ru-RU" smtClean="0"/>
-              <a:t>12.12.2024</a:t>
+              <a:t>03.12.2025</a:t>
             </a:fld>
             <a:endParaRPr lang="ru-RU"/>
           </a:p>
@@ -1760,10 +1753,9 @@
           <a:lstStyle/>
           <a:p>
             <a:r>
-              <a:rPr lang="ru-RU" smtClean="0"/>
+              <a:rPr lang="ru-RU"/>
               <a:t>Артём Макаров</a:t>
             </a:r>
-            <a:endParaRPr lang="ru-RU"/>
           </a:p>
         </p:txBody>
       </p:sp>
@@ -1841,10 +1833,9 @@
           <a:lstStyle/>
           <a:p>
             <a:r>
-              <a:rPr lang="ru-RU" smtClean="0"/>
+              <a:rPr lang="ru-RU"/>
               <a:t>Образец заголовка</a:t>
             </a:r>
-            <a:endParaRPr lang="ru-RU"/>
           </a:p>
         </p:txBody>
       </p:sp>
@@ -1907,7 +1898,7 @@
           <a:p>
             <a:pPr lvl="0"/>
             <a:r>
-              <a:rPr lang="ru-RU" dirty="0" smtClean="0"/>
+              <a:rPr lang="ru-RU" dirty="0"/>
               <a:t>Образец текста</a:t>
             </a:r>
           </a:p>
@@ -1935,38 +1926,37 @@
           <a:p>
             <a:pPr lvl="0"/>
             <a:r>
-              <a:rPr lang="ru-RU" dirty="0" smtClean="0"/>
+              <a:rPr lang="ru-RU" dirty="0"/>
               <a:t>Образец текста</a:t>
             </a:r>
           </a:p>
           <a:p>
             <a:pPr lvl="1"/>
             <a:r>
-              <a:rPr lang="ru-RU" dirty="0" smtClean="0"/>
+              <a:rPr lang="ru-RU" dirty="0"/>
               <a:t>Второй уровень</a:t>
             </a:r>
           </a:p>
           <a:p>
             <a:pPr lvl="2"/>
             <a:r>
-              <a:rPr lang="ru-RU" dirty="0" smtClean="0"/>
+              <a:rPr lang="ru-RU" dirty="0"/>
               <a:t>Третий уровень</a:t>
             </a:r>
           </a:p>
           <a:p>
             <a:pPr lvl="3"/>
             <a:r>
-              <a:rPr lang="ru-RU" dirty="0" smtClean="0"/>
+              <a:rPr lang="ru-RU" dirty="0"/>
               <a:t>Четвертый уровень</a:t>
             </a:r>
           </a:p>
           <a:p>
             <a:pPr lvl="4"/>
             <a:r>
-              <a:rPr lang="ru-RU" dirty="0" smtClean="0"/>
+              <a:rPr lang="ru-RU" dirty="0"/>
               <a:t>Пятый уровень</a:t>
             </a:r>
-            <a:endParaRPr lang="ru-RU" dirty="0"/>
           </a:p>
         </p:txBody>
       </p:sp>
@@ -2029,7 +2019,7 @@
           <a:p>
             <a:pPr lvl="0"/>
             <a:r>
-              <a:rPr lang="ru-RU" smtClean="0"/>
+              <a:rPr lang="ru-RU"/>
               <a:t>Образец текста</a:t>
             </a:r>
           </a:p>
@@ -2057,38 +2047,37 @@
           <a:p>
             <a:pPr lvl="0"/>
             <a:r>
-              <a:rPr lang="ru-RU" smtClean="0"/>
+              <a:rPr lang="ru-RU"/>
               <a:t>Образец текста</a:t>
             </a:r>
           </a:p>
           <a:p>
             <a:pPr lvl="1"/>
             <a:r>
-              <a:rPr lang="ru-RU" smtClean="0"/>
+              <a:rPr lang="ru-RU"/>
               <a:t>Второй уровень</a:t>
             </a:r>
           </a:p>
           <a:p>
             <a:pPr lvl="2"/>
             <a:r>
-              <a:rPr lang="ru-RU" smtClean="0"/>
+              <a:rPr lang="ru-RU"/>
               <a:t>Третий уровень</a:t>
             </a:r>
           </a:p>
           <a:p>
             <a:pPr lvl="3"/>
             <a:r>
-              <a:rPr lang="ru-RU" smtClean="0"/>
+              <a:rPr lang="ru-RU"/>
               <a:t>Четвертый уровень</a:t>
             </a:r>
           </a:p>
           <a:p>
             <a:pPr lvl="4"/>
             <a:r>
-              <a:rPr lang="ru-RU" smtClean="0"/>
+              <a:rPr lang="ru-RU"/>
               <a:t>Пятый уровень</a:t>
             </a:r>
-            <a:endParaRPr lang="ru-RU"/>
           </a:p>
         </p:txBody>
       </p:sp>
@@ -2109,7 +2098,7 @@
           <a:p>
             <a:fld id="{63551EFE-4D02-45EB-A747-8B6F047B5AA0}" type="datetime1">
               <a:rPr lang="ru-RU" smtClean="0"/>
-              <a:t>12.12.2024</a:t>
+              <a:t>03.12.2025</a:t>
             </a:fld>
             <a:endParaRPr lang="ru-RU"/>
           </a:p>
@@ -2131,10 +2120,9 @@
           <a:lstStyle/>
           <a:p>
             <a:r>
-              <a:rPr lang="ru-RU" smtClean="0"/>
+              <a:rPr lang="ru-RU"/>
               <a:t>Артём Макаров</a:t>
             </a:r>
-            <a:endParaRPr lang="ru-RU"/>
           </a:p>
         </p:txBody>
       </p:sp>
@@ -2207,10 +2195,9 @@
           <a:lstStyle/>
           <a:p>
             <a:r>
-              <a:rPr lang="ru-RU" smtClean="0"/>
+              <a:rPr lang="ru-RU"/>
               <a:t>Образец заголовка</a:t>
             </a:r>
-            <a:endParaRPr lang="ru-RU"/>
           </a:p>
         </p:txBody>
       </p:sp>
@@ -2231,7 +2218,7 @@
           <a:p>
             <a:fld id="{813A9F34-E5CD-4B8F-AA9E-889C84372B20}" type="datetime1">
               <a:rPr lang="ru-RU" smtClean="0"/>
-              <a:t>12.12.2024</a:t>
+              <a:t>03.12.2025</a:t>
             </a:fld>
             <a:endParaRPr lang="ru-RU"/>
           </a:p>
@@ -2253,10 +2240,9 @@
           <a:lstStyle/>
           <a:p>
             <a:r>
-              <a:rPr lang="ru-RU" smtClean="0"/>
+              <a:rPr lang="ru-RU"/>
               <a:t>Артём Макаров</a:t>
             </a:r>
-            <a:endParaRPr lang="ru-RU"/>
           </a:p>
         </p:txBody>
       </p:sp>
@@ -2330,7 +2316,7 @@
           <a:p>
             <a:fld id="{51224D22-9B29-44A6-8E82-95FC492DEDC1}" type="datetime1">
               <a:rPr lang="ru-RU" smtClean="0"/>
-              <a:t>12.12.2024</a:t>
+              <a:t>03.12.2025</a:t>
             </a:fld>
             <a:endParaRPr lang="ru-RU"/>
           </a:p>
@@ -2352,10 +2338,9 @@
           <a:lstStyle/>
           <a:p>
             <a:r>
-              <a:rPr lang="ru-RU" smtClean="0"/>
+              <a:rPr lang="ru-RU"/>
               <a:t>Артём Макаров</a:t>
             </a:r>
-            <a:endParaRPr lang="ru-RU"/>
           </a:p>
         </p:txBody>
       </p:sp>
@@ -2437,10 +2422,9 @@
           </a:lstStyle>
           <a:p>
             <a:r>
-              <a:rPr lang="ru-RU" smtClean="0"/>
+              <a:rPr lang="ru-RU"/>
               <a:t>Образец заголовка</a:t>
             </a:r>
-            <a:endParaRPr lang="ru-RU"/>
           </a:p>
         </p:txBody>
       </p:sp>
@@ -2494,38 +2478,37 @@
           <a:p>
             <a:pPr lvl="0"/>
             <a:r>
-              <a:rPr lang="ru-RU" smtClean="0"/>
+              <a:rPr lang="ru-RU"/>
               <a:t>Образец текста</a:t>
             </a:r>
           </a:p>
           <a:p>
             <a:pPr lvl="1"/>
             <a:r>
-              <a:rPr lang="ru-RU" smtClean="0"/>
+              <a:rPr lang="ru-RU"/>
               <a:t>Второй уровень</a:t>
             </a:r>
           </a:p>
           <a:p>
             <a:pPr lvl="2"/>
             <a:r>
-              <a:rPr lang="ru-RU" smtClean="0"/>
+              <a:rPr lang="ru-RU"/>
               <a:t>Третий уровень</a:t>
             </a:r>
           </a:p>
           <a:p>
             <a:pPr lvl="3"/>
             <a:r>
-              <a:rPr lang="ru-RU" smtClean="0"/>
+              <a:rPr lang="ru-RU"/>
               <a:t>Четвертый уровень</a:t>
             </a:r>
           </a:p>
           <a:p>
             <a:pPr lvl="4"/>
             <a:r>
-              <a:rPr lang="ru-RU" smtClean="0"/>
+              <a:rPr lang="ru-RU"/>
               <a:t>Пятый уровень</a:t>
             </a:r>
-            <a:endParaRPr lang="ru-RU"/>
           </a:p>
         </p:txBody>
       </p:sp>
@@ -2588,7 +2571,7 @@
           <a:p>
             <a:pPr lvl="0"/>
             <a:r>
-              <a:rPr lang="ru-RU" smtClean="0"/>
+              <a:rPr lang="ru-RU"/>
               <a:t>Образец текста</a:t>
             </a:r>
           </a:p>
@@ -2611,7 +2594,7 @@
           <a:p>
             <a:fld id="{91D1034F-4441-48A1-BDC0-25EA1022324A}" type="datetime1">
               <a:rPr lang="ru-RU" smtClean="0"/>
-              <a:t>12.12.2024</a:t>
+              <a:t>03.12.2025</a:t>
             </a:fld>
             <a:endParaRPr lang="ru-RU"/>
           </a:p>
@@ -2633,10 +2616,9 @@
           <a:lstStyle/>
           <a:p>
             <a:r>
-              <a:rPr lang="ru-RU" smtClean="0"/>
+              <a:rPr lang="ru-RU"/>
               <a:t>Артём Макаров</a:t>
             </a:r>
-            <a:endParaRPr lang="ru-RU"/>
           </a:p>
         </p:txBody>
       </p:sp>
@@ -2718,10 +2700,9 @@
           </a:lstStyle>
           <a:p>
             <a:r>
-              <a:rPr lang="ru-RU" smtClean="0"/>
+              <a:rPr lang="ru-RU"/>
               <a:t>Образец заголовка</a:t>
             </a:r>
-            <a:endParaRPr lang="ru-RU"/>
           </a:p>
         </p:txBody>
       </p:sp>
@@ -2845,7 +2826,7 @@
           <a:p>
             <a:pPr lvl="0"/>
             <a:r>
-              <a:rPr lang="ru-RU" smtClean="0"/>
+              <a:rPr lang="ru-RU"/>
               <a:t>Образец текста</a:t>
             </a:r>
           </a:p>
@@ -2868,7 +2849,7 @@
           <a:p>
             <a:fld id="{B0FFDE79-B627-473B-AE17-4C65BD2495F7}" type="datetime1">
               <a:rPr lang="ru-RU" smtClean="0"/>
-              <a:t>12.12.2024</a:t>
+              <a:t>03.12.2025</a:t>
             </a:fld>
             <a:endParaRPr lang="ru-RU"/>
           </a:p>
@@ -2890,10 +2871,9 @@
           <a:lstStyle/>
           <a:p>
             <a:r>
-              <a:rPr lang="ru-RU" smtClean="0"/>
+              <a:rPr lang="ru-RU"/>
               <a:t>Артём Макаров</a:t>
             </a:r>
-            <a:endParaRPr lang="ru-RU"/>
           </a:p>
         </p:txBody>
       </p:sp>
@@ -2981,10 +2961,9 @@
           <a:lstStyle/>
           <a:p>
             <a:r>
-              <a:rPr lang="ru-RU" dirty="0" smtClean="0"/>
+              <a:rPr lang="ru-RU" dirty="0"/>
               <a:t>Образец заголовка</a:t>
             </a:r>
-            <a:endParaRPr lang="ru-RU" dirty="0"/>
           </a:p>
         </p:txBody>
       </p:sp>
@@ -3015,38 +2994,37 @@
           <a:p>
             <a:pPr lvl="0"/>
             <a:r>
-              <a:rPr lang="ru-RU" dirty="0" smtClean="0"/>
+              <a:rPr lang="ru-RU" dirty="0"/>
               <a:t>Образец текста</a:t>
             </a:r>
           </a:p>
           <a:p>
             <a:pPr lvl="1"/>
             <a:r>
-              <a:rPr lang="ru-RU" dirty="0" smtClean="0"/>
+              <a:rPr lang="ru-RU" dirty="0"/>
               <a:t>Второй уровень</a:t>
             </a:r>
           </a:p>
           <a:p>
             <a:pPr lvl="2"/>
             <a:r>
-              <a:rPr lang="ru-RU" dirty="0" smtClean="0"/>
+              <a:rPr lang="ru-RU" dirty="0"/>
               <a:t>Третий уровень</a:t>
             </a:r>
           </a:p>
           <a:p>
             <a:pPr lvl="3"/>
             <a:r>
-              <a:rPr lang="ru-RU" dirty="0" smtClean="0"/>
+              <a:rPr lang="ru-RU" dirty="0"/>
               <a:t>Четвертый уровень</a:t>
             </a:r>
           </a:p>
           <a:p>
             <a:pPr lvl="4"/>
             <a:r>
-              <a:rPr lang="ru-RU" dirty="0" smtClean="0"/>
+              <a:rPr lang="ru-RU" dirty="0"/>
               <a:t>Пятый уровень</a:t>
             </a:r>
-            <a:endParaRPr lang="ru-RU" dirty="0"/>
           </a:p>
         </p:txBody>
       </p:sp>
@@ -3085,7 +3063,7 @@
           <a:p>
             <a:fld id="{11CA537A-1B8C-47BA-9BA6-7CE3FAFDA8BE}" type="datetime1">
               <a:rPr lang="ru-RU" smtClean="0"/>
-              <a:t>12.12.2024</a:t>
+              <a:t>03.12.2025</a:t>
             </a:fld>
             <a:endParaRPr lang="ru-RU"/>
           </a:p>
@@ -3125,10 +3103,9 @@
           </a:lstStyle>
           <a:p>
             <a:r>
-              <a:rPr lang="ru-RU" smtClean="0"/>
+              <a:rPr lang="ru-RU"/>
               <a:t>Артём Макаров</a:t>
             </a:r>
-            <a:endParaRPr lang="ru-RU"/>
           </a:p>
         </p:txBody>
       </p:sp>
@@ -3518,37 +3495,25 @@
           <a:lstStyle/>
           <a:p>
             <a:r>
-              <a:rPr lang="ru-RU" dirty="0" smtClean="0"/>
-              <a:t>Прикладная </a:t>
-            </a:r>
-            <a:r>
-              <a:rPr lang="ru-RU" dirty="0"/>
-              <a:t>К</a:t>
-            </a:r>
-            <a:r>
-              <a:rPr lang="ru-RU" dirty="0" smtClean="0"/>
-              <a:t>риптография</a:t>
-            </a:r>
-            <a:r>
-              <a:rPr lang="en-US" dirty="0" smtClean="0"/>
+              <a:rPr lang="ru-RU" dirty="0"/>
+              <a:t>Прикладная Криптография</a:t>
+            </a:r>
+            <a:r>
+              <a:rPr lang="en-US" dirty="0"/>
               <a:t>:</a:t>
             </a:r>
             <a:br>
-              <a:rPr lang="en-US" dirty="0" smtClean="0"/>
+              <a:rPr lang="en-US" dirty="0"/>
             </a:br>
             <a:r>
-              <a:rPr lang="ru-RU" dirty="0" smtClean="0"/>
+              <a:rPr lang="ru-RU" dirty="0"/>
               <a:t>Симметричные криптосистемы</a:t>
             </a:r>
-            <a:r>
-              <a:rPr lang="en-US" dirty="0" smtClean="0"/>
-              <a:t/>
-            </a:r>
             <a:br>
-              <a:rPr lang="en-US" dirty="0" smtClean="0"/>
+              <a:rPr lang="en-US" dirty="0"/>
             </a:br>
             <a:r>
-              <a:rPr lang="en-US" dirty="0" smtClean="0"/>
+              <a:rPr lang="en-US" dirty="0"/>
               <a:t> IPsec, TLS (SSL) </a:t>
             </a:r>
             <a:endParaRPr lang="ru-RU" dirty="0"/>
@@ -3576,22 +3541,18 @@
           <a:lstStyle/>
           <a:p>
             <a:r>
-              <a:rPr lang="ru-RU" dirty="0" smtClean="0"/>
+              <a:rPr lang="ru-RU" dirty="0"/>
               <a:t>Макаров Артём </a:t>
             </a:r>
           </a:p>
           <a:p>
             <a:r>
-              <a:rPr lang="ru-RU" dirty="0" smtClean="0"/>
-              <a:t>МИФИ </a:t>
-            </a:r>
-            <a:r>
-              <a:rPr lang="ru-RU" dirty="0" smtClean="0"/>
-              <a:t>202</a:t>
-            </a:r>
-            <a:r>
-              <a:rPr lang="en-US" smtClean="0"/>
-              <a:t>4</a:t>
+              <a:rPr lang="ru-RU" dirty="0"/>
+              <a:t>МИФИ 202</a:t>
+            </a:r>
+            <a:r>
+              <a:rPr lang="en-US" dirty="0"/>
+              <a:t>5</a:t>
             </a:r>
             <a:endParaRPr lang="ru-RU" dirty="0"/>
           </a:p>
@@ -3607,13 +3568,6 @@
   <p:clrMapOvr>
     <a:masterClrMapping/>
   </p:clrMapOvr>
-  <p:timing>
-    <p:tnLst>
-      <p:par>
-        <p:cTn id="1" dur="indefinite" restart="never" nodeType="tmRoot"/>
-      </p:par>
-    </p:tnLst>
-  </p:timing>
 </p:sld>
 </file>
 
@@ -3650,11 +3604,11 @@
           <a:lstStyle/>
           <a:p>
             <a:r>
-              <a:rPr lang="ru-RU" dirty="0" smtClean="0"/>
+              <a:rPr lang="ru-RU" dirty="0"/>
               <a:t>Инкапсуляция </a:t>
             </a:r>
             <a:r>
-              <a:rPr lang="en-US" dirty="0" smtClean="0"/>
+              <a:rPr lang="en-US" dirty="0"/>
               <a:t>IPsec</a:t>
             </a:r>
             <a:endParaRPr lang="ru-RU" dirty="0"/>
@@ -3688,25 +3642,21 @@
             </a:pPr>
             <a:r>
               <a:rPr lang="en-US" dirty="0"/>
-              <a:t>s</a:t>
-            </a:r>
-            <a:r>
-              <a:rPr lang="en-US" dirty="0" smtClean="0"/>
-              <a:t>equence number – </a:t>
-            </a:r>
-            <a:r>
-              <a:rPr lang="ru-RU" dirty="0" smtClean="0"/>
+              <a:t>sequence number – </a:t>
+            </a:r>
+            <a:r>
+              <a:rPr lang="ru-RU" dirty="0"/>
               <a:t>номер пакета, используется для обнаружения и отбрасывания повторяющихся пакетов. 64 бита, но записывается в пакета только наименее значимые 32 бита. При вычислении </a:t>
             </a:r>
             <a:r>
-              <a:rPr lang="en-US" dirty="0" smtClean="0"/>
+              <a:rPr lang="en-US" dirty="0"/>
               <a:t>MAC </a:t>
             </a:r>
             <a:r>
-              <a:rPr lang="ru-RU" dirty="0" smtClean="0"/>
+              <a:rPr lang="ru-RU" dirty="0"/>
               <a:t>используются все 64 бита. Инициализируется нулём при установлении соединения, увеличивается на 1 с каждым пакетом. </a:t>
             </a:r>
-            <a:endParaRPr lang="en-US" dirty="0" smtClean="0"/>
+            <a:endParaRPr lang="en-US" dirty="0"/>
           </a:p>
           <a:p>
             <a:endParaRPr lang="ru-RU" dirty="0"/>
@@ -3806,11 +3756,11 @@
           <a:lstStyle/>
           <a:p>
             <a:r>
-              <a:rPr lang="ru-RU" dirty="0" smtClean="0"/>
+              <a:rPr lang="ru-RU" dirty="0"/>
               <a:t>Инкапсуляция </a:t>
             </a:r>
             <a:r>
-              <a:rPr lang="en-US" dirty="0" smtClean="0"/>
+              <a:rPr lang="en-US" dirty="0"/>
               <a:t>IPsec</a:t>
             </a:r>
             <a:endParaRPr lang="ru-RU" dirty="0"/>
@@ -3841,59 +3791,51 @@
           <a:p>
             <a:r>
               <a:rPr lang="en-US" dirty="0"/>
-              <a:t>p</a:t>
-            </a:r>
-            <a:r>
-              <a:rPr lang="en-US" dirty="0" smtClean="0"/>
-              <a:t>adding – </a:t>
-            </a:r>
-            <a:r>
-              <a:rPr lang="ru-RU" dirty="0" smtClean="0"/>
+              <a:t>padding – </a:t>
+            </a:r>
+            <a:r>
+              <a:rPr lang="ru-RU" dirty="0"/>
               <a:t>дополнение до длины блока алгоритма шифрования и результирующего шифр текста до длины 4 байта. От 0 до 255 байт.</a:t>
             </a:r>
-            <a:endParaRPr lang="en-US" dirty="0" smtClean="0"/>
-          </a:p>
-          <a:p>
-            <a:r>
-              <a:rPr lang="en-US" dirty="0"/>
-              <a:t>p</a:t>
-            </a:r>
-            <a:r>
-              <a:rPr lang="en-US" dirty="0" smtClean="0"/>
-              <a:t>ad </a:t>
-            </a:r>
-            <a:r>
-              <a:rPr lang="en-US" dirty="0" err="1" smtClean="0"/>
+            <a:endParaRPr lang="en-US" dirty="0"/>
+          </a:p>
+          <a:p>
+            <a:r>
+              <a:rPr lang="en-US" dirty="0"/>
+              <a:t>pad </a:t>
+            </a:r>
+            <a:r>
+              <a:rPr lang="en-US" dirty="0" err="1"/>
               <a:t>len</a:t>
             </a:r>
             <a:r>
-              <a:rPr lang="en-US" dirty="0" smtClean="0"/>
+              <a:rPr lang="en-US" dirty="0"/>
               <a:t> – </a:t>
             </a:r>
             <a:r>
-              <a:rPr lang="ru-RU" dirty="0" smtClean="0"/>
+              <a:rPr lang="ru-RU" dirty="0"/>
               <a:t>длина дополнения</a:t>
             </a:r>
           </a:p>
           <a:p>
             <a:r>
-              <a:rPr lang="en-US" dirty="0" smtClean="0"/>
+              <a:rPr lang="en-US" dirty="0"/>
               <a:t>next </a:t>
             </a:r>
             <a:r>
-              <a:rPr lang="en-US" dirty="0" err="1" smtClean="0"/>
+              <a:rPr lang="en-US" dirty="0" err="1"/>
               <a:t>hdr</a:t>
             </a:r>
             <a:r>
-              <a:rPr lang="en-US" dirty="0" smtClean="0"/>
+              <a:rPr lang="en-US" dirty="0"/>
               <a:t> – </a:t>
             </a:r>
             <a:r>
-              <a:rPr lang="ru-RU" dirty="0" smtClean="0"/>
+              <a:rPr lang="ru-RU" dirty="0"/>
               <a:t>тип данных (для данного примера </a:t>
             </a:r>
             <a:r>
-              <a:rPr lang="en-US" dirty="0" smtClean="0"/>
+              <a:rPr lang="en-US" dirty="0"/>
               <a:t>IPv4=4) </a:t>
             </a:r>
             <a:endParaRPr lang="ru-RU" dirty="0"/>
@@ -3993,11 +3935,11 @@
           <a:lstStyle/>
           <a:p>
             <a:r>
-              <a:rPr lang="ru-RU" dirty="0" smtClean="0"/>
+              <a:rPr lang="ru-RU" dirty="0"/>
               <a:t>Шифрование </a:t>
             </a:r>
             <a:r>
-              <a:rPr lang="en-US" dirty="0" smtClean="0"/>
+              <a:rPr lang="en-US" dirty="0"/>
               <a:t>IPsec</a:t>
             </a:r>
             <a:endParaRPr lang="ru-RU" dirty="0"/>
@@ -4023,110 +3965,109 @@
               <a:buNone/>
             </a:pPr>
             <a:r>
-              <a:rPr lang="en-US" dirty="0" smtClean="0"/>
+              <a:rPr lang="en-US" dirty="0"/>
               <a:t>Encrypt-Then-MAC</a:t>
             </a:r>
           </a:p>
           <a:p>
             <a:r>
-              <a:rPr lang="ru-RU" dirty="0" smtClean="0"/>
+              <a:rPr lang="ru-RU" dirty="0"/>
               <a:t>Данные дополняются дополнением до необходимой длины. Заполняется поле </a:t>
             </a:r>
             <a:r>
-              <a:rPr lang="en-US" dirty="0" smtClean="0"/>
+              <a:rPr lang="en-US" dirty="0"/>
               <a:t>next header</a:t>
             </a:r>
           </a:p>
           <a:p>
             <a:r>
-              <a:rPr lang="ru-RU" dirty="0" smtClean="0"/>
+              <a:rPr lang="ru-RU" dirty="0"/>
               <a:t>Зашифровываются ключом для данной </a:t>
             </a:r>
             <a:r>
-              <a:rPr lang="en-US" dirty="0" smtClean="0"/>
+              <a:rPr lang="en-US" dirty="0"/>
               <a:t>SA</a:t>
             </a:r>
             <a:r>
-              <a:rPr lang="ru-RU" dirty="0" smtClean="0"/>
+              <a:rPr lang="ru-RU" dirty="0"/>
               <a:t>. Если шифрование обозначено как </a:t>
             </a:r>
             <a:r>
-              <a:rPr lang="en-US" dirty="0" smtClean="0"/>
+              <a:rPr lang="en-US" dirty="0"/>
               <a:t>NULL</a:t>
             </a:r>
             <a:r>
-              <a:rPr lang="ru-RU" dirty="0" smtClean="0"/>
+              <a:rPr lang="ru-RU" dirty="0"/>
               <a:t>, оно не производится (тогда </a:t>
             </a:r>
             <a:r>
-              <a:rPr lang="en-US" dirty="0" smtClean="0"/>
+              <a:rPr lang="en-US" dirty="0"/>
               <a:t>IPsec </a:t>
             </a:r>
             <a:r>
-              <a:rPr lang="ru-RU" dirty="0" smtClean="0"/>
+              <a:rPr lang="ru-RU" dirty="0"/>
               <a:t>обеспечивает только целостность).</a:t>
             </a:r>
-            <a:endParaRPr lang="en-US" dirty="0" smtClean="0"/>
-          </a:p>
-          <a:p>
-            <a:r>
-              <a:rPr lang="ru-RU" dirty="0" smtClean="0"/>
+            <a:endParaRPr lang="en-US" dirty="0"/>
+          </a:p>
+          <a:p>
+            <a:r>
+              <a:rPr lang="ru-RU" dirty="0"/>
               <a:t>Вычисляется </a:t>
             </a:r>
             <a:r>
-              <a:rPr lang="en-US" dirty="0" smtClean="0"/>
+              <a:rPr lang="en-US" dirty="0"/>
               <a:t>MAC </a:t>
             </a:r>
             <a:r>
-              <a:rPr lang="ru-RU" dirty="0" smtClean="0"/>
+              <a:rPr lang="ru-RU" dirty="0"/>
               <a:t>на следующих данных</a:t>
             </a:r>
             <a:r>
-              <a:rPr lang="en-US" dirty="0" smtClean="0"/>
+              <a:rPr lang="en-US" dirty="0"/>
               <a:t>: </a:t>
             </a:r>
-            <a:endParaRPr lang="ru-RU" dirty="0" smtClean="0"/>
+            <a:endParaRPr lang="ru-RU" dirty="0"/>
           </a:p>
           <a:p>
             <a:pPr marL="0" indent="0" algn="ctr">
               <a:buNone/>
             </a:pPr>
             <a:r>
-              <a:rPr lang="en-US" dirty="0" smtClean="0"/>
+              <a:rPr lang="en-US" dirty="0"/>
               <a:t>SPI || sequence number (64 </a:t>
             </a:r>
             <a:r>
-              <a:rPr lang="ru-RU" dirty="0" smtClean="0"/>
+              <a:rPr lang="ru-RU" dirty="0"/>
               <a:t>бита)</a:t>
             </a:r>
             <a:r>
-              <a:rPr lang="en-US" dirty="0" smtClean="0"/>
+              <a:rPr lang="en-US" dirty="0"/>
               <a:t> || </a:t>
             </a:r>
             <a:r>
-              <a:rPr lang="en-US" dirty="0" err="1" smtClean="0"/>
+              <a:rPr lang="en-US" dirty="0" err="1"/>
               <a:t>ciphertext</a:t>
             </a:r>
             <a:r>
-              <a:rPr lang="en-US" dirty="0" smtClean="0"/>
+              <a:rPr lang="en-US" dirty="0"/>
               <a:t> </a:t>
             </a:r>
-            <a:endParaRPr lang="ru-RU" dirty="0" smtClean="0"/>
-          </a:p>
-          <a:p>
-            <a:r>
-              <a:rPr lang="ru-RU" dirty="0" smtClean="0"/>
+            <a:endParaRPr lang="ru-RU" dirty="0"/>
+          </a:p>
+          <a:p>
+            <a:r>
+              <a:rPr lang="ru-RU" dirty="0"/>
               <a:t>Инкапсуляция пакета в </a:t>
             </a:r>
             <a:r>
-              <a:rPr lang="en-US" dirty="0" smtClean="0"/>
+              <a:rPr lang="en-US" dirty="0"/>
               <a:t>IP </a:t>
             </a:r>
             <a:r>
-              <a:rPr lang="ru-RU" dirty="0" smtClean="0"/>
+              <a:rPr lang="ru-RU" dirty="0"/>
               <a:t>пакет</a:t>
             </a:r>
-            <a:endParaRPr lang="ru-RU" dirty="0"/>
           </a:p>
         </p:txBody>
       </p:sp>
@@ -4199,10 +4140,9 @@
           <a:lstStyle/>
           <a:p>
             <a:r>
-              <a:rPr lang="ru-RU" dirty="0" smtClean="0"/>
+              <a:rPr lang="ru-RU" dirty="0"/>
               <a:t>Прочие хитрости</a:t>
             </a:r>
-            <a:endParaRPr lang="ru-RU" dirty="0"/>
           </a:p>
         </p:txBody>
       </p:sp>
@@ -4222,64 +4162,63 @@
           <a:lstStyle/>
           <a:p>
             <a:r>
-              <a:rPr lang="en-US" dirty="0" smtClean="0"/>
+              <a:rPr lang="en-US" dirty="0"/>
               <a:t>TFC </a:t>
             </a:r>
             <a:r>
-              <a:rPr lang="ru-RU" dirty="0" smtClean="0"/>
+              <a:rPr lang="ru-RU" dirty="0"/>
               <a:t>дополнение (</a:t>
             </a:r>
             <a:r>
-              <a:rPr lang="en-US" dirty="0" smtClean="0"/>
+              <a:rPr lang="en-US" dirty="0"/>
               <a:t>traffic flow confidentiality) – </a:t>
             </a:r>
             <a:r>
-              <a:rPr lang="ru-RU" dirty="0" smtClean="0"/>
+              <a:rPr lang="ru-RU" dirty="0"/>
               <a:t>дополнение, для скрытия размера открытого текста, используется до дополнения до размера блочного шифра, произвольной длины</a:t>
             </a:r>
           </a:p>
           <a:p>
             <a:r>
-              <a:rPr lang="en-US" dirty="0" smtClean="0"/>
+              <a:rPr lang="en-US" dirty="0"/>
               <a:t>Dummy blocks </a:t>
             </a:r>
             <a:r>
-              <a:rPr lang="ru-RU" dirty="0" smtClean="0"/>
+              <a:rPr lang="ru-RU" dirty="0"/>
               <a:t>– блоки, не несущие полезной нагрузки, и отбрасываемые получателем при расшифровке.</a:t>
             </a:r>
-            <a:endParaRPr lang="en-US" dirty="0" smtClean="0"/>
-          </a:p>
-          <a:p>
             <a:endParaRPr lang="en-US" dirty="0"/>
           </a:p>
           <a:p>
-            <a:r>
-              <a:rPr lang="ru-RU" dirty="0" smtClean="0"/>
+            <a:endParaRPr lang="en-US" dirty="0"/>
+          </a:p>
+          <a:p>
+            <a:r>
+              <a:rPr lang="ru-RU" dirty="0"/>
               <a:t>Возможно только шифрование, без вычисление </a:t>
             </a:r>
             <a:r>
-              <a:rPr lang="en-US" dirty="0" smtClean="0"/>
+              <a:rPr lang="en-US" dirty="0"/>
               <a:t>MAC</a:t>
             </a:r>
           </a:p>
           <a:p>
             <a:pPr lvl="1"/>
             <a:r>
-              <a:rPr lang="ru-RU" dirty="0" smtClean="0"/>
+              <a:rPr lang="ru-RU" dirty="0"/>
               <a:t>Опасно, даже если предположить, что протоколы верхнего уровня обеспечивают целостность (получаем </a:t>
             </a:r>
             <a:r>
-              <a:rPr lang="en-US" dirty="0" smtClean="0"/>
+              <a:rPr lang="en-US" dirty="0"/>
               <a:t>mac-then-encrypt)</a:t>
             </a:r>
           </a:p>
           <a:p>
             <a:pPr lvl="1"/>
             <a:r>
-              <a:rPr lang="ru-RU" dirty="0" smtClean="0"/>
+              <a:rPr lang="ru-RU" dirty="0"/>
               <a:t>Безопасно, при использовании аутентичного шифрования</a:t>
             </a:r>
-            <a:endParaRPr lang="ru-RU" dirty="0"/>
           </a:p>
         </p:txBody>
       </p:sp>
@@ -4316,13 +4255,6 @@
   <p:clrMapOvr>
     <a:masterClrMapping/>
   </p:clrMapOvr>
-  <p:timing>
-    <p:tnLst>
-      <p:par>
-        <p:cTn id="1" dur="indefinite" restart="never" nodeType="tmRoot"/>
-      </p:par>
-    </p:tnLst>
-  </p:timing>
 </p:sld>
 </file>
 
@@ -4360,11 +4292,7 @@
           <a:p>
             <a:r>
               <a:rPr lang="en-US" b="1" dirty="0"/>
-              <a:t>The Cryptographic Doom </a:t>
-            </a:r>
-            <a:r>
-              <a:rPr lang="en-US" b="1" dirty="0" smtClean="0"/>
-              <a:t>Principle</a:t>
+              <a:t>The Cryptographic Doom Principle</a:t>
             </a:r>
             <a:endParaRPr lang="ru-RU" dirty="0"/>
           </a:p>
@@ -4426,13 +4354,6 @@
   <p:clrMapOvr>
     <a:masterClrMapping/>
   </p:clrMapOvr>
-  <p:timing>
-    <p:tnLst>
-      <p:par>
-        <p:cTn id="1" dur="indefinite" restart="never" nodeType="tmRoot"/>
-      </p:par>
-    </p:tnLst>
-  </p:timing>
 </p:sld>
 </file>
 
@@ -4469,7 +4390,7 @@
           <a:lstStyle/>
           <a:p>
             <a:r>
-              <a:rPr lang="en-US" dirty="0" smtClean="0"/>
+              <a:rPr lang="en-US" dirty="0"/>
               <a:t>SSH</a:t>
             </a:r>
             <a:endParaRPr lang="ru-RU" dirty="0"/>
@@ -4497,35 +4418,31 @@
               <a:buNone/>
             </a:pPr>
             <a:r>
-              <a:rPr lang="en-US" dirty="0" smtClean="0"/>
+              <a:rPr lang="en-US" dirty="0"/>
               <a:t>SSH (secure shell)</a:t>
             </a:r>
             <a:r>
               <a:rPr lang="ru-RU" dirty="0"/>
-              <a:t> </a:t>
-            </a:r>
-            <a:r>
-              <a:rPr lang="ru-RU" dirty="0" smtClean="0"/>
-              <a:t>– </a:t>
-            </a:r>
-            <a:r>
-              <a:rPr lang="ru-RU" dirty="0" err="1" smtClean="0"/>
+              <a:t> – </a:t>
+            </a:r>
+            <a:r>
+              <a:rPr lang="ru-RU" dirty="0" err="1"/>
               <a:t>утилитка</a:t>
             </a:r>
             <a:r>
-              <a:rPr lang="ru-RU" dirty="0" smtClean="0"/>
+              <a:rPr lang="ru-RU" dirty="0"/>
               <a:t> для удалённой консоли. Разработана как защищенная альтернатива </a:t>
             </a:r>
             <a:r>
-              <a:rPr lang="en-US" dirty="0" smtClean="0"/>
+              <a:rPr lang="en-US" dirty="0"/>
               <a:t>telnet. </a:t>
             </a:r>
             <a:r>
-              <a:rPr lang="ru-RU" dirty="0" smtClean="0"/>
+              <a:rPr lang="ru-RU" dirty="0"/>
               <a:t>Использует </a:t>
             </a:r>
             <a:r>
-              <a:rPr lang="en-US" dirty="0" smtClean="0"/>
+              <a:rPr lang="en-US" dirty="0"/>
               <a:t>MAC-and-Encrypt</a:t>
             </a:r>
           </a:p>
@@ -4542,55 +4459,55 @@
               <a:t>SSHv1</a:t>
             </a:r>
             <a:r>
-              <a:rPr lang="ru-RU" dirty="0" smtClean="0"/>
+              <a:rPr lang="ru-RU" dirty="0"/>
               <a:t>. «Что может пойти не так?»</a:t>
             </a:r>
           </a:p>
           <a:p>
             <a:r>
-              <a:rPr lang="ru-RU" dirty="0" smtClean="0"/>
+              <a:rPr lang="ru-RU" dirty="0"/>
               <a:t>Обеспечивает целостность данных при передаче используя </a:t>
             </a:r>
             <a:r>
-              <a:rPr lang="en-US" dirty="0" smtClean="0"/>
+              <a:rPr lang="en-US" dirty="0"/>
               <a:t>CRC</a:t>
             </a:r>
             <a:r>
-              <a:rPr lang="ru-RU" dirty="0" smtClean="0"/>
+              <a:rPr lang="ru-RU" dirty="0"/>
               <a:t> (что не только позволяет подделать </a:t>
             </a:r>
             <a:r>
-              <a:rPr lang="en-US" dirty="0" smtClean="0"/>
+              <a:rPr lang="en-US" dirty="0"/>
               <a:t>“MAC”</a:t>
             </a:r>
             <a:r>
-              <a:rPr lang="ru-RU" dirty="0" smtClean="0"/>
+              <a:rPr lang="ru-RU" dirty="0"/>
               <a:t>, но и узнать часть данных об открытом тексте)</a:t>
             </a:r>
           </a:p>
           <a:p>
             <a:r>
-              <a:rPr lang="ru-RU" dirty="0" smtClean="0"/>
+              <a:rPr lang="ru-RU" dirty="0"/>
               <a:t>Использует шифрование </a:t>
             </a:r>
             <a:r>
-              <a:rPr lang="en-US" dirty="0" smtClean="0"/>
+              <a:rPr lang="en-US" dirty="0"/>
               <a:t>CBC</a:t>
             </a:r>
             <a:r>
-              <a:rPr lang="ru-RU" dirty="0" smtClean="0"/>
+              <a:rPr lang="ru-RU" dirty="0"/>
               <a:t> с нулевым инициализирующем вектором</a:t>
             </a:r>
           </a:p>
           <a:p>
             <a:r>
-              <a:rPr lang="ru-RU" dirty="0" smtClean="0"/>
+              <a:rPr lang="ru-RU" dirty="0"/>
               <a:t>Использует одинаковый ключ для обоих направлений передачи данных</a:t>
             </a:r>
           </a:p>
           <a:p>
             <a:r>
-              <a:rPr lang="ru-RU" dirty="0" smtClean="0"/>
+              <a:rPr lang="ru-RU" dirty="0"/>
               <a:t>Использует неатомарное шифрование – расшифрованные происходит поточно, до проверки целостности данных (подробнее – далее).</a:t>
             </a:r>
             <a:endParaRPr lang="en-US" dirty="0"/>
@@ -4666,7 +4583,7 @@
           <a:lstStyle/>
           <a:p>
             <a:r>
-              <a:rPr lang="en-US" dirty="0" smtClean="0"/>
+              <a:rPr lang="en-US" dirty="0"/>
               <a:t>SSHv2</a:t>
             </a:r>
             <a:endParaRPr lang="ru-RU" dirty="0"/>
@@ -4697,11 +4614,11 @@
               <a:buNone/>
             </a:pPr>
             <a:r>
-              <a:rPr lang="en-US" dirty="0" smtClean="0"/>
+              <a:rPr lang="en-US" dirty="0"/>
               <a:t>1996, SSHv2.</a:t>
             </a:r>
             <a:r>
-              <a:rPr lang="ru-RU" dirty="0" smtClean="0"/>
+              <a:rPr lang="ru-RU" dirty="0"/>
               <a:t> Исправили большинство проблем.</a:t>
             </a:r>
           </a:p>
@@ -4710,7 +4627,7 @@
               <a:buNone/>
             </a:pPr>
             <a:r>
-              <a:rPr lang="ru-RU" dirty="0" smtClean="0"/>
+              <a:rPr lang="ru-RU" dirty="0"/>
               <a:t>Теперь использует 2 различных ключа для двух различных направлений передачи данных.</a:t>
             </a:r>
           </a:p>
@@ -4725,26 +4642,25 @@
               <a:buNone/>
             </a:pPr>
             <a:r>
-              <a:rPr lang="ru-RU" dirty="0" smtClean="0"/>
+              <a:rPr lang="ru-RU" dirty="0"/>
               <a:t>Использует </a:t>
             </a:r>
             <a:r>
-              <a:rPr lang="en-US" dirty="0" smtClean="0"/>
+              <a:rPr lang="en-US" dirty="0"/>
               <a:t>CPA </a:t>
             </a:r>
             <a:r>
-              <a:rPr lang="ru-RU" dirty="0" smtClean="0"/>
+              <a:rPr lang="ru-RU" dirty="0"/>
               <a:t>стойкое шифрование и стойкий </a:t>
             </a:r>
             <a:r>
-              <a:rPr lang="en-US" dirty="0" smtClean="0"/>
+              <a:rPr lang="en-US" dirty="0"/>
               <a:t>MAC</a:t>
             </a:r>
             <a:r>
-              <a:rPr lang="ru-RU" dirty="0" smtClean="0"/>
+              <a:rPr lang="ru-RU" dirty="0"/>
               <a:t>.</a:t>
             </a:r>
-            <a:endParaRPr lang="ru-RU" dirty="0"/>
           </a:p>
         </p:txBody>
       </p:sp>
@@ -4841,7 +4757,7 @@
           <a:lstStyle/>
           <a:p>
             <a:r>
-              <a:rPr lang="en-US" dirty="0" smtClean="0"/>
+              <a:rPr lang="en-US" dirty="0"/>
               <a:t>SSHv2</a:t>
             </a:r>
             <a:endParaRPr lang="ru-RU" dirty="0"/>
@@ -4874,17 +4790,17 @@
               <a:buNone/>
             </a:pPr>
             <a:r>
-              <a:rPr lang="ru-RU" dirty="0" smtClean="0"/>
+              <a:rPr lang="ru-RU" dirty="0"/>
               <a:t>Шифрование</a:t>
             </a:r>
             <a:r>
-              <a:rPr lang="en-US" dirty="0" smtClean="0"/>
+              <a:rPr lang="en-US" dirty="0"/>
               <a:t>:</a:t>
             </a:r>
           </a:p>
           <a:p>
             <a:r>
-              <a:rPr lang="ru-RU" dirty="0" smtClean="0"/>
+              <a:rPr lang="ru-RU" dirty="0"/>
               <a:t>Открытый текст дополняется случайными байтами для выравнивание до длины блочного шифра, от 4 до 255 байт</a:t>
             </a:r>
           </a:p>
@@ -4894,108 +4810,96 @@
             </a:pPr>
             <a:r>
               <a:rPr lang="en-US" dirty="0"/>
-              <a:t>p</a:t>
-            </a:r>
-            <a:r>
-              <a:rPr lang="en-US" dirty="0" smtClean="0"/>
-              <a:t>laintext = ||packet-</a:t>
-            </a:r>
-            <a:r>
-              <a:rPr lang="en-US" dirty="0" err="1" smtClean="0"/>
+              <a:t>plaintext = ||packet-</a:t>
+            </a:r>
+            <a:r>
+              <a:rPr lang="en-US" dirty="0" err="1"/>
               <a:t>len</a:t>
             </a:r>
             <a:r>
-              <a:rPr lang="en-US" dirty="0" smtClean="0"/>
+              <a:rPr lang="en-US" dirty="0"/>
               <a:t>||pad-length||message||pad</a:t>
             </a:r>
-            <a:endParaRPr lang="ru-RU" dirty="0" smtClean="0"/>
-          </a:p>
-          <a:p>
-            <a:r>
-              <a:rPr lang="ru-RU" dirty="0" smtClean="0"/>
+            <a:endParaRPr lang="ru-RU" dirty="0"/>
+          </a:p>
+          <a:p>
+            <a:r>
+              <a:rPr lang="ru-RU" dirty="0"/>
               <a:t>Зашифрованные с использованием </a:t>
             </a:r>
             <a:r>
-              <a:rPr lang="en-US" dirty="0" smtClean="0"/>
+              <a:rPr lang="en-US" dirty="0"/>
               <a:t>AES </a:t>
             </a:r>
             <a:r>
-              <a:rPr lang="ru-RU" dirty="0" smtClean="0"/>
+              <a:rPr lang="ru-RU" dirty="0"/>
               <a:t>в </a:t>
             </a:r>
             <a:r>
-              <a:rPr lang="ru-RU" dirty="0" err="1" smtClean="0"/>
+              <a:rPr lang="ru-RU" dirty="0" err="1"/>
               <a:t>рандомизированном</a:t>
             </a:r>
             <a:r>
-              <a:rPr lang="ru-RU" dirty="0" smtClean="0"/>
+              <a:rPr lang="ru-RU" dirty="0"/>
               <a:t> </a:t>
             </a:r>
             <a:r>
-              <a:rPr lang="en-US" dirty="0" smtClean="0"/>
+              <a:rPr lang="en-US" dirty="0"/>
               <a:t>CBC </a:t>
             </a:r>
             <a:r>
-              <a:rPr lang="ru-RU" dirty="0" smtClean="0"/>
+              <a:rPr lang="ru-RU" dirty="0"/>
               <a:t>режиме и использованием симметричного ключа для данного направления (но использует предсказуемый </a:t>
             </a:r>
             <a:r>
-              <a:rPr lang="en-US" dirty="0" smtClean="0"/>
+              <a:rPr lang="en-US" dirty="0"/>
               <a:t>IV </a:t>
             </a:r>
             <a:r>
-              <a:rPr lang="ru-RU" dirty="0" smtClean="0"/>
+              <a:rPr lang="ru-RU" dirty="0"/>
               <a:t>для последующих блоков, используя последний блок </a:t>
             </a:r>
             <a:r>
-              <a:rPr lang="ru-RU" dirty="0" err="1" smtClean="0"/>
+              <a:rPr lang="ru-RU" dirty="0" err="1"/>
               <a:t>шифртекста</a:t>
             </a:r>
             <a:r>
-              <a:rPr lang="ru-RU" dirty="0" smtClean="0"/>
+              <a:rPr lang="ru-RU" dirty="0"/>
               <a:t>, было исправлено но не сразу)</a:t>
             </a:r>
-            <a:endParaRPr lang="en-US" dirty="0" smtClean="0"/>
-          </a:p>
-          <a:p>
-            <a:r>
-              <a:rPr lang="ru-RU" dirty="0" smtClean="0"/>
+            <a:endParaRPr lang="en-US" dirty="0"/>
+          </a:p>
+          <a:p>
+            <a:r>
+              <a:rPr lang="ru-RU" dirty="0"/>
               <a:t>Вычисляет </a:t>
             </a:r>
             <a:r>
-              <a:rPr lang="en-US" dirty="0" smtClean="0"/>
+              <a:rPr lang="en-US" dirty="0"/>
               <a:t>MAC </a:t>
             </a:r>
             <a:r>
-              <a:rPr lang="ru-RU" dirty="0" smtClean="0"/>
+              <a:rPr lang="ru-RU" dirty="0"/>
               <a:t>для </a:t>
             </a:r>
             <a:r>
-              <a:rPr lang="en-US" dirty="0" smtClean="0"/>
+              <a:rPr lang="en-US" dirty="0"/>
               <a:t>sequence number </a:t>
             </a:r>
             <a:r>
-              <a:rPr lang="ru-RU" dirty="0" smtClean="0"/>
+              <a:rPr lang="ru-RU" dirty="0"/>
               <a:t>и </a:t>
             </a:r>
             <a:r>
-              <a:rPr lang="en-US" dirty="0" smtClean="0"/>
+              <a:rPr lang="en-US" dirty="0"/>
               <a:t>plaintext</a:t>
             </a:r>
             <a:r>
-              <a:rPr lang="ru-RU" dirty="0" smtClean="0"/>
-              <a:t>. Множество алгоритмов, </a:t>
-            </a:r>
-            <a:r>
-              <a:rPr lang="ru-RU" dirty="0" err="1" smtClean="0"/>
-              <a:t>включа</a:t>
-            </a:r>
-            <a:r>
-              <a:rPr lang="ru-RU" dirty="0" smtClean="0"/>
-              <a:t> </a:t>
-            </a:r>
-            <a:r>
-              <a:rPr lang="en-US" dirty="0" smtClean="0"/>
+              <a:rPr lang="ru-RU" dirty="0"/>
+              <a:t>. Множество алгоритмов, включая </a:t>
+            </a:r>
+            <a:r>
+              <a:rPr lang="en-US" dirty="0"/>
               <a:t>HMAC-SHA1-160</a:t>
             </a:r>
             <a:endParaRPr lang="ru-RU" dirty="0"/>
@@ -5035,13 +4939,6 @@
   <p:clrMapOvr>
     <a:masterClrMapping/>
   </p:clrMapOvr>
-  <p:timing>
-    <p:tnLst>
-      <p:par>
-        <p:cTn id="1" dur="indefinite" restart="never" nodeType="tmRoot"/>
-      </p:par>
-    </p:tnLst>
-  </p:timing>
 </p:sld>
 </file>
 
@@ -5078,7 +4975,7 @@
           <a:lstStyle/>
           <a:p>
             <a:r>
-              <a:rPr lang="en-US" dirty="0" smtClean="0"/>
+              <a:rPr lang="en-US" dirty="0"/>
               <a:t>SSHv2</a:t>
             </a:r>
             <a:endParaRPr lang="ru-RU" dirty="0"/>
@@ -5109,35 +5006,35 @@
               <a:buNone/>
             </a:pPr>
             <a:r>
-              <a:rPr lang="ru-RU" dirty="0" err="1" smtClean="0"/>
+              <a:rPr lang="ru-RU" dirty="0" err="1"/>
               <a:t>Расшифрование</a:t>
             </a:r>
             <a:r>
-              <a:rPr lang="en-US" dirty="0" smtClean="0"/>
+              <a:rPr lang="en-US" dirty="0"/>
               <a:t>:</a:t>
             </a:r>
           </a:p>
           <a:p>
             <a:r>
-              <a:rPr lang="ru-RU" dirty="0" err="1" smtClean="0"/>
+              <a:rPr lang="ru-RU" dirty="0" err="1"/>
               <a:t>Расшифрование</a:t>
             </a:r>
             <a:r>
-              <a:rPr lang="ru-RU" dirty="0" smtClean="0"/>
+              <a:rPr lang="ru-RU" dirty="0"/>
               <a:t> поля </a:t>
             </a:r>
             <a:r>
-              <a:rPr lang="en-US" dirty="0" smtClean="0"/>
+              <a:rPr lang="en-US" dirty="0"/>
               <a:t>packet length</a:t>
             </a:r>
             <a:r>
-              <a:rPr lang="ru-RU" dirty="0" smtClean="0"/>
+              <a:rPr lang="ru-RU" dirty="0"/>
               <a:t> используя ключ, для данного направления.</a:t>
             </a:r>
           </a:p>
           <a:p>
             <a:r>
-              <a:rPr lang="ru-RU" dirty="0" smtClean="0"/>
+              <a:rPr lang="ru-RU" dirty="0"/>
               <a:t>Считать </a:t>
             </a:r>
             <a:r>
@@ -5146,47 +5043,43 @@
             </a:r>
             <a:r>
               <a:rPr lang="ru-RU" dirty="0"/>
-              <a:t> </a:t>
-            </a:r>
-            <a:r>
-              <a:rPr lang="ru-RU" dirty="0" smtClean="0"/>
-              <a:t>+ </a:t>
-            </a:r>
-            <a:r>
-              <a:rPr lang="en-US" dirty="0" smtClean="0"/>
+              <a:t> + </a:t>
+            </a:r>
+            <a:r>
+              <a:rPr lang="en-US" dirty="0"/>
               <a:t>(</a:t>
             </a:r>
             <a:r>
-              <a:rPr lang="ru-RU" dirty="0" smtClean="0"/>
+              <a:rPr lang="ru-RU" dirty="0"/>
               <a:t>длина </a:t>
             </a:r>
             <a:r>
-              <a:rPr lang="en-US" dirty="0" smtClean="0"/>
+              <a:rPr lang="en-US" dirty="0"/>
               <a:t>MAC)</a:t>
             </a:r>
             <a:r>
-              <a:rPr lang="ru-RU" dirty="0" smtClean="0"/>
+              <a:rPr lang="ru-RU" dirty="0"/>
               <a:t> байт из канала связи</a:t>
             </a:r>
           </a:p>
           <a:p>
             <a:r>
-              <a:rPr lang="ru-RU" dirty="0" smtClean="0"/>
+              <a:rPr lang="ru-RU" dirty="0"/>
               <a:t>Расшифровать оставшийся </a:t>
             </a:r>
             <a:r>
-              <a:rPr lang="ru-RU" dirty="0" err="1" smtClean="0"/>
+              <a:rPr lang="ru-RU" dirty="0" err="1"/>
               <a:t>шифртекст</a:t>
             </a:r>
-            <a:endParaRPr lang="ru-RU" dirty="0" smtClean="0"/>
-          </a:p>
-          <a:p>
-            <a:r>
-              <a:rPr lang="ru-RU" dirty="0" smtClean="0"/>
+            <a:endParaRPr lang="ru-RU" dirty="0"/>
+          </a:p>
+          <a:p>
+            <a:r>
+              <a:rPr lang="ru-RU" dirty="0"/>
               <a:t>Проверить </a:t>
             </a:r>
             <a:r>
-              <a:rPr lang="en-US" dirty="0" smtClean="0"/>
+              <a:rPr lang="en-US" dirty="0"/>
               <a:t>MAC</a:t>
             </a:r>
             <a:endParaRPr lang="ru-RU" dirty="0"/>
@@ -5226,13 +5119,6 @@
   <p:clrMapOvr>
     <a:masterClrMapping/>
   </p:clrMapOvr>
-  <p:timing>
-    <p:tnLst>
-      <p:par>
-        <p:cTn id="1" dur="indefinite" restart="never" nodeType="tmRoot"/>
-      </p:par>
-    </p:tnLst>
-  </p:timing>
 </p:sld>
 </file>
 
@@ -5269,11 +5155,11 @@
           <a:lstStyle/>
           <a:p>
             <a:r>
-              <a:rPr lang="ru-RU" dirty="0" smtClean="0"/>
+              <a:rPr lang="ru-RU" dirty="0"/>
               <a:t>Проблемы и особенности </a:t>
             </a:r>
             <a:r>
-              <a:rPr lang="en-US" dirty="0" smtClean="0"/>
+              <a:rPr lang="en-US" dirty="0"/>
               <a:t>SSHv2</a:t>
             </a:r>
             <a:endParaRPr lang="ru-RU" dirty="0"/>
@@ -5298,80 +5184,76 @@
           <a:lstStyle/>
           <a:p>
             <a:r>
-              <a:rPr lang="ru-RU" dirty="0" smtClean="0"/>
+              <a:rPr lang="ru-RU" dirty="0"/>
               <a:t>Некоторые сочетания алгоритмов не являются стойкими</a:t>
             </a:r>
           </a:p>
           <a:p>
             <a:r>
-              <a:rPr lang="ru-RU" dirty="0" smtClean="0"/>
+              <a:rPr lang="ru-RU" dirty="0"/>
               <a:t>Используется шифрование длины пакета</a:t>
             </a:r>
           </a:p>
           <a:p>
             <a:pPr lvl="1"/>
             <a:r>
-              <a:rPr lang="ru-RU" dirty="0" smtClean="0"/>
+              <a:rPr lang="ru-RU" dirty="0"/>
               <a:t>Используется сокрытие длины пакета</a:t>
             </a:r>
           </a:p>
           <a:p>
             <a:pPr lvl="1"/>
             <a:r>
-              <a:rPr lang="ru-RU" dirty="0" smtClean="0"/>
+              <a:rPr lang="ru-RU" dirty="0"/>
               <a:t>Используется для неатомарного </a:t>
             </a:r>
             <a:r>
-              <a:rPr lang="ru-RU" dirty="0" err="1" smtClean="0"/>
+              <a:rPr lang="ru-RU" dirty="0" err="1"/>
               <a:t>расшифрования</a:t>
             </a:r>
-            <a:endParaRPr lang="en-US" dirty="0" smtClean="0"/>
+            <a:endParaRPr lang="en-US" dirty="0"/>
           </a:p>
           <a:p>
             <a:pPr lvl="1"/>
             <a:r>
-              <a:rPr lang="ru-RU" dirty="0" smtClean="0"/>
+              <a:rPr lang="ru-RU" dirty="0"/>
               <a:t>Исправляется костылями в хороших реализациях (</a:t>
             </a:r>
             <a:r>
               <a:rPr lang="en-US" dirty="0"/>
-              <a:t>Breaking and provably repairing the SSH authenticated encryption scheme: A case study of the Encode-then-Encrypt-and-MAC </a:t>
-            </a:r>
-            <a:r>
-              <a:rPr lang="en-US" dirty="0" smtClean="0"/>
-              <a:t>paradigm</a:t>
-            </a:r>
-            <a:r>
-              <a:rPr lang="ru-RU" dirty="0" smtClean="0"/>
+              <a:t>Breaking and provably repairing the SSH authenticated encryption scheme: A case study of the Encode-then-Encrypt-and-MAC paradigm</a:t>
+            </a:r>
+            <a:r>
+              <a:rPr lang="ru-RU" dirty="0"/>
               <a:t>) </a:t>
             </a:r>
           </a:p>
           <a:p>
             <a:pPr marL="342900" lvl="1" indent="-342900"/>
             <a:r>
-              <a:rPr lang="ru-RU" dirty="0" smtClean="0"/>
+              <a:rPr lang="ru-RU" dirty="0"/>
               <a:t>Шифрование «посимвольное», т.е. частота пакетов соответствует частоте нажатия клавиш</a:t>
             </a:r>
           </a:p>
           <a:p>
             <a:pPr marL="800100" lvl="2" indent="-342900"/>
             <a:r>
-              <a:rPr lang="ru-RU" sz="2400" dirty="0" smtClean="0"/>
+              <a:rPr lang="ru-RU" sz="2400" dirty="0"/>
               <a:t>Частотное восстановление открытого текста</a:t>
             </a:r>
           </a:p>
           <a:p>
             <a:pPr marL="800100" lvl="2" indent="-342900"/>
             <a:r>
-              <a:rPr lang="ru-RU" sz="2400" dirty="0" smtClean="0"/>
-              <a:t>Используя «</a:t>
-            </a:r>
-            <a:r>
-              <a:rPr lang="en-US" sz="2400" dirty="0" smtClean="0"/>
+              <a:rPr lang="ru-RU" sz="2400" dirty="0"/>
+              <a:t>Используется «</a:t>
+            </a:r>
+            <a:r>
+              <a:rPr lang="en-US" sz="2400" dirty="0"/>
               <a:t>dummy blocks</a:t>
             </a:r>
             <a:r>
-              <a:rPr lang="ru-RU" sz="2400" dirty="0" smtClean="0"/>
+              <a:rPr lang="ru-RU" sz="2400" dirty="0"/>
               <a:t>» для защиты</a:t>
             </a:r>
           </a:p>
@@ -5379,17 +5261,16 @@
             <a:pPr marL="0" lvl="1" indent="0">
               <a:buNone/>
             </a:pPr>
-            <a:endParaRPr lang="ru-RU" dirty="0" smtClean="0"/>
+            <a:endParaRPr lang="ru-RU" dirty="0"/>
           </a:p>
           <a:p>
             <a:pPr marL="0" lvl="1" indent="0">
               <a:buNone/>
             </a:pPr>
             <a:r>
-              <a:rPr lang="ru-RU" dirty="0" smtClean="0"/>
+              <a:rPr lang="ru-RU" dirty="0"/>
               <a:t>Основной проблемой является использование части открытого текста (длины пакета) до проверки её целостности, что ведёт к атаке.</a:t>
             </a:r>
-            <a:endParaRPr lang="ru-RU" dirty="0"/>
           </a:p>
         </p:txBody>
       </p:sp>
@@ -5426,13 +5307,6 @@
   <p:clrMapOvr>
     <a:masterClrMapping/>
   </p:clrMapOvr>
-  <p:timing>
-    <p:tnLst>
-      <p:par>
-        <p:cTn id="1" dur="indefinite" restart="never" nodeType="tmRoot"/>
-      </p:par>
-    </p:tnLst>
-  </p:timing>
 </p:sld>
 </file>
 
@@ -5469,10 +5343,9 @@
           <a:lstStyle/>
           <a:p>
             <a:r>
-              <a:rPr lang="ru-RU" dirty="0" smtClean="0"/>
+              <a:rPr lang="ru-RU" dirty="0"/>
               <a:t>Тест.</a:t>
             </a:r>
-            <a:endParaRPr lang="ru-RU" dirty="0"/>
           </a:p>
         </p:txBody>
       </p:sp>
@@ -5497,41 +5370,40 @@
           <a:lstStyle/>
           <a:p>
             <a:r>
-              <a:rPr lang="ru-RU" dirty="0" smtClean="0"/>
+              <a:rPr lang="ru-RU" dirty="0"/>
               <a:t>Положить телефон экраном вниз справа от себя</a:t>
             </a:r>
           </a:p>
           <a:p>
             <a:r>
-              <a:rPr lang="ru-RU" dirty="0" smtClean="0"/>
+              <a:rPr lang="ru-RU" dirty="0"/>
               <a:t>Не разговаривать с соседями</a:t>
             </a:r>
           </a:p>
           <a:p>
             <a:r>
-              <a:rPr lang="ru-RU" dirty="0" smtClean="0"/>
+              <a:rPr lang="ru-RU" dirty="0"/>
               <a:t>Не пользоваться конспектами и электронными устройствами</a:t>
             </a:r>
           </a:p>
           <a:p>
             <a:r>
-              <a:rPr lang="ru-RU" dirty="0" smtClean="0"/>
+              <a:rPr lang="ru-RU" dirty="0"/>
               <a:t>Написать номер (по таблице) и ФИО на листочке</a:t>
             </a:r>
           </a:p>
           <a:p>
             <a:r>
-              <a:rPr lang="ru-RU" dirty="0" smtClean="0"/>
+              <a:rPr lang="ru-RU" dirty="0"/>
               <a:t>Написать краткий ответ на вопрос</a:t>
             </a:r>
-            <a:endParaRPr lang="en-US" dirty="0" smtClean="0"/>
-          </a:p>
-          <a:p>
-            <a:r>
-              <a:rPr lang="ru-RU" dirty="0" smtClean="0"/>
+            <a:endParaRPr lang="en-US" dirty="0"/>
+          </a:p>
+          <a:p>
+            <a:r>
+              <a:rPr lang="ru-RU" dirty="0"/>
               <a:t>Дождаться окончания теста</a:t>
             </a:r>
-            <a:endParaRPr lang="ru-RU" dirty="0"/>
           </a:p>
         </p:txBody>
       </p:sp>
@@ -5718,14 +5590,14 @@
           <a:lstStyle/>
           <a:p>
             <a:r>
-              <a:rPr lang="en-US" sz="2600" dirty="0" smtClean="0"/>
+              <a:rPr lang="en-US" sz="2600" dirty="0"/>
               <a:t>1 </a:t>
             </a:r>
             <a:r>
-              <a:rPr lang="ru-RU" sz="2600" dirty="0" smtClean="0"/>
+              <a:rPr lang="ru-RU" sz="2600" dirty="0"/>
               <a:t>вопрос. </a:t>
             </a:r>
-            <a:endParaRPr lang="en-US" sz="2600" dirty="0" smtClean="0"/>
+            <a:endParaRPr lang="en-US" sz="2600" dirty="0"/>
           </a:p>
           <a:p>
             <a:endParaRPr lang="en-US" sz="2600" dirty="0"/>
@@ -5742,13 +5614,6 @@
   <p:clrMapOvr>
     <a:masterClrMapping/>
   </p:clrMapOvr>
-  <p:timing>
-    <p:tnLst>
-      <p:par>
-        <p:cTn id="1" dur="indefinite" restart="never" nodeType="tmRoot"/>
-      </p:par>
-    </p:tnLst>
-  </p:timing>
 </p:sld>
 </file>
 
@@ -5785,10 +5650,9 @@
           <a:lstStyle/>
           <a:p>
             <a:r>
-              <a:rPr lang="ru-RU" dirty="0" smtClean="0"/>
+              <a:rPr lang="ru-RU" dirty="0"/>
               <a:t>Атака на неатомарное шифрование</a:t>
             </a:r>
-            <a:endParaRPr lang="ru-RU" dirty="0"/>
           </a:p>
         </p:txBody>
       </p:sp>
@@ -5812,11 +5676,11 @@
               <a:lstStyle/>
               <a:p>
                 <a:r>
-                  <a:rPr lang="ru-RU" dirty="0" smtClean="0"/>
+                  <a:rPr lang="ru-RU" dirty="0"/>
                   <a:t>Пусть противник имеет некоторый 16 байтный </a:t>
                 </a:r>
                 <a:r>
-                  <a:rPr lang="ru-RU" dirty="0" err="1" smtClean="0"/>
+                  <a:rPr lang="ru-RU" dirty="0" err="1"/>
                   <a:t>шифртекст</a:t>
                 </a:r>
                 <a:r>
@@ -5834,87 +5698,86 @@
                   </m:oMath>
                 </a14:m>
                 <a:r>
-                  <a:rPr lang="ru-RU" dirty="0" smtClean="0"/>
+                  <a:rPr lang="ru-RU" dirty="0"/>
                   <a:t>.</a:t>
                 </a:r>
               </a:p>
               <a:p>
                 <a:r>
-                  <a:rPr lang="ru-RU" dirty="0" smtClean="0"/>
+                  <a:rPr lang="ru-RU" dirty="0"/>
                   <a:t>Противник отправляет </a:t>
                 </a:r>
                 <a:r>
-                  <a:rPr lang="ru-RU" dirty="0" err="1" smtClean="0"/>
+                  <a:rPr lang="ru-RU" dirty="0" err="1"/>
                   <a:t>шифртекст</a:t>
                 </a:r>
                 <a:r>
-                  <a:rPr lang="ru-RU" dirty="0" smtClean="0"/>
+                  <a:rPr lang="ru-RU" dirty="0"/>
                   <a:t> внутри </a:t>
                 </a:r>
                 <a:r>
-                  <a:rPr lang="en-US" dirty="0" err="1" smtClean="0"/>
+                  <a:rPr lang="en-US" dirty="0" err="1"/>
                   <a:t>ssh</a:t>
                 </a:r>
                 <a:r>
-                  <a:rPr lang="en-US" dirty="0" smtClean="0"/>
+                  <a:rPr lang="en-US" dirty="0"/>
                   <a:t> </a:t>
                 </a:r>
                 <a:r>
-                  <a:rPr lang="ru-RU" dirty="0" smtClean="0"/>
+                  <a:rPr lang="ru-RU" dirty="0"/>
                   <a:t>пакета на сервер.</a:t>
                 </a:r>
               </a:p>
               <a:p>
                 <a:r>
-                  <a:rPr lang="ru-RU" dirty="0" smtClean="0"/>
+                  <a:rPr lang="ru-RU" dirty="0"/>
                   <a:t>Сервер расшифровывает первые 4 байта и интерпретирует их как количество пакетов, которые необходимо получить </a:t>
                 </a:r>
               </a:p>
               <a:p>
                 <a:r>
-                  <a:rPr lang="ru-RU" dirty="0" smtClean="0"/>
+                  <a:rPr lang="ru-RU" dirty="0"/>
                   <a:t>Противник отправляет побайтно случайные биты серверу, считая их количество</a:t>
                 </a:r>
               </a:p>
               <a:p>
                 <a:r>
-                  <a:rPr lang="ru-RU" dirty="0" smtClean="0"/>
+                  <a:rPr lang="ru-RU" dirty="0"/>
                   <a:t>Сервер, считав необходимое число байт + число байт для </a:t>
                 </a:r>
                 <a:r>
-                  <a:rPr lang="en-US" dirty="0" smtClean="0"/>
+                  <a:rPr lang="en-US" dirty="0"/>
                   <a:t>MAC</a:t>
                 </a:r>
                 <a:r>
-                  <a:rPr lang="ru-RU" dirty="0" smtClean="0"/>
+                  <a:rPr lang="ru-RU" dirty="0"/>
                   <a:t>, проверяет </a:t>
                 </a:r>
                 <a:r>
-                  <a:rPr lang="en-US" dirty="0" smtClean="0"/>
+                  <a:rPr lang="en-US" dirty="0"/>
                   <a:t>MAC</a:t>
                 </a:r>
                 <a:r>
-                  <a:rPr lang="ru-RU" dirty="0" smtClean="0"/>
+                  <a:rPr lang="ru-RU" dirty="0"/>
                   <a:t> (который очевидно не сходится) и возвращает ошибку</a:t>
                 </a:r>
               </a:p>
               <a:p>
                 <a:r>
-                  <a:rPr lang="ru-RU" dirty="0" smtClean="0"/>
+                  <a:rPr lang="ru-RU" dirty="0"/>
                   <a:t>Противник зная количество отправленных байтов восстанавливает первые 4 байта </a:t>
                 </a:r>
                 <a:r>
-                  <a:rPr lang="ru-RU" dirty="0" err="1" smtClean="0"/>
+                  <a:rPr lang="ru-RU" dirty="0" err="1"/>
                   <a:t>шифртекста</a:t>
                 </a:r>
                 <a:endParaRPr lang="ru-RU" dirty="0"/>
               </a:p>
               <a:p>
                 <a:r>
-                  <a:rPr lang="ru-RU" dirty="0" smtClean="0"/>
+                  <a:rPr lang="ru-RU" dirty="0"/>
                   <a:t>Если шифруется каждое нажатие, то фактически можно читать весь трафик</a:t>
                 </a:r>
-                <a:endParaRPr lang="ru-RU" dirty="0"/>
               </a:p>
             </p:txBody>
           </p:sp>
@@ -5986,13 +5849,6 @@
   <p:clrMapOvr>
     <a:masterClrMapping/>
   </p:clrMapOvr>
-  <p:timing>
-    <p:tnLst>
-      <p:par>
-        <p:cTn id="1" dur="indefinite" restart="never" nodeType="tmRoot"/>
-      </p:par>
-    </p:tnLst>
-  </p:timing>
 </p:sld>
 </file>
 
@@ -6029,7 +5885,7 @@
           <a:lstStyle/>
           <a:p>
             <a:r>
-              <a:rPr lang="en-US" dirty="0" smtClean="0"/>
+              <a:rPr lang="en-US" dirty="0"/>
               <a:t>SSL 3.0</a:t>
             </a:r>
             <a:endParaRPr lang="ru-RU" dirty="0"/>
@@ -6055,123 +5911,123 @@
               <a:buNone/>
             </a:pPr>
             <a:r>
-              <a:rPr lang="en-US" dirty="0" smtClean="0"/>
+              <a:rPr lang="en-US" dirty="0"/>
               <a:t>SSL 3.0 – </a:t>
             </a:r>
             <a:r>
-              <a:rPr lang="ru-RU" dirty="0" smtClean="0"/>
+              <a:rPr lang="ru-RU" dirty="0"/>
               <a:t>протокол для установления защищенного канала</a:t>
             </a:r>
           </a:p>
           <a:p>
             <a:r>
-              <a:rPr lang="ru-RU" dirty="0" smtClean="0"/>
+              <a:rPr lang="ru-RU" dirty="0"/>
               <a:t>Использует </a:t>
             </a:r>
             <a:r>
-              <a:rPr lang="en-US" dirty="0" smtClean="0"/>
+              <a:rPr lang="en-US" dirty="0"/>
               <a:t>MAC-then-Encrypt</a:t>
             </a:r>
-            <a:endParaRPr lang="ru-RU" dirty="0" smtClean="0"/>
-          </a:p>
-          <a:p>
-            <a:r>
-              <a:rPr lang="ru-RU" dirty="0" smtClean="0"/>
+            <a:endParaRPr lang="ru-RU" dirty="0"/>
+          </a:p>
+          <a:p>
+            <a:r>
+              <a:rPr lang="ru-RU" dirty="0"/>
               <a:t>Возможно использование </a:t>
             </a:r>
             <a:r>
-              <a:rPr lang="ru-RU" dirty="0" err="1" smtClean="0"/>
+              <a:rPr lang="ru-RU" dirty="0" err="1"/>
               <a:t>Рандомизированный</a:t>
             </a:r>
             <a:r>
-              <a:rPr lang="ru-RU" dirty="0" smtClean="0"/>
+              <a:rPr lang="ru-RU" dirty="0"/>
               <a:t> </a:t>
             </a:r>
             <a:r>
-              <a:rPr lang="en-US" dirty="0" smtClean="0"/>
+              <a:rPr lang="en-US" dirty="0"/>
               <a:t>CBC (CPA </a:t>
             </a:r>
             <a:r>
-              <a:rPr lang="ru-RU" dirty="0" smtClean="0"/>
+              <a:rPr lang="ru-RU" dirty="0"/>
               <a:t>стойкий)</a:t>
             </a:r>
             <a:r>
-              <a:rPr lang="en-US" dirty="0" smtClean="0"/>
+              <a:rPr lang="en-US" dirty="0"/>
               <a:t> </a:t>
             </a:r>
             <a:r>
-              <a:rPr lang="ru-RU" dirty="0" smtClean="0"/>
+              <a:rPr lang="ru-RU" dirty="0"/>
               <a:t>и стойкий </a:t>
             </a:r>
             <a:r>
-              <a:rPr lang="en-US" dirty="0" smtClean="0"/>
+              <a:rPr lang="en-US" dirty="0"/>
               <a:t>MAC</a:t>
             </a:r>
-            <a:endParaRPr lang="ru-RU" dirty="0" smtClean="0"/>
-          </a:p>
-          <a:p>
-            <a:r>
-              <a:rPr lang="ru-RU" dirty="0" smtClean="0"/>
+            <a:endParaRPr lang="ru-RU" dirty="0"/>
+          </a:p>
+          <a:p>
+            <a:r>
+              <a:rPr lang="ru-RU" dirty="0"/>
               <a:t>Использует дополнение. (</a:t>
             </a:r>
             <a:r>
-              <a:rPr lang="en-US" dirty="0" smtClean="0"/>
+              <a:rPr lang="en-US" dirty="0"/>
               <a:t>CBC </a:t>
             </a:r>
             <a:r>
-              <a:rPr lang="ru-RU" dirty="0" smtClean="0"/>
+              <a:rPr lang="ru-RU" dirty="0"/>
               <a:t>с дополнением в схеме </a:t>
             </a:r>
             <a:r>
-              <a:rPr lang="en-US" dirty="0" smtClean="0"/>
+              <a:rPr lang="en-US" dirty="0"/>
               <a:t>Encrypt-then-MAC</a:t>
             </a:r>
             <a:r>
-              <a:rPr lang="ru-RU" dirty="0" smtClean="0"/>
+              <a:rPr lang="ru-RU" dirty="0"/>
               <a:t> – не стойкая)</a:t>
             </a:r>
           </a:p>
           <a:p>
             <a:r>
-              <a:rPr lang="ru-RU" dirty="0" smtClean="0"/>
+              <a:rPr lang="ru-RU" dirty="0"/>
               <a:t>Сломан, возможна атака на </a:t>
             </a:r>
             <a:r>
-              <a:rPr lang="ru-RU" dirty="0" err="1" smtClean="0"/>
+              <a:rPr lang="ru-RU" dirty="0" err="1"/>
               <a:t>расшифрование</a:t>
             </a:r>
             <a:r>
-              <a:rPr lang="ru-RU" dirty="0" smtClean="0"/>
+              <a:rPr lang="ru-RU" dirty="0"/>
               <a:t>.</a:t>
             </a:r>
           </a:p>
           <a:p>
             <a:r>
-              <a:rPr lang="en-US" dirty="0" smtClean="0"/>
+              <a:rPr lang="en-US" dirty="0"/>
               <a:t>SSL 3.0 </a:t>
             </a:r>
             <a:r>
-              <a:rPr lang="ru-RU" dirty="0" smtClean="0"/>
+              <a:rPr lang="ru-RU" dirty="0"/>
               <a:t>и </a:t>
             </a:r>
             <a:r>
-              <a:rPr lang="en-US" dirty="0" smtClean="0"/>
+              <a:rPr lang="en-US" dirty="0"/>
               <a:t>TLS 1.0 </a:t>
             </a:r>
             <a:r>
-              <a:rPr lang="ru-RU" dirty="0" smtClean="0"/>
+              <a:rPr lang="ru-RU" dirty="0"/>
               <a:t>используется предсказуемый </a:t>
             </a:r>
             <a:r>
-              <a:rPr lang="en-US" dirty="0" smtClean="0"/>
+              <a:rPr lang="en-US" dirty="0"/>
               <a:t>IV </a:t>
             </a:r>
             <a:r>
-              <a:rPr lang="ru-RU" dirty="0" smtClean="0"/>
+              <a:rPr lang="ru-RU" dirty="0"/>
               <a:t>для последующих блоков, на основе последнего блока </a:t>
             </a:r>
             <a:r>
-              <a:rPr lang="ru-RU" dirty="0" err="1" smtClean="0"/>
+              <a:rPr lang="ru-RU" dirty="0" err="1"/>
               <a:t>шифртекста</a:t>
             </a:r>
             <a:endParaRPr lang="ru-RU" dirty="0"/>
@@ -6211,13 +6067,6 @@
   <p:clrMapOvr>
     <a:masterClrMapping/>
   </p:clrMapOvr>
-  <p:timing>
-    <p:tnLst>
-      <p:par>
-        <p:cTn id="1" dur="indefinite" restart="never" nodeType="tmRoot"/>
-      </p:par>
-    </p:tnLst>
-  </p:timing>
 </p:sld>
 </file>
 
@@ -6254,7 +6103,7 @@
           <a:lstStyle/>
           <a:p>
             <a:r>
-              <a:rPr lang="en-US" dirty="0" smtClean="0"/>
+              <a:rPr lang="en-US" dirty="0"/>
               <a:t>SSL 3.0</a:t>
             </a:r>
             <a:endParaRPr lang="ru-RU" dirty="0"/>
@@ -6282,23 +6131,23 @@
                   <a:buNone/>
                 </a:pPr>
                 <a:r>
-                  <a:rPr lang="ru-RU" dirty="0" smtClean="0"/>
+                  <a:rPr lang="ru-RU" dirty="0"/>
                   <a:t>Пусть используется </a:t>
                 </a:r>
                 <a:r>
-                  <a:rPr lang="en-US" dirty="0" smtClean="0"/>
+                  <a:rPr lang="en-US" dirty="0"/>
                   <a:t>AES </a:t>
                 </a:r>
                 <a:r>
-                  <a:rPr lang="ru-RU" dirty="0" smtClean="0"/>
+                  <a:rPr lang="ru-RU" dirty="0"/>
                   <a:t>в </a:t>
                 </a:r>
                 <a:r>
-                  <a:rPr lang="en-US" dirty="0" smtClean="0"/>
+                  <a:rPr lang="en-US" dirty="0"/>
                   <a:t>CBC </a:t>
                 </a:r>
                 <a:r>
-                  <a:rPr lang="ru-RU" dirty="0" smtClean="0"/>
+                  <a:rPr lang="ru-RU" dirty="0"/>
                   <a:t>режиме. </a:t>
                 </a:r>
               </a:p>
@@ -6307,33 +6156,33 @@
                   <a:buNone/>
                 </a:pPr>
                 <a:r>
-                  <a:rPr lang="ru-RU" dirty="0" smtClean="0"/>
+                  <a:rPr lang="ru-RU" dirty="0"/>
                   <a:t>Шифрование</a:t>
                 </a:r>
                 <a:r>
-                  <a:rPr lang="en-US" dirty="0" smtClean="0"/>
+                  <a:rPr lang="en-US" dirty="0"/>
                   <a:t>:</a:t>
                 </a:r>
                 <a:endParaRPr lang="ru-RU" dirty="0"/>
               </a:p>
               <a:p>
                 <a:r>
-                  <a:rPr lang="ru-RU" dirty="0" smtClean="0"/>
+                  <a:rPr lang="ru-RU" dirty="0"/>
                   <a:t>Вычисляется </a:t>
                 </a:r>
                 <a:r>
-                  <a:rPr lang="en-US" dirty="0" smtClean="0"/>
+                  <a:rPr lang="en-US" dirty="0"/>
                   <a:t>MAC</a:t>
                 </a:r>
                 <a:r>
-                  <a:rPr lang="ru-RU" dirty="0" smtClean="0"/>
+                  <a:rPr lang="ru-RU" dirty="0"/>
                   <a:t> для сообщения.</a:t>
                 </a:r>
-                <a:endParaRPr lang="en-US" dirty="0" smtClean="0"/>
+                <a:endParaRPr lang="en-US" dirty="0"/>
               </a:p>
               <a:p>
                 <a:r>
-                  <a:rPr lang="ru-RU" dirty="0" smtClean="0"/>
+                  <a:rPr lang="ru-RU" dirty="0"/>
                   <a:t>Дополнение. Если требуется </a:t>
                 </a:r>
                 <a14:m>
@@ -6353,15 +6202,15 @@
                   </m:oMath>
                 </a14:m>
                 <a:r>
-                  <a:rPr lang="ru-RU" dirty="0" smtClean="0"/>
+                  <a:rPr lang="ru-RU" dirty="0"/>
                   <a:t> байтов для дополнения для сообщения и </a:t>
                 </a:r>
                 <a:r>
-                  <a:rPr lang="en-US" dirty="0" smtClean="0"/>
+                  <a:rPr lang="en-US" dirty="0"/>
                   <a:t>MAC</a:t>
                 </a:r>
                 <a:r>
-                  <a:rPr lang="ru-RU" dirty="0" smtClean="0"/>
+                  <a:rPr lang="ru-RU" dirty="0"/>
                   <a:t>, используется </a:t>
                 </a:r>
                 <a14:m>
@@ -6381,7 +6230,7 @@
                   </m:oMath>
                 </a14:m>
                 <a:r>
-                  <a:rPr lang="ru-RU" dirty="0" smtClean="0"/>
+                  <a:rPr lang="ru-RU" dirty="0"/>
                   <a:t> случайный байт, а последний байт устанавливается в значение </a:t>
                 </a:r>
                 <a14:m>
@@ -6407,17 +6256,17 @@
                   </m:oMath>
                 </a14:m>
                 <a:r>
-                  <a:rPr lang="ru-RU" dirty="0" smtClean="0"/>
+                  <a:rPr lang="ru-RU" dirty="0"/>
                   <a:t>. Если сообщение уже необходимой длины – добавляется новый блок.</a:t>
                 </a:r>
               </a:p>
               <a:p>
                 <a:r>
-                  <a:rPr lang="ru-RU" dirty="0" smtClean="0"/>
+                  <a:rPr lang="ru-RU" dirty="0"/>
                   <a:t>Шифрование вычисляется на дополненном открытом тексте и </a:t>
                 </a:r>
                 <a:r>
-                  <a:rPr lang="en-US" dirty="0" smtClean="0"/>
+                  <a:rPr lang="en-US" dirty="0"/>
                   <a:t>MAC</a:t>
                 </a:r>
                 <a:endParaRPr lang="ru-RU" dirty="0"/>
@@ -6516,13 +6365,6 @@
   <p:clrMapOvr>
     <a:masterClrMapping/>
   </p:clrMapOvr>
-  <p:timing>
-    <p:tnLst>
-      <p:par>
-        <p:cTn id="1" dur="indefinite" restart="never" nodeType="tmRoot"/>
-      </p:par>
-    </p:tnLst>
-  </p:timing>
 </p:sld>
 </file>
 
@@ -6559,26 +6401,26 @@
           <a:lstStyle/>
           <a:p>
             <a:r>
-              <a:rPr lang="ru-RU" dirty="0" smtClean="0"/>
+              <a:rPr lang="ru-RU" dirty="0"/>
               <a:t>Атака на </a:t>
             </a:r>
             <a:r>
-              <a:rPr lang="en-US" dirty="0" smtClean="0"/>
+              <a:rPr lang="en-US" dirty="0"/>
               <a:t>SSL 3.0 </a:t>
             </a:r>
             <a:br>
-              <a:rPr lang="en-US" dirty="0" smtClean="0"/>
+              <a:rPr lang="en-US" dirty="0"/>
             </a:br>
             <a:r>
-              <a:rPr lang="en-US" dirty="0" smtClean="0"/>
+              <a:rPr lang="en-US" dirty="0"/>
               <a:t>(</a:t>
             </a:r>
             <a:r>
-              <a:rPr lang="ru-RU" dirty="0" smtClean="0"/>
+              <a:rPr lang="ru-RU" dirty="0"/>
               <a:t>предполагая случайный </a:t>
             </a:r>
             <a:r>
-              <a:rPr lang="en-US" dirty="0" smtClean="0"/>
+              <a:rPr lang="en-US" dirty="0"/>
               <a:t>IV)</a:t>
             </a:r>
             <a:endParaRPr lang="ru-RU" dirty="0"/>
@@ -6606,15 +6448,15 @@
                   <a:buNone/>
                 </a:pPr>
                 <a:r>
-                  <a:rPr lang="ru-RU" dirty="0" smtClean="0"/>
+                  <a:rPr lang="ru-RU" dirty="0"/>
                   <a:t>Пусть противник получил некоторый </a:t>
                 </a:r>
                 <a:r>
-                  <a:rPr lang="ru-RU" dirty="0" err="1" smtClean="0"/>
+                  <a:rPr lang="ru-RU" dirty="0" err="1"/>
                   <a:t>шифртекст</a:t>
                 </a:r>
                 <a:r>
-                  <a:rPr lang="ru-RU" dirty="0" smtClean="0"/>
+                  <a:rPr lang="ru-RU" dirty="0"/>
                   <a:t> </a:t>
                 </a:r>
                 <a14:m>
@@ -6647,7 +6489,7 @@
                       <m:dPr>
                         <m:ctrlPr>
                           <a:rPr lang="en-US" b="0" i="1" smtClean="0">
-                            <a:latin typeface="Cambria Math"/>
+                            <a:latin typeface="Cambria Math" panose="02040503050406030204" pitchFamily="18" charset="0"/>
                           </a:rPr>
                         </m:ctrlPr>
                       </m:dPr>
@@ -6656,7 +6498,7 @@
                           <m:sSubPr>
                             <m:ctrlPr>
                               <a:rPr lang="en-US" b="0" i="1" smtClean="0">
-                                <a:latin typeface="Cambria Math"/>
+                                <a:latin typeface="Cambria Math" panose="02040503050406030204" pitchFamily="18" charset="0"/>
                               </a:rPr>
                             </m:ctrlPr>
                           </m:sSubPr>
@@ -6687,7 +6529,7 @@
                           <m:sSubPr>
                             <m:ctrlPr>
                               <a:rPr lang="en-US" b="0" i="1" smtClean="0">
-                                <a:latin typeface="Cambria Math"/>
+                                <a:latin typeface="Cambria Math" panose="02040503050406030204" pitchFamily="18" charset="0"/>
                               </a:rPr>
                             </m:ctrlPr>
                           </m:sSubPr>
@@ -6731,11 +6573,11 @@
                   </m:oMath>
                 </a14:m>
                 <a:r>
-                  <a:rPr lang="en-US" dirty="0" smtClean="0"/>
+                  <a:rPr lang="en-US" dirty="0"/>
                   <a:t> </a:t>
                 </a:r>
                 <a:r>
-                  <a:rPr lang="ru-RU" dirty="0" smtClean="0"/>
+                  <a:rPr lang="ru-RU" dirty="0"/>
                   <a:t>для некоторого неизвестного сообщения </a:t>
                 </a:r>
                 <a14:m>
@@ -6749,31 +6591,31 @@
                   </m:oMath>
                 </a14:m>
                 <a:r>
-                  <a:rPr lang="en-US" dirty="0" smtClean="0"/>
+                  <a:rPr lang="en-US" dirty="0"/>
                   <a:t>. </a:t>
                 </a:r>
                 <a:r>
-                  <a:rPr lang="ru-RU" dirty="0" smtClean="0"/>
+                  <a:rPr lang="ru-RU" dirty="0"/>
                   <a:t>Пусть длина сообщения такова, что сообщение и </a:t>
                 </a:r>
                 <a:r>
-                  <a:rPr lang="en-US" dirty="0" smtClean="0"/>
+                  <a:rPr lang="en-US" dirty="0"/>
                   <a:t>MAC </a:t>
                 </a:r>
                 <a:r>
-                  <a:rPr lang="ru-RU" dirty="0" smtClean="0"/>
+                  <a:rPr lang="ru-RU" dirty="0"/>
                   <a:t>дополняются полным блоком дополнения. Тогда </a:t>
                 </a:r>
                 <a:r>
-                  <a:rPr lang="ru-RU" dirty="0" err="1" smtClean="0"/>
+                  <a:rPr lang="ru-RU" dirty="0" err="1"/>
                   <a:t>шифртекст</a:t>
                 </a:r>
                 <a:r>
-                  <a:rPr lang="ru-RU" dirty="0" smtClean="0"/>
+                  <a:rPr lang="ru-RU" dirty="0"/>
                   <a:t> выглядит следующим образом</a:t>
                 </a:r>
                 <a:r>
-                  <a:rPr lang="en-US" dirty="0" smtClean="0"/>
+                  <a:rPr lang="en-US" dirty="0"/>
                   <a:t>:</a:t>
                 </a:r>
               </a:p>
@@ -6787,22 +6629,22 @@
                 <a:pPr marL="0" indent="0">
                   <a:buNone/>
                 </a:pPr>
-                <a:endParaRPr lang="en-US" dirty="0" smtClean="0"/>
+                <a:endParaRPr lang="en-US" dirty="0"/>
               </a:p>
               <a:p>
                 <a:pPr marL="0" indent="0">
                   <a:buNone/>
                 </a:pPr>
                 <a:r>
-                  <a:rPr lang="ru-RU" dirty="0" smtClean="0"/>
+                  <a:rPr lang="ru-RU" dirty="0"/>
                   <a:t>Противник создаёт новый </a:t>
                 </a:r>
                 <a:r>
-                  <a:rPr lang="ru-RU" dirty="0" err="1" smtClean="0"/>
+                  <a:rPr lang="ru-RU" dirty="0" err="1"/>
                   <a:t>шифртекст</a:t>
                 </a:r>
                 <a:r>
-                  <a:rPr lang="ru-RU" dirty="0" smtClean="0"/>
+                  <a:rPr lang="ru-RU" dirty="0"/>
                   <a:t> </a:t>
                 </a:r>
                 <a14:m>
@@ -6811,7 +6653,7 @@
                       <m:sSupPr>
                         <m:ctrlPr>
                           <a:rPr lang="en-US" b="0" i="1" smtClean="0">
-                            <a:latin typeface="Cambria Math"/>
+                            <a:latin typeface="Cambria Math" panose="02040503050406030204" pitchFamily="18" charset="0"/>
                           </a:rPr>
                         </m:ctrlPr>
                       </m:sSupPr>
@@ -6835,25 +6677,17 @@
                   </m:oMath>
                 </a14:m>
                 <a:r>
-                  <a:rPr lang="ru-RU" b="0" i="0" dirty="0" smtClean="0">
+                  <a:rPr lang="ru-RU" b="0" i="0" dirty="0">
                     <a:latin typeface="+mj-lt"/>
                   </a:rPr>
                   <a:t>, </a:t>
                 </a:r>
                 <a:r>
-                  <a:rPr lang="ru-RU" dirty="0" smtClean="0"/>
-                  <a:t>заменяя последний </a:t>
-                </a:r>
-                <a:r>
                   <a:rPr lang="ru-RU" dirty="0"/>
-                  <a:t>блок </a:t>
-                </a:r>
-                <a:r>
-                  <a:rPr lang="ru-RU" dirty="0" smtClean="0"/>
-                  <a:t>на</a:t>
-                </a:r>
-                <a:r>
-                  <a:rPr lang="en-US" dirty="0" smtClean="0"/>
+                  <a:t>заменяя последний блок на</a:t>
+                </a:r>
+                <a:r>
+                  <a:rPr lang="en-US" dirty="0"/>
                   <a:t> </a:t>
                 </a:r>
                 <a14:m>
@@ -6870,7 +6704,7 @@
                         <m:endChr m:val="]"/>
                         <m:ctrlPr>
                           <a:rPr lang="en-US" i="1">
-                            <a:latin typeface="Cambria Math"/>
+                            <a:latin typeface="Cambria Math" panose="02040503050406030204" pitchFamily="18" charset="0"/>
                           </a:rPr>
                         </m:ctrlPr>
                       </m:dPr>
@@ -6885,13 +6719,13 @@
                     </m:d>
                   </m:oMath>
                 </a14:m>
-                <a:endParaRPr lang="en-US" b="0" dirty="0" smtClean="0"/>
+                <a:endParaRPr lang="en-US" b="0" dirty="0"/>
               </a:p>
               <a:p>
                 <a:pPr marL="0" indent="0">
                   <a:buNone/>
                 </a:pPr>
-                <a:endParaRPr lang="en-US" dirty="0" smtClean="0"/>
+                <a:endParaRPr lang="en-US" dirty="0"/>
               </a:p>
             </p:txBody>
           </p:sp>
@@ -7011,13 +6845,6 @@
   <p:clrMapOvr>
     <a:masterClrMapping/>
   </p:clrMapOvr>
-  <p:timing>
-    <p:tnLst>
-      <p:par>
-        <p:cTn id="1" dur="indefinite" restart="never" nodeType="tmRoot"/>
-      </p:par>
-    </p:tnLst>
-  </p:timing>
 </p:sld>
 </file>
 
@@ -7100,7 +6927,7 @@
                 <a:pPr marL="0" indent="0">
                   <a:buNone/>
                 </a:pPr>
-                <a:endParaRPr lang="ru-RU" dirty="0" smtClean="0"/>
+                <a:endParaRPr lang="ru-RU" dirty="0"/>
               </a:p>
               <a:p>
                 <a:pPr marL="0" indent="0">
@@ -7113,26 +6940,25 @@
                   <a:buNone/>
                 </a:pPr>
                 <a:r>
-                  <a:rPr lang="ru-RU" dirty="0" smtClean="0"/>
+                  <a:rPr lang="ru-RU" dirty="0"/>
                   <a:t>При </a:t>
                 </a:r>
                 <a:r>
-                  <a:rPr lang="ru-RU" dirty="0" err="1" smtClean="0"/>
+                  <a:rPr lang="ru-RU" dirty="0" err="1"/>
                   <a:t>расшифровании</a:t>
                 </a:r>
                 <a:r>
-                  <a:rPr lang="en-US" dirty="0" smtClean="0"/>
+                  <a:rPr lang="en-US" dirty="0"/>
                   <a:t> </a:t>
                 </a:r>
                 <a:r>
-                  <a:rPr lang="ru-RU" dirty="0" smtClean="0"/>
+                  <a:rPr lang="ru-RU" dirty="0"/>
                   <a:t>последнего блока получатель имеет</a:t>
                 </a:r>
                 <a:r>
-                  <a:rPr lang="en-US" dirty="0" smtClean="0"/>
+                  <a:rPr lang="en-US" dirty="0"/>
                   <a:t>: </a:t>
                 </a:r>
-                <a:endParaRPr lang="en-US" dirty="0"/>
               </a:p>
               <a:p>
                 <a:pPr marL="0" indent="0">
@@ -7166,7 +6992,7 @@
                         <m:dPr>
                           <m:ctrlPr>
                             <a:rPr lang="en-US" i="1">
-                              <a:latin typeface="Cambria Math"/>
+                              <a:latin typeface="Cambria Math" panose="02040503050406030204" pitchFamily="18" charset="0"/>
                             </a:rPr>
                           </m:ctrlPr>
                         </m:dPr>
@@ -7175,7 +7001,7 @@
                             <m:sSubPr>
                               <m:ctrlPr>
                                 <a:rPr lang="en-US" i="1">
-                                  <a:latin typeface="Cambria Math"/>
+                                  <a:latin typeface="Cambria Math" panose="02040503050406030204" pitchFamily="18" charset="0"/>
                                 </a:rPr>
                               </m:ctrlPr>
                             </m:sSubPr>
@@ -7214,7 +7040,7 @@
                               <m:endChr m:val="]"/>
                               <m:ctrlPr>
                                 <a:rPr lang="en-US" i="1">
-                                  <a:latin typeface="Cambria Math"/>
+                                  <a:latin typeface="Cambria Math" panose="02040503050406030204" pitchFamily="18" charset="0"/>
                                 </a:rPr>
                               </m:ctrlPr>
                             </m:dPr>
@@ -7247,7 +7073,7 @@
                           <m:endChr m:val="]"/>
                           <m:ctrlPr>
                             <a:rPr lang="en-US" i="1">
-                              <a:latin typeface="Cambria Math"/>
+                              <a:latin typeface="Cambria Math" panose="02040503050406030204" pitchFamily="18" charset="0"/>
                             </a:rPr>
                           </m:ctrlPr>
                         </m:dPr>
@@ -7284,7 +7110,7 @@
                           <m:endChr m:val="]"/>
                           <m:ctrlPr>
                             <a:rPr lang="en-US" i="1">
-                              <a:latin typeface="Cambria Math"/>
+                              <a:latin typeface="Cambria Math" panose="02040503050406030204" pitchFamily="18" charset="0"/>
                             </a:rPr>
                           </m:ctrlPr>
                         </m:dPr>
@@ -7315,7 +7141,7 @@
                           <m:endChr m:val="]"/>
                           <m:ctrlPr>
                             <a:rPr lang="en-US" i="1">
-                              <a:latin typeface="Cambria Math"/>
+                              <a:latin typeface="Cambria Math" panose="02040503050406030204" pitchFamily="18" charset="0"/>
                             </a:rPr>
                           </m:ctrlPr>
                         </m:dPr>
@@ -7361,22 +7187,22 @@
                     </m:oMath>
                   </m:oMathPara>
                 </a14:m>
-                <a:endParaRPr lang="ru-RU" dirty="0" smtClean="0"/>
+                <a:endParaRPr lang="ru-RU" dirty="0"/>
               </a:p>
               <a:p>
                 <a:pPr marL="0" indent="0">
                   <a:buNone/>
                 </a:pPr>
                 <a:r>
-                  <a:rPr lang="ru-RU" dirty="0" smtClean="0"/>
+                  <a:rPr lang="ru-RU" dirty="0"/>
                   <a:t>Если последний байт равен 15, то весь последний блок будет отброшен как дополнение. Оставшаяся часть отрытого текста образует корректную пару открытый текст – </a:t>
                 </a:r>
                 <a:r>
-                  <a:rPr lang="en-US" dirty="0" smtClean="0"/>
+                  <a:rPr lang="en-US" dirty="0"/>
                   <a:t>MAC</a:t>
                 </a:r>
                 <a:r>
-                  <a:rPr lang="ru-RU" dirty="0" smtClean="0"/>
+                  <a:rPr lang="ru-RU" dirty="0"/>
                   <a:t> и сервер не сообщит об ошибке.</a:t>
                 </a:r>
               </a:p>
@@ -7385,15 +7211,15 @@
                   <a:buNone/>
                 </a:pPr>
                 <a:r>
-                  <a:rPr lang="ru-RU" dirty="0" smtClean="0"/>
+                  <a:rPr lang="ru-RU" dirty="0"/>
                   <a:t>Если последний байт не равен 15, то часть последнего блока будет интерпретироваться как </a:t>
                 </a:r>
                 <a:r>
-                  <a:rPr lang="en-US" dirty="0" smtClean="0"/>
+                  <a:rPr lang="en-US" dirty="0"/>
                   <a:t>MAC</a:t>
                 </a:r>
                 <a:r>
-                  <a:rPr lang="ru-RU" dirty="0" smtClean="0"/>
+                  <a:rPr lang="ru-RU" dirty="0"/>
                   <a:t>, в результате сервер вернёт </a:t>
                 </a:r>
                 <a14:m>
@@ -7511,13 +7337,6 @@
   <p:clrMapOvr>
     <a:masterClrMapping/>
   </p:clrMapOvr>
-  <p:timing>
-    <p:tnLst>
-      <p:par>
-        <p:cTn id="1" dur="indefinite" restart="never" nodeType="tmRoot"/>
-      </p:par>
-    </p:tnLst>
-  </p:timing>
 </p:sld>
 </file>
 
@@ -7601,15 +7420,15 @@
                   <a:buNone/>
                 </a:pPr>
                 <a:r>
-                  <a:rPr lang="ru-RU" dirty="0" smtClean="0"/>
+                  <a:rPr lang="ru-RU" dirty="0"/>
                   <a:t>Итого, если</a:t>
                 </a:r>
                 <a:r>
-                  <a:rPr lang="en-US" dirty="0" smtClean="0"/>
+                  <a:rPr lang="en-US" dirty="0"/>
                   <a:t> </a:t>
                 </a:r>
                 <a:r>
-                  <a:rPr lang="ru-RU" dirty="0" smtClean="0"/>
+                  <a:rPr lang="ru-RU" dirty="0"/>
                   <a:t>сервер не вернул </a:t>
                 </a:r>
                 <a14:m>
@@ -7623,7 +7442,7 @@
                   </m:oMath>
                 </a14:m>
                 <a:r>
-                  <a:rPr lang="ru-RU" dirty="0" smtClean="0"/>
+                  <a:rPr lang="ru-RU" dirty="0"/>
                   <a:t>, тогда противник узнаёт, что последний байт </a:t>
                 </a:r>
                 <a14:m>
@@ -7643,7 +7462,7 @@
                   </m:oMath>
                 </a14:m>
                 <a:r>
-                  <a:rPr lang="ru-RU" dirty="0" smtClean="0"/>
+                  <a:rPr lang="ru-RU" dirty="0"/>
                   <a:t> равен последнему байту </a:t>
                 </a:r>
                 <a14:m>
@@ -7672,7 +7491,7 @@
                         <m:endChr m:val="]"/>
                         <m:ctrlPr>
                           <a:rPr lang="en-US" b="0" i="1" smtClean="0">
-                            <a:latin typeface="Cambria Math"/>
+                            <a:latin typeface="Cambria Math" panose="02040503050406030204" pitchFamily="18" charset="0"/>
                           </a:rPr>
                         </m:ctrlPr>
                       </m:dPr>
@@ -7703,7 +7522,7 @@
                         <m:endChr m:val="]"/>
                         <m:ctrlPr>
                           <a:rPr lang="en-US" b="0" i="1" smtClean="0">
-                            <a:latin typeface="Cambria Math"/>
+                            <a:latin typeface="Cambria Math" panose="02040503050406030204" pitchFamily="18" charset="0"/>
                           </a:rPr>
                         </m:ctrlPr>
                       </m:dPr>
@@ -7731,7 +7550,7 @@
                   </m:oMath>
                 </a14:m>
                 <a:r>
-                  <a:rPr lang="ru-RU" dirty="0" smtClean="0"/>
+                  <a:rPr lang="ru-RU" dirty="0"/>
                   <a:t> Таким образом противник вычисляет байт открытого текста и нарушает семантическую стойкость.</a:t>
                 </a:r>
               </a:p>
@@ -7746,18 +7565,17 @@
                   <a:buNone/>
                 </a:pPr>
                 <a:r>
-                  <a:rPr lang="ru-RU" dirty="0" smtClean="0"/>
+                  <a:rPr lang="ru-RU" dirty="0"/>
                   <a:t>Атаки данного типа носят называние </a:t>
                 </a:r>
                 <a:r>
-                  <a:rPr lang="en-US" dirty="0" smtClean="0"/>
+                  <a:rPr lang="en-US" dirty="0"/>
                   <a:t>padding oracle attack</a:t>
                 </a:r>
                 <a:r>
-                  <a:rPr lang="ru-RU" dirty="0" smtClean="0"/>
+                  <a:rPr lang="ru-RU" dirty="0"/>
                   <a:t> – т.е. имея оракул дополнения, который сообщает противнику корректно ли дополнение, противник осуществляет атаку.</a:t>
                 </a:r>
-                <a:endParaRPr lang="ru-RU" dirty="0"/>
               </a:p>
             </p:txBody>
           </p:sp>
@@ -7829,13 +7647,6 @@
   <p:clrMapOvr>
     <a:masterClrMapping/>
   </p:clrMapOvr>
-  <p:timing>
-    <p:tnLst>
-      <p:par>
-        <p:cTn id="1" dur="indefinite" restart="never" nodeType="tmRoot"/>
-      </p:par>
-    </p:tnLst>
-  </p:timing>
 </p:sld>
 </file>
 
@@ -7872,11 +7683,11 @@
           <a:lstStyle/>
           <a:p>
             <a:r>
-              <a:rPr lang="ru-RU" dirty="0" smtClean="0"/>
+              <a:rPr lang="ru-RU" dirty="0"/>
               <a:t>Реальная атака на </a:t>
             </a:r>
             <a:r>
-              <a:rPr lang="en-US" dirty="0" smtClean="0"/>
+              <a:rPr lang="en-US" dirty="0"/>
               <a:t>SSL 3.0</a:t>
             </a:r>
             <a:endParaRPr lang="ru-RU" dirty="0"/>
@@ -7902,43 +7713,43 @@
               <a:buNone/>
             </a:pPr>
             <a:r>
-              <a:rPr lang="ru-RU" dirty="0" smtClean="0"/>
+              <a:rPr lang="ru-RU" dirty="0"/>
               <a:t>Пусть пользователь использует веб-браузер для работы с сайтом банка, использующем </a:t>
             </a:r>
             <a:r>
-              <a:rPr lang="en-US" dirty="0" smtClean="0"/>
+              <a:rPr lang="en-US" dirty="0"/>
               <a:t>SSL 3.0. </a:t>
             </a:r>
             <a:r>
-              <a:rPr lang="ru-RU" dirty="0" smtClean="0"/>
+              <a:rPr lang="ru-RU" dirty="0"/>
               <a:t>После аутентификации сайт банка выдаёт пользователю </a:t>
             </a:r>
             <a:r>
-              <a:rPr lang="en-US" dirty="0" smtClean="0"/>
+              <a:rPr lang="en-US" dirty="0"/>
               <a:t>cookie</a:t>
             </a:r>
             <a:r>
-              <a:rPr lang="ru-RU" dirty="0" smtClean="0"/>
+              <a:rPr lang="ru-RU" dirty="0"/>
               <a:t>, которую он используется для дальнейшей аутентификации своих действий.</a:t>
             </a:r>
             <a:r>
-              <a:rPr lang="en-US" dirty="0" smtClean="0"/>
+              <a:rPr lang="en-US" dirty="0"/>
               <a:t> </a:t>
             </a:r>
             <a:r>
-              <a:rPr lang="ru-RU" dirty="0" smtClean="0"/>
+              <a:rPr lang="ru-RU" dirty="0"/>
               <a:t>Для этого пользователь прикладывает </a:t>
             </a:r>
             <a:r>
-              <a:rPr lang="en-US" dirty="0" smtClean="0"/>
+              <a:rPr lang="en-US" dirty="0"/>
               <a:t>cookie </a:t>
             </a:r>
             <a:r>
-              <a:rPr lang="ru-RU" dirty="0" smtClean="0"/>
+              <a:rPr lang="ru-RU" dirty="0"/>
               <a:t>во всех своих запросах, например</a:t>
             </a:r>
             <a:r>
-              <a:rPr lang="en-US" dirty="0" smtClean="0"/>
+              <a:rPr lang="en-US" dirty="0"/>
               <a:t>:</a:t>
             </a:r>
           </a:p>
@@ -7952,29 +7763,29 @@
             <a:pPr marL="0" indent="0">
               <a:buNone/>
             </a:pPr>
-            <a:endParaRPr lang="en-US" dirty="0" smtClean="0"/>
+            <a:endParaRPr lang="en-US" dirty="0"/>
           </a:p>
           <a:p>
             <a:pPr marL="0" indent="0">
               <a:buNone/>
             </a:pPr>
             <a:r>
-              <a:rPr lang="en-US" dirty="0" smtClean="0"/>
+              <a:rPr lang="en-US" dirty="0"/>
               <a:t>Cookie </a:t>
             </a:r>
             <a:r>
-              <a:rPr lang="ru-RU" dirty="0" smtClean="0"/>
+              <a:rPr lang="ru-RU" dirty="0"/>
               <a:t>должна оставаться секретной. Секретность обеспечивается только </a:t>
             </a:r>
             <a:r>
-              <a:rPr lang="en-US" dirty="0" smtClean="0"/>
+              <a:rPr lang="en-US" dirty="0"/>
               <a:t>SSL</a:t>
             </a:r>
             <a:r>
-              <a:rPr lang="ru-RU" dirty="0" smtClean="0"/>
+              <a:rPr lang="ru-RU" dirty="0"/>
               <a:t>.</a:t>
             </a:r>
-            <a:endParaRPr lang="en-US" dirty="0" smtClean="0"/>
+            <a:endParaRPr lang="en-US" dirty="0"/>
           </a:p>
           <a:p>
             <a:pPr marL="0" indent="0">
@@ -8041,13 +7852,6 @@
   <p:clrMapOvr>
     <a:masterClrMapping/>
   </p:clrMapOvr>
-  <p:timing>
-    <p:tnLst>
-      <p:par>
-        <p:cTn id="1" dur="indefinite" restart="never" nodeType="tmRoot"/>
-      </p:par>
-    </p:tnLst>
-  </p:timing>
 </p:sld>
 </file>
 
@@ -8084,11 +7888,11 @@
           <a:lstStyle/>
           <a:p>
             <a:r>
-              <a:rPr lang="ru-RU" dirty="0" smtClean="0"/>
+              <a:rPr lang="ru-RU" dirty="0"/>
               <a:t>Реальная атака на </a:t>
             </a:r>
             <a:r>
-              <a:rPr lang="en-US" dirty="0" smtClean="0"/>
+              <a:rPr lang="en-US" dirty="0"/>
               <a:t>SSL 3.0</a:t>
             </a:r>
             <a:endParaRPr lang="ru-RU" dirty="0"/>
@@ -8121,79 +7925,78 @@
               <a:buNone/>
             </a:pPr>
             <a:r>
-              <a:rPr lang="ru-RU" dirty="0" smtClean="0"/>
+              <a:rPr lang="ru-RU" dirty="0"/>
               <a:t>Цель противника – восстановить </a:t>
             </a:r>
             <a:r>
-              <a:rPr lang="en-US" dirty="0" smtClean="0"/>
+              <a:rPr lang="en-US" dirty="0"/>
               <a:t>cookie</a:t>
             </a:r>
             <a:r>
-              <a:rPr lang="ru-RU" dirty="0" smtClean="0"/>
+              <a:rPr lang="ru-RU" dirty="0"/>
               <a:t> из </a:t>
             </a:r>
             <a:r>
-              <a:rPr lang="ru-RU" dirty="0" err="1" smtClean="0"/>
+              <a:rPr lang="ru-RU" dirty="0" err="1"/>
               <a:t>шифртекста</a:t>
             </a:r>
             <a:r>
-              <a:rPr lang="ru-RU" dirty="0" smtClean="0"/>
+              <a:rPr lang="ru-RU" dirty="0"/>
               <a:t>. Противник используется межсайтовый </a:t>
             </a:r>
             <a:r>
-              <a:rPr lang="ru-RU" dirty="0" err="1" smtClean="0"/>
+              <a:rPr lang="ru-RU" dirty="0" err="1"/>
               <a:t>скриптинг</a:t>
             </a:r>
             <a:r>
-              <a:rPr lang="ru-RU" dirty="0" smtClean="0"/>
+              <a:rPr lang="ru-RU" dirty="0"/>
               <a:t> </a:t>
             </a:r>
             <a:r>
-              <a:rPr lang="en-US" dirty="0" smtClean="0"/>
+              <a:rPr lang="en-US" dirty="0"/>
               <a:t>(XSS) </a:t>
             </a:r>
             <a:r>
-              <a:rPr lang="ru-RU" dirty="0" smtClean="0"/>
+              <a:rPr lang="ru-RU" dirty="0"/>
               <a:t>или плагин браузера для отправки запросов от имени пользователя. Браузер пользователя отправляет запрос вида</a:t>
             </a:r>
-            <a:endParaRPr lang="ru-RU" dirty="0"/>
           </a:p>
           <a:p>
             <a:pPr marL="0" indent="0">
               <a:buNone/>
             </a:pPr>
-            <a:endParaRPr lang="ru-RU" dirty="0" smtClean="0"/>
+            <a:endParaRPr lang="ru-RU" dirty="0"/>
           </a:p>
           <a:p>
             <a:pPr marL="0" indent="0">
               <a:buNone/>
             </a:pPr>
             <a:r>
-              <a:rPr lang="ru-RU" dirty="0" smtClean="0"/>
+              <a:rPr lang="ru-RU" dirty="0"/>
               <a:t>Зашифрованный </a:t>
             </a:r>
             <a:r>
-              <a:rPr lang="en-US" dirty="0" smtClean="0"/>
+              <a:rPr lang="en-US" dirty="0"/>
               <a:t>SSL</a:t>
             </a:r>
             <a:r>
-              <a:rPr lang="ru-RU" dirty="0" smtClean="0"/>
+              <a:rPr lang="ru-RU" dirty="0"/>
               <a:t>. Противник перехватывает </a:t>
             </a:r>
             <a:r>
-              <a:rPr lang="ru-RU" dirty="0" err="1" smtClean="0"/>
+              <a:rPr lang="ru-RU" dirty="0" err="1"/>
               <a:t>шифртекст</a:t>
             </a:r>
             <a:r>
-              <a:rPr lang="ru-RU" dirty="0" smtClean="0"/>
+              <a:rPr lang="ru-RU" dirty="0"/>
               <a:t>, использует атаку, описанную ранее, и восстанавливает последний байт </a:t>
             </a:r>
             <a:r>
-              <a:rPr lang="en-US" dirty="0" smtClean="0"/>
+              <a:rPr lang="en-US" dirty="0"/>
               <a:t>cookie</a:t>
             </a:r>
             <a:r>
-              <a:rPr lang="ru-RU" dirty="0" smtClean="0"/>
+              <a:rPr lang="ru-RU" dirty="0"/>
               <a:t>.</a:t>
             </a:r>
           </a:p>
@@ -8202,11 +8005,11 @@
               <a:buNone/>
             </a:pPr>
             <a:r>
-              <a:rPr lang="ru-RU" dirty="0" smtClean="0"/>
+              <a:rPr lang="ru-RU" dirty="0"/>
               <a:t>Затем противник заставляет браузер пользователя отправить запрос с телом, на один байт длиннее предыдущего, например</a:t>
             </a:r>
             <a:r>
-              <a:rPr lang="en-US" dirty="0" smtClean="0"/>
+              <a:rPr lang="en-US" dirty="0"/>
               <a:t>:</a:t>
             </a:r>
           </a:p>
@@ -8214,33 +8017,32 @@
             <a:pPr marL="0" indent="0">
               <a:buNone/>
             </a:pPr>
-            <a:endParaRPr lang="en-US" dirty="0" smtClean="0"/>
+            <a:endParaRPr lang="en-US" dirty="0"/>
           </a:p>
           <a:p>
             <a:pPr marL="0" indent="0">
               <a:buNone/>
             </a:pPr>
             <a:r>
-              <a:rPr lang="ru-RU" dirty="0" smtClean="0"/>
+              <a:rPr lang="ru-RU" dirty="0"/>
               <a:t>После чего он получает в одном из блоков </a:t>
             </a:r>
             <a:r>
-              <a:rPr lang="en-US" dirty="0" smtClean="0"/>
+              <a:rPr lang="en-US" dirty="0"/>
               <a:t>cookie</a:t>
             </a:r>
             <a:r>
-              <a:rPr lang="ru-RU" dirty="0" smtClean="0"/>
+              <a:rPr lang="ru-RU" dirty="0"/>
               <a:t>, сдвинутую на 1 байт вправо, и восстанавливает второй байт отправляя данный блок в качестве последнего блока </a:t>
             </a:r>
             <a:r>
-              <a:rPr lang="ru-RU" dirty="0" err="1" smtClean="0"/>
+              <a:rPr lang="ru-RU" dirty="0" err="1"/>
               <a:t>шифртекста</a:t>
             </a:r>
             <a:r>
-              <a:rPr lang="ru-RU" dirty="0" smtClean="0"/>
+              <a:rPr lang="ru-RU" dirty="0"/>
               <a:t>.</a:t>
             </a:r>
-            <a:endParaRPr lang="ru-RU" dirty="0"/>
           </a:p>
         </p:txBody>
       </p:sp>
@@ -8325,13 +8127,6 @@
   <p:clrMapOvr>
     <a:masterClrMapping/>
   </p:clrMapOvr>
-  <p:timing>
-    <p:tnLst>
-      <p:par>
-        <p:cTn id="1" dur="indefinite" restart="never" nodeType="tmRoot"/>
-      </p:par>
-    </p:tnLst>
-  </p:timing>
 </p:sld>
 </file>
 
@@ -8368,7 +8163,7 @@
           <a:lstStyle/>
           <a:p>
             <a:r>
-              <a:rPr lang="en-US" dirty="0" smtClean="0"/>
+              <a:rPr lang="en-US" dirty="0"/>
               <a:t>TLS 1.0</a:t>
             </a:r>
             <a:endParaRPr lang="ru-RU" dirty="0"/>
@@ -8396,11 +8191,11 @@
                   <a:buNone/>
                 </a:pPr>
                 <a:r>
-                  <a:rPr lang="en-US" dirty="0" smtClean="0"/>
+                  <a:rPr lang="en-US" dirty="0"/>
                   <a:t>TLS </a:t>
                 </a:r>
                 <a:r>
-                  <a:rPr lang="ru-RU" dirty="0" smtClean="0"/>
+                  <a:rPr lang="ru-RU" dirty="0"/>
                   <a:t>1.0 исправил проблему дополнения – теперь все байты дополнения должны быть равны </a:t>
                 </a:r>
                 <a14:m>
@@ -8420,7 +8215,7 @@
                   </m:oMath>
                 </a14:m>
                 <a:r>
-                  <a:rPr lang="ru-RU" dirty="0" smtClean="0"/>
+                  <a:rPr lang="ru-RU" dirty="0"/>
                   <a:t> (данный подход используется до сих пор).</a:t>
                 </a:r>
               </a:p>
@@ -8435,11 +8230,11 @@
                   <a:buNone/>
                 </a:pPr>
                 <a:r>
-                  <a:rPr lang="ru-RU" dirty="0" smtClean="0"/>
+                  <a:rPr lang="ru-RU" dirty="0"/>
                   <a:t>Но реализация всё равно уязвима к одной из вариаций </a:t>
                 </a:r>
                 <a:r>
-                  <a:rPr lang="en-US" dirty="0" smtClean="0"/>
+                  <a:rPr lang="en-US" dirty="0"/>
                   <a:t>padding oracle – timing padding oracle.</a:t>
                 </a:r>
               </a:p>
@@ -8525,13 +8320,6 @@
   <p:clrMapOvr>
     <a:masterClrMapping/>
   </p:clrMapOvr>
-  <p:timing>
-    <p:tnLst>
-      <p:par>
-        <p:cTn id="1" dur="indefinite" restart="never" nodeType="tmRoot"/>
-      </p:par>
-    </p:tnLst>
-  </p:timing>
 </p:sld>
 </file>
 
@@ -8568,15 +8356,15 @@
           <a:lstStyle/>
           <a:p>
             <a:r>
-              <a:rPr lang="en-US" dirty="0" smtClean="0"/>
+              <a:rPr lang="en-US" dirty="0"/>
               <a:t>TLS 1.0</a:t>
             </a:r>
             <a:r>
-              <a:rPr lang="ru-RU" dirty="0" smtClean="0"/>
+              <a:rPr lang="ru-RU" dirty="0"/>
               <a:t> </a:t>
             </a:r>
             <a:r>
-              <a:rPr lang="ru-RU" dirty="0" err="1" smtClean="0"/>
+              <a:rPr lang="ru-RU" dirty="0" err="1"/>
               <a:t>Расшифрование</a:t>
             </a:r>
             <a:endParaRPr lang="ru-RU" dirty="0"/>
@@ -8602,54 +8390,54 @@
               <a:buNone/>
             </a:pPr>
             <a:r>
-              <a:rPr lang="ru-RU" dirty="0" err="1" smtClean="0"/>
+              <a:rPr lang="ru-RU" dirty="0" err="1"/>
               <a:t>Расшифрование</a:t>
             </a:r>
             <a:r>
-              <a:rPr lang="ru-RU" dirty="0" smtClean="0"/>
+              <a:rPr lang="ru-RU" dirty="0"/>
               <a:t> производится следующим образом</a:t>
             </a:r>
             <a:r>
-              <a:rPr lang="en-US" dirty="0" smtClean="0"/>
+              <a:rPr lang="en-US" dirty="0"/>
               <a:t>:</a:t>
             </a:r>
           </a:p>
           <a:p>
             <a:r>
-              <a:rPr lang="en-US" dirty="0" smtClean="0"/>
+              <a:rPr lang="en-US" dirty="0"/>
               <a:t>CBC </a:t>
             </a:r>
             <a:r>
-              <a:rPr lang="ru-RU" dirty="0" err="1" smtClean="0"/>
+              <a:rPr lang="ru-RU" dirty="0" err="1"/>
               <a:t>расшифрование</a:t>
             </a:r>
             <a:r>
-              <a:rPr lang="ru-RU" dirty="0" smtClean="0"/>
+              <a:rPr lang="ru-RU" dirty="0"/>
               <a:t> </a:t>
             </a:r>
             <a:r>
-              <a:rPr lang="ru-RU" dirty="0" err="1" smtClean="0"/>
+              <a:rPr lang="ru-RU" dirty="0" err="1"/>
               <a:t>шифртекста</a:t>
             </a:r>
-            <a:endParaRPr lang="ru-RU" dirty="0" smtClean="0"/>
-          </a:p>
-          <a:p>
-            <a:r>
-              <a:rPr lang="ru-RU" dirty="0" smtClean="0"/>
+            <a:endParaRPr lang="ru-RU" dirty="0"/>
+          </a:p>
+          <a:p>
+            <a:r>
+              <a:rPr lang="ru-RU" dirty="0"/>
               <a:t>Проверка дополнения, если не корректен – ошибка</a:t>
             </a:r>
           </a:p>
           <a:p>
             <a:r>
-              <a:rPr lang="ru-RU" dirty="0" smtClean="0"/>
+              <a:rPr lang="ru-RU" dirty="0"/>
               <a:t>Проверка </a:t>
             </a:r>
             <a:r>
-              <a:rPr lang="en-US" dirty="0" smtClean="0"/>
+              <a:rPr lang="en-US" dirty="0"/>
               <a:t>MAC</a:t>
             </a:r>
             <a:r>
-              <a:rPr lang="ru-RU" dirty="0" smtClean="0"/>
+              <a:rPr lang="ru-RU" dirty="0"/>
               <a:t>, если не корректен – ошибка</a:t>
             </a:r>
           </a:p>
@@ -8658,18 +8446,17 @@
               <a:buNone/>
             </a:pPr>
             <a:r>
-              <a:rPr lang="ru-RU" dirty="0" smtClean="0"/>
+              <a:rPr lang="ru-RU" dirty="0"/>
               <a:t>Проверка </a:t>
             </a:r>
             <a:r>
-              <a:rPr lang="en-US" dirty="0" smtClean="0"/>
+              <a:rPr lang="en-US" dirty="0"/>
               <a:t>MAC </a:t>
             </a:r>
             <a:r>
-              <a:rPr lang="ru-RU" dirty="0" smtClean="0"/>
+              <a:rPr lang="ru-RU" dirty="0"/>
               <a:t>производилась только при корректности дополнения.</a:t>
             </a:r>
-            <a:endParaRPr lang="ru-RU" dirty="0"/>
           </a:p>
         </p:txBody>
       </p:sp>
@@ -8706,13 +8493,6 @@
   <p:clrMapOvr>
     <a:masterClrMapping/>
   </p:clrMapOvr>
-  <p:timing>
-    <p:tnLst>
-      <p:par>
-        <p:cTn id="1" dur="indefinite" restart="never" nodeType="tmRoot"/>
-      </p:par>
-    </p:tnLst>
-  </p:timing>
 </p:sld>
 </file>
 
@@ -9925,10 +9705,9 @@
           <a:lstStyle/>
           <a:p>
             <a:r>
-              <a:rPr lang="ru-RU" dirty="0" smtClean="0"/>
+              <a:rPr lang="ru-RU" dirty="0"/>
               <a:t>Тест.</a:t>
             </a:r>
-            <a:endParaRPr lang="ru-RU" dirty="0"/>
           </a:p>
         </p:txBody>
       </p:sp>
@@ -9955,48 +9734,47 @@
           <a:lstStyle/>
           <a:p>
             <a:r>
-              <a:rPr lang="ru-RU" sz="2800" dirty="0" smtClean="0"/>
+              <a:rPr lang="ru-RU" sz="2800" dirty="0"/>
               <a:t>3 варианта построения </a:t>
             </a:r>
             <a:r>
-              <a:rPr lang="en-US" sz="2800" dirty="0" smtClean="0"/>
+              <a:rPr lang="en-US" sz="2800" dirty="0"/>
               <a:t>AE </a:t>
             </a:r>
             <a:r>
-              <a:rPr lang="ru-RU" sz="2800" dirty="0" smtClean="0"/>
+              <a:rPr lang="ru-RU" sz="2800" dirty="0"/>
               <a:t>шифра через </a:t>
             </a:r>
             <a:r>
-              <a:rPr lang="en-US" sz="2800" dirty="0" smtClean="0"/>
+              <a:rPr lang="en-US" sz="2800" dirty="0"/>
               <a:t>CPA </a:t>
             </a:r>
             <a:r>
-              <a:rPr lang="ru-RU" sz="2800" dirty="0" smtClean="0"/>
+              <a:rPr lang="ru-RU" sz="2800" dirty="0"/>
               <a:t>ст.</a:t>
             </a:r>
             <a:r>
-              <a:rPr lang="en-US" sz="2800" dirty="0" smtClean="0"/>
+              <a:rPr lang="en-US" sz="2800" dirty="0"/>
               <a:t> </a:t>
             </a:r>
             <a:r>
-              <a:rPr lang="ru-RU" sz="2800" dirty="0" smtClean="0"/>
+              <a:rPr lang="ru-RU" sz="2800" dirty="0"/>
               <a:t>шифр + </a:t>
             </a:r>
             <a:r>
-              <a:rPr lang="en-US" sz="2800" dirty="0" smtClean="0"/>
+              <a:rPr lang="en-US" sz="2800" dirty="0"/>
               <a:t>MAC</a:t>
             </a:r>
             <a:r>
-              <a:rPr lang="ru-RU" sz="2800" dirty="0" smtClean="0"/>
+              <a:rPr lang="ru-RU" sz="2800" dirty="0"/>
               <a:t>.</a:t>
             </a:r>
           </a:p>
           <a:p>
             <a:r>
-              <a:rPr lang="ru-RU" sz="2800" dirty="0" smtClean="0"/>
+              <a:rPr lang="ru-RU" sz="2800" dirty="0"/>
               <a:t>Какие из них стойкие, почему?</a:t>
             </a:r>
-            <a:endParaRPr lang="ru-RU" sz="2800" dirty="0"/>
           </a:p>
         </p:txBody>
       </p:sp>
@@ -10363,7 +10141,7 @@
           <a:lstStyle/>
           <a:p>
             <a:r>
-              <a:rPr lang="en-US" dirty="0" smtClean="0"/>
+              <a:rPr lang="en-US" dirty="0"/>
               <a:t>Timing padding oracle</a:t>
             </a:r>
             <a:endParaRPr lang="ru-RU" dirty="0"/>
@@ -10393,15 +10171,15 @@
                   <a:buNone/>
                 </a:pPr>
                 <a:r>
-                  <a:rPr lang="ru-RU" dirty="0" smtClean="0"/>
+                  <a:rPr lang="ru-RU" dirty="0"/>
                   <a:t>Пусть противник имеет некоторый </a:t>
                 </a:r>
                 <a:r>
-                  <a:rPr lang="ru-RU" dirty="0" err="1" smtClean="0"/>
+                  <a:rPr lang="ru-RU" dirty="0" err="1"/>
                   <a:t>шифртекст</a:t>
                 </a:r>
                 <a:r>
-                  <a:rPr lang="ru-RU" dirty="0" smtClean="0"/>
+                  <a:rPr lang="ru-RU" dirty="0"/>
                   <a:t> </a:t>
                 </a:r>
                 <a14:m>
@@ -10415,7 +10193,7 @@
                   </m:oMath>
                 </a14:m>
                 <a:r>
-                  <a:rPr lang="ru-RU" dirty="0" smtClean="0"/>
+                  <a:rPr lang="ru-RU" dirty="0"/>
                   <a:t> некоторого сообщения </a:t>
                 </a:r>
                 <a14:m>
@@ -10429,11 +10207,11 @@
                   </m:oMath>
                 </a14:m>
                 <a:r>
-                  <a:rPr lang="en-US" dirty="0" smtClean="0"/>
+                  <a:rPr lang="en-US" dirty="0"/>
                   <a:t>. </a:t>
                 </a:r>
                 <a:r>
-                  <a:rPr lang="ru-RU" dirty="0" smtClean="0"/>
+                  <a:rPr lang="ru-RU" dirty="0"/>
                   <a:t>Пусть противник хочет проверить, является ли последний байт </a:t>
                 </a:r>
                 <a14:m>
@@ -10453,7 +10231,7 @@
                   </m:oMath>
                 </a14:m>
                 <a:r>
-                  <a:rPr lang="ru-RU" dirty="0" smtClean="0"/>
+                  <a:rPr lang="ru-RU" dirty="0"/>
                   <a:t> равным некоторой величине </a:t>
                 </a:r>
                 <a14:m>
@@ -10467,7 +10245,7 @@
                   </m:oMath>
                 </a14:m>
                 <a:r>
-                  <a:rPr lang="ru-RU" dirty="0" smtClean="0"/>
+                  <a:rPr lang="ru-RU" dirty="0"/>
                   <a:t>. Пусть </a:t>
                 </a:r>
                 <a14:m>
@@ -10481,7 +10259,7 @@
                   </m:oMath>
                 </a14:m>
                 <a:r>
-                  <a:rPr lang="ru-RU" dirty="0" smtClean="0"/>
+                  <a:rPr lang="ru-RU" dirty="0"/>
                   <a:t> произвольный 16 байтный блок, последний байт которого равен </a:t>
                 </a:r>
                 <a14:m>
@@ -10495,25 +10273,24 @@
                   </m:oMath>
                 </a14:m>
                 <a:r>
-                  <a:rPr lang="ru-RU" dirty="0" smtClean="0"/>
+                  <a:rPr lang="ru-RU" dirty="0"/>
                   <a:t>. </a:t>
                 </a:r>
-                <a:endParaRPr lang="ru-RU" dirty="0"/>
               </a:p>
               <a:p>
                 <a:pPr marL="0" indent="0">
                   <a:buNone/>
                 </a:pPr>
                 <a:r>
-                  <a:rPr lang="ru-RU" dirty="0" smtClean="0"/>
+                  <a:rPr lang="ru-RU" dirty="0"/>
                   <a:t>Противник создаёт новый</a:t>
                 </a:r>
                 <a:r>
-                  <a:rPr lang="en-US" dirty="0" smtClean="0"/>
+                  <a:rPr lang="en-US" dirty="0"/>
                   <a:t> </a:t>
                 </a:r>
                 <a:r>
-                  <a:rPr lang="ru-RU" dirty="0" smtClean="0"/>
+                  <a:rPr lang="ru-RU" dirty="0"/>
                   <a:t>блок </a:t>
                 </a:r>
                 <a14:m>
@@ -10522,7 +10299,7 @@
                       <m:sSupPr>
                         <m:ctrlPr>
                           <a:rPr lang="en-US" b="0" i="1" smtClean="0">
-                            <a:latin typeface="Cambria Math"/>
+                            <a:latin typeface="Cambria Math" panose="02040503050406030204" pitchFamily="18" charset="0"/>
                           </a:rPr>
                         </m:ctrlPr>
                       </m:sSupPr>
@@ -10549,7 +10326,7 @@
                         <m:endChr m:val="]"/>
                         <m:ctrlPr>
                           <a:rPr lang="en-US" b="0" i="1" smtClean="0">
-                            <a:latin typeface="Cambria Math"/>
+                            <a:latin typeface="Cambria Math" panose="02040503050406030204" pitchFamily="18" charset="0"/>
                           </a:rPr>
                         </m:ctrlPr>
                       </m:dPr>
@@ -10580,7 +10357,7 @@
                         <m:endChr m:val="]"/>
                         <m:ctrlPr>
                           <a:rPr lang="en-US" b="0" i="1" smtClean="0">
-                            <a:latin typeface="Cambria Math"/>
+                            <a:latin typeface="Cambria Math" panose="02040503050406030204" pitchFamily="18" charset="0"/>
                           </a:rPr>
                         </m:ctrlPr>
                       </m:dPr>
@@ -10608,19 +10385,19 @@
                   </m:oMath>
                 </a14:m>
                 <a:r>
-                  <a:rPr lang="en-US" dirty="0" smtClean="0"/>
+                  <a:rPr lang="en-US" dirty="0"/>
                   <a:t> </a:t>
                 </a:r>
                 <a:r>
-                  <a:rPr lang="ru-RU" dirty="0" smtClean="0"/>
+                  <a:rPr lang="ru-RU" dirty="0"/>
                   <a:t>и отправляет </a:t>
                 </a:r>
                 <a:r>
-                  <a:rPr lang="ru-RU" dirty="0" err="1" smtClean="0"/>
+                  <a:rPr lang="ru-RU" dirty="0" err="1"/>
                   <a:t>шифртекст</a:t>
                 </a:r>
                 <a:r>
-                  <a:rPr lang="ru-RU" dirty="0" smtClean="0"/>
+                  <a:rPr lang="ru-RU" dirty="0"/>
                   <a:t> </a:t>
                 </a:r>
                 <a14:m>
@@ -10629,7 +10406,7 @@
                       <m:sSupPr>
                         <m:ctrlPr>
                           <a:rPr lang="en-US" b="0" i="1" smtClean="0">
-                            <a:latin typeface="Cambria Math"/>
+                            <a:latin typeface="Cambria Math" panose="02040503050406030204" pitchFamily="18" charset="0"/>
                           </a:rPr>
                         </m:ctrlPr>
                       </m:sSupPr>
@@ -10668,7 +10445,7 @@
                         <m:endChr m:val="]"/>
                         <m:ctrlPr>
                           <a:rPr lang="en-US" b="0" i="1" smtClean="0">
-                            <a:latin typeface="Cambria Math"/>
+                            <a:latin typeface="Cambria Math" panose="02040503050406030204" pitchFamily="18" charset="0"/>
                           </a:rPr>
                         </m:ctrlPr>
                       </m:dPr>
@@ -10691,7 +10468,7 @@
                       <m:sSupPr>
                         <m:ctrlPr>
                           <a:rPr lang="en-US" b="0" i="1" smtClean="0">
-                            <a:latin typeface="Cambria Math"/>
+                            <a:latin typeface="Cambria Math" panose="02040503050406030204" pitchFamily="18" charset="0"/>
                           </a:rPr>
                         </m:ctrlPr>
                       </m:sSupPr>
@@ -10718,7 +10495,7 @@
                         <m:endChr m:val="]"/>
                         <m:ctrlPr>
                           <a:rPr lang="en-US" b="0" i="1" smtClean="0">
-                            <a:latin typeface="Cambria Math"/>
+                            <a:latin typeface="Cambria Math" panose="02040503050406030204" pitchFamily="18" charset="0"/>
                           </a:rPr>
                         </m:ctrlPr>
                       </m:dPr>
@@ -10749,7 +10526,7 @@
                         <m:endChr m:val="]"/>
                         <m:ctrlPr>
                           <a:rPr lang="en-US" b="0" i="1" smtClean="0">
-                            <a:latin typeface="Cambria Math"/>
+                            <a:latin typeface="Cambria Math" panose="02040503050406030204" pitchFamily="18" charset="0"/>
                           </a:rPr>
                         </m:ctrlPr>
                       </m:dPr>
@@ -10771,11 +10548,11 @@
                   </m:oMath>
                 </a14:m>
                 <a:r>
-                  <a:rPr lang="en-US" dirty="0" smtClean="0"/>
+                  <a:rPr lang="en-US" dirty="0"/>
                   <a:t> </a:t>
                 </a:r>
                 <a:r>
-                  <a:rPr lang="ru-RU" dirty="0" smtClean="0"/>
+                  <a:rPr lang="ru-RU" dirty="0"/>
                   <a:t>серверу.</a:t>
                 </a:r>
               </a:p>
@@ -10784,23 +10561,23 @@
                   <a:buNone/>
                 </a:pPr>
                 <a:r>
-                  <a:rPr lang="ru-RU" dirty="0" smtClean="0"/>
+                  <a:rPr lang="ru-RU" dirty="0"/>
                   <a:t>После </a:t>
                 </a:r>
                 <a:r>
-                  <a:rPr lang="ru-RU" dirty="0" err="1" smtClean="0"/>
+                  <a:rPr lang="ru-RU" dirty="0" err="1"/>
                   <a:t>расшифрования</a:t>
                 </a:r>
                 <a:r>
-                  <a:rPr lang="ru-RU" dirty="0" smtClean="0"/>
+                  <a:rPr lang="ru-RU" dirty="0"/>
                   <a:t> сервером последний блок </a:t>
                 </a:r>
                 <a:r>
-                  <a:rPr lang="ru-RU" dirty="0" err="1" smtClean="0"/>
+                  <a:rPr lang="ru-RU" dirty="0" err="1"/>
                   <a:t>шифртекста</a:t>
                 </a:r>
                 <a:r>
-                  <a:rPr lang="ru-RU" dirty="0" smtClean="0"/>
+                  <a:rPr lang="ru-RU" dirty="0"/>
                   <a:t> равен </a:t>
                 </a:r>
                 <a14:m>
@@ -10809,7 +10586,7 @@
                       <m:sSupPr>
                         <m:ctrlPr>
                           <a:rPr lang="en-US" b="0" i="1" smtClean="0">
-                            <a:latin typeface="Cambria Math"/>
+                            <a:latin typeface="Cambria Math" panose="02040503050406030204" pitchFamily="18" charset="0"/>
                           </a:rPr>
                         </m:ctrlPr>
                       </m:sSupPr>
@@ -10836,7 +10613,7 @@
                         <m:endChr m:val="]"/>
                         <m:ctrlPr>
                           <a:rPr lang="en-US" b="0" i="1" smtClean="0">
-                            <a:latin typeface="Cambria Math"/>
+                            <a:latin typeface="Cambria Math" panose="02040503050406030204" pitchFamily="18" charset="0"/>
                           </a:rPr>
                         </m:ctrlPr>
                       </m:dPr>
@@ -10859,7 +10636,7 @@
                       <m:sSupPr>
                         <m:ctrlPr>
                           <a:rPr lang="en-US" b="0" i="1" smtClean="0">
-                            <a:latin typeface="Cambria Math"/>
+                            <a:latin typeface="Cambria Math" panose="02040503050406030204" pitchFamily="18" charset="0"/>
                           </a:rPr>
                         </m:ctrlPr>
                       </m:sSupPr>
@@ -10886,7 +10663,7 @@
                         <m:endChr m:val="]"/>
                         <m:ctrlPr>
                           <a:rPr lang="en-US" b="0" i="1" smtClean="0">
-                            <a:latin typeface="Cambria Math"/>
+                            <a:latin typeface="Cambria Math" panose="02040503050406030204" pitchFamily="18" charset="0"/>
                           </a:rPr>
                         </m:ctrlPr>
                       </m:dPr>
@@ -10915,7 +10692,7 @@
                       <m:dPr>
                         <m:ctrlPr>
                           <a:rPr lang="en-US" b="0" i="1" smtClean="0">
-                            <a:latin typeface="Cambria Math"/>
+                            <a:latin typeface="Cambria Math" panose="02040503050406030204" pitchFamily="18" charset="0"/>
                           </a:rPr>
                         </m:ctrlPr>
                       </m:dPr>
@@ -10944,7 +10721,7 @@
                             <m:endChr m:val="]"/>
                             <m:ctrlPr>
                               <a:rPr lang="en-US" b="0" i="1" smtClean="0">
-                                <a:latin typeface="Cambria Math"/>
+                                <a:latin typeface="Cambria Math" panose="02040503050406030204" pitchFamily="18" charset="0"/>
                               </a:rPr>
                             </m:ctrlPr>
                           </m:dPr>
@@ -10977,7 +10754,7 @@
                         <m:endChr m:val="]"/>
                         <m:ctrlPr>
                           <a:rPr lang="en-US" b="0" i="1" smtClean="0">
-                            <a:latin typeface="Cambria Math"/>
+                            <a:latin typeface="Cambria Math" panose="02040503050406030204" pitchFamily="18" charset="0"/>
                           </a:rPr>
                         </m:ctrlPr>
                       </m:dPr>
@@ -11005,7 +10782,7 @@
                   </m:oMath>
                 </a14:m>
                 <a:r>
-                  <a:rPr lang="ru-RU" dirty="0" smtClean="0"/>
+                  <a:rPr lang="ru-RU" dirty="0"/>
                   <a:t>.</a:t>
                 </a:r>
               </a:p>
@@ -11014,7 +10791,7 @@
                   <a:buNone/>
                 </a:pPr>
                 <a:r>
-                  <a:rPr lang="ru-RU" dirty="0" smtClean="0"/>
+                  <a:rPr lang="ru-RU" dirty="0"/>
                   <a:t>Если последний байт </a:t>
                 </a:r>
                 <a14:m>
@@ -11034,7 +10811,7 @@
                   </m:oMath>
                 </a14:m>
                 <a:r>
-                  <a:rPr lang="ru-RU" dirty="0" smtClean="0"/>
+                  <a:rPr lang="ru-RU" dirty="0"/>
                   <a:t> равен </a:t>
                 </a:r>
                 <a14:m>
@@ -11054,7 +10831,7 @@
                   </m:oMath>
                 </a14:m>
                 <a:r>
-                  <a:rPr lang="ru-RU" dirty="0" smtClean="0"/>
+                  <a:rPr lang="ru-RU" dirty="0"/>
                   <a:t> тогда </a:t>
                 </a:r>
                 <a14:m>
@@ -11074,30 +10851,29 @@
                   </m:oMath>
                 </a14:m>
                 <a:r>
-                  <a:rPr lang="en-US" dirty="0" smtClean="0"/>
+                  <a:rPr lang="en-US" dirty="0"/>
                   <a:t> </a:t>
                 </a:r>
                 <a:r>
-                  <a:rPr lang="ru-RU" dirty="0" smtClean="0"/>
+                  <a:rPr lang="ru-RU" dirty="0"/>
                   <a:t>закончится 0 – корректными дополнением и сервер начнёт проверку </a:t>
                 </a:r>
                 <a:r>
-                  <a:rPr lang="en-US" dirty="0" smtClean="0"/>
+                  <a:rPr lang="en-US" dirty="0"/>
                   <a:t>MAC</a:t>
                 </a:r>
                 <a:r>
-                  <a:rPr lang="ru-RU" dirty="0" smtClean="0"/>
+                  <a:rPr lang="ru-RU" dirty="0"/>
                   <a:t>. Иначе – сервер вернёт ошибку даже не начав проверку </a:t>
                 </a:r>
                 <a:r>
-                  <a:rPr lang="en-US" dirty="0" smtClean="0"/>
+                  <a:rPr lang="en-US" dirty="0"/>
                   <a:t>MAC</a:t>
                 </a:r>
                 <a:r>
-                  <a:rPr lang="ru-RU" dirty="0" smtClean="0"/>
+                  <a:rPr lang="ru-RU" dirty="0"/>
                   <a:t>.</a:t>
                 </a:r>
-                <a:endParaRPr lang="ru-RU" dirty="0"/>
               </a:p>
             </p:txBody>
           </p:sp>
@@ -11169,13 +10945,6 @@
   <p:clrMapOvr>
     <a:masterClrMapping/>
   </p:clrMapOvr>
-  <p:timing>
-    <p:tnLst>
-      <p:par>
-        <p:cTn id="1" dur="indefinite" restart="never" nodeType="tmRoot"/>
-      </p:par>
-    </p:tnLst>
-  </p:timing>
 </p:sld>
 </file>
 
@@ -11212,7 +10981,7 @@
           <a:lstStyle/>
           <a:p>
             <a:r>
-              <a:rPr lang="en-US" dirty="0" smtClean="0"/>
+              <a:rPr lang="en-US" dirty="0"/>
               <a:t>Timing padding oracle</a:t>
             </a:r>
             <a:endParaRPr lang="ru-RU" dirty="0"/>
@@ -11240,7 +11009,7 @@
               <a:buNone/>
             </a:pPr>
             <a:r>
-              <a:rPr lang="ru-RU" dirty="0" smtClean="0"/>
+              <a:rPr lang="ru-RU" dirty="0"/>
               <a:t>Таким образом, противник, замеряя время ответа от сервера, может получить информацию о последнем байте интересующего его блока, что ломает семантическую стойкость шифра.</a:t>
             </a:r>
           </a:p>
@@ -11255,7 +11024,7 @@
               <a:buNone/>
             </a:pPr>
             <a:r>
-              <a:rPr lang="ru-RU" dirty="0" smtClean="0"/>
+              <a:rPr lang="ru-RU" dirty="0"/>
               <a:t>Бесплатно получили проблему необходимости константного времени.</a:t>
             </a:r>
           </a:p>
@@ -11270,15 +11039,15 @@
               <a:buNone/>
             </a:pPr>
             <a:r>
-              <a:rPr lang="ru-RU" dirty="0" smtClean="0"/>
+              <a:rPr lang="ru-RU" dirty="0"/>
               <a:t>Получить остальные байты сообщения можно использовав метод, описанный ранее – меняя длину открытого текста, сдвигая тем самым интересующий нас блок открытого текста (например </a:t>
             </a:r>
             <a:r>
-              <a:rPr lang="en-US" dirty="0" smtClean="0"/>
+              <a:rPr lang="en-US" dirty="0"/>
               <a:t>cookie)</a:t>
             </a:r>
             <a:r>
-              <a:rPr lang="ru-RU" dirty="0" smtClean="0"/>
+              <a:rPr lang="ru-RU" dirty="0"/>
               <a:t>.</a:t>
             </a:r>
           </a:p>
@@ -11293,19 +11062,19 @@
               <a:buNone/>
             </a:pPr>
             <a:r>
-              <a:rPr lang="ru-RU" dirty="0" smtClean="0"/>
+              <a:rPr lang="ru-RU" dirty="0"/>
               <a:t>На самом деле – всё было ещё хуже. Сервер явно отвечал сообщениями </a:t>
             </a:r>
             <a:r>
-              <a:rPr lang="en-US" dirty="0" err="1" smtClean="0"/>
+              <a:rPr lang="en-US" dirty="0" err="1"/>
               <a:t>bad_record_mac</a:t>
             </a:r>
             <a:r>
-              <a:rPr lang="en-US" dirty="0" smtClean="0"/>
+              <a:rPr lang="en-US" dirty="0"/>
               <a:t> </a:t>
             </a:r>
             <a:r>
-              <a:rPr lang="ru-RU" dirty="0" smtClean="0"/>
+              <a:rPr lang="ru-RU" dirty="0"/>
               <a:t>и</a:t>
             </a:r>
             <a:r>
@@ -11313,26 +11082,25 @@
               <a:t> </a:t>
             </a:r>
             <a:r>
-              <a:rPr lang="en-US" dirty="0" err="1" smtClean="0"/>
+              <a:rPr lang="en-US" dirty="0" err="1"/>
               <a:t>decryption_failed</a:t>
             </a:r>
             <a:r>
-              <a:rPr lang="en-US" dirty="0" smtClean="0"/>
+              <a:rPr lang="en-US" dirty="0"/>
               <a:t> (</a:t>
             </a:r>
             <a:r>
-              <a:rPr lang="ru-RU" dirty="0" smtClean="0"/>
+              <a:rPr lang="ru-RU" dirty="0"/>
               <a:t>см </a:t>
             </a:r>
             <a:r>
-              <a:rPr lang="ru-RU" dirty="0" err="1" smtClean="0"/>
+              <a:rPr lang="ru-RU" dirty="0" err="1"/>
               <a:t>лабу</a:t>
             </a:r>
             <a:r>
-              <a:rPr lang="ru-RU" dirty="0" smtClean="0"/>
+              <a:rPr lang="ru-RU" dirty="0"/>
               <a:t>). </a:t>
             </a:r>
-            <a:endParaRPr lang="ru-RU" dirty="0"/>
           </a:p>
         </p:txBody>
       </p:sp>
@@ -11369,13 +11137,6 @@
   <p:clrMapOvr>
     <a:masterClrMapping/>
   </p:clrMapOvr>
-  <p:timing>
-    <p:tnLst>
-      <p:par>
-        <p:cTn id="1" dur="indefinite" restart="never" nodeType="tmRoot"/>
-      </p:par>
-    </p:tnLst>
-  </p:timing>
 </p:sld>
 </file>
 
@@ -11418,7 +11179,7 @@
               <a:t>Yet Another Padding Oracle in OpenSSL CBC </a:t>
             </a:r>
             <a:r>
-              <a:rPr lang="en-US" b="1" dirty="0" err="1" smtClean="0"/>
+              <a:rPr lang="en-US" b="1" dirty="0" err="1"/>
               <a:t>Ciphersuites</a:t>
             </a:r>
             <a:endParaRPr lang="ru-RU" dirty="0"/>
@@ -11448,92 +11209,88 @@
           <a:lstStyle/>
           <a:p>
             <a:r>
-              <a:rPr lang="ru-RU" dirty="0" smtClean="0"/>
+              <a:rPr lang="ru-RU" dirty="0"/>
               <a:t>Рассмотрим уязвимость в реализации </a:t>
             </a:r>
             <a:r>
-              <a:rPr lang="en-US" dirty="0" smtClean="0"/>
+              <a:rPr lang="en-US" dirty="0"/>
               <a:t>TLS</a:t>
             </a:r>
             <a:r>
-              <a:rPr lang="ru-RU" dirty="0" smtClean="0"/>
+              <a:rPr lang="ru-RU" dirty="0"/>
               <a:t>, дающую уязвимость в виде возможности </a:t>
             </a:r>
             <a:r>
               <a:rPr lang="en-US" dirty="0"/>
-              <a:t>padding oracle (CVE-2016-2107, </a:t>
-            </a:r>
-            <a:r>
-              <a:rPr lang="en-US" dirty="0" smtClean="0"/>
-              <a:t>LuckyNegative20)</a:t>
-            </a:r>
-          </a:p>
-          <a:p>
-            <a:r>
-              <a:rPr lang="ru-RU" dirty="0" smtClean="0"/>
+              <a:t>padding oracle (CVE-2016-2107, LuckyNegative20)</a:t>
+            </a:r>
+          </a:p>
+          <a:p>
+            <a:r>
+              <a:rPr lang="ru-RU" dirty="0"/>
               <a:t>Уязвимость в </a:t>
             </a:r>
             <a:r>
-              <a:rPr lang="en-US" dirty="0" smtClean="0"/>
+              <a:rPr lang="en-US" dirty="0"/>
               <a:t>OpenSSL</a:t>
             </a:r>
             <a:r>
-              <a:rPr lang="ru-RU" dirty="0" smtClean="0"/>
+              <a:rPr lang="ru-RU" dirty="0"/>
               <a:t>, использующем </a:t>
             </a:r>
             <a:r>
-              <a:rPr lang="en-US" dirty="0" smtClean="0"/>
+              <a:rPr lang="en-US" dirty="0"/>
               <a:t>AES-CBC </a:t>
             </a:r>
             <a:r>
-              <a:rPr lang="ru-RU" dirty="0" smtClean="0"/>
+              <a:rPr lang="ru-RU" dirty="0"/>
               <a:t>с аппаратным вычислением (</a:t>
             </a:r>
             <a:r>
-              <a:rPr lang="en-US" dirty="0" smtClean="0"/>
+              <a:rPr lang="en-US" dirty="0"/>
               <a:t>AES-NI</a:t>
             </a:r>
             <a:r>
-              <a:rPr lang="ru-RU" dirty="0" smtClean="0"/>
+              <a:rPr lang="ru-RU" dirty="0"/>
               <a:t>) криптографических операций</a:t>
             </a:r>
             <a:r>
-              <a:rPr lang="en-US" dirty="0" smtClean="0"/>
+              <a:rPr lang="en-US" dirty="0"/>
               <a:t> (</a:t>
             </a:r>
             <a:r>
-              <a:rPr lang="ru-RU" dirty="0" smtClean="0"/>
+              <a:rPr lang="ru-RU" dirty="0"/>
               <a:t>исправлено в актуальной версии)</a:t>
             </a:r>
-            <a:endParaRPr lang="en-US" dirty="0" smtClean="0"/>
-          </a:p>
-          <a:p>
-            <a:r>
-              <a:rPr lang="ru-RU" dirty="0" smtClean="0"/>
+            <a:endParaRPr lang="en-US" dirty="0"/>
+          </a:p>
+          <a:p>
+            <a:r>
+              <a:rPr lang="ru-RU" dirty="0"/>
               <a:t>Все использующие данную конфигурацию на старых версиях </a:t>
             </a:r>
             <a:r>
-              <a:rPr lang="en-US" dirty="0" smtClean="0"/>
+              <a:rPr lang="en-US" dirty="0"/>
               <a:t>OpenSSL</a:t>
             </a:r>
             <a:r>
-              <a:rPr lang="ru-RU" dirty="0" smtClean="0"/>
+              <a:rPr lang="ru-RU" dirty="0"/>
               <a:t> уязвимы</a:t>
             </a:r>
           </a:p>
           <a:p>
             <a:r>
-              <a:rPr lang="ru-RU" dirty="0" smtClean="0"/>
+              <a:rPr lang="ru-RU" dirty="0"/>
               <a:t>Трудно реализуема на практике</a:t>
             </a:r>
           </a:p>
           <a:p>
             <a:r>
-              <a:rPr lang="ru-RU" dirty="0" smtClean="0"/>
+              <a:rPr lang="ru-RU" dirty="0"/>
               <a:t>Уязвимость появилась при исправлении другой уязвимости (</a:t>
             </a:r>
             <a:r>
-              <a:rPr lang="en-US" dirty="0" smtClean="0"/>
+              <a:rPr lang="en-US" dirty="0"/>
               <a:t>Lucky13)</a:t>
             </a:r>
           </a:p>
@@ -11541,7 +11298,7 @@
             <a:pPr marL="0" indent="0">
               <a:buNone/>
             </a:pPr>
-            <a:endParaRPr lang="en-US" dirty="0" smtClean="0"/>
+            <a:endParaRPr lang="en-US" dirty="0"/>
           </a:p>
           <a:p>
             <a:pPr marL="0" indent="0">
@@ -11584,13 +11341,6 @@
   <p:clrMapOvr>
     <a:masterClrMapping/>
   </p:clrMapOvr>
-  <p:timing>
-    <p:tnLst>
-      <p:par>
-        <p:cTn id="1" dur="indefinite" restart="never" nodeType="tmRoot"/>
-      </p:par>
-    </p:tnLst>
-  </p:timing>
 </p:sld>
 </file>
 
@@ -11627,10 +11377,9 @@
           <a:lstStyle/>
           <a:p>
             <a:r>
-              <a:rPr lang="ru-RU" dirty="0" smtClean="0"/>
+              <a:rPr lang="ru-RU" dirty="0"/>
               <a:t>Решение проблемы константного времени</a:t>
             </a:r>
-            <a:endParaRPr lang="ru-RU" dirty="0"/>
           </a:p>
         </p:txBody>
       </p:sp>
@@ -11653,31 +11402,31 @@
               <a:buNone/>
             </a:pPr>
             <a:r>
-              <a:rPr lang="ru-RU" dirty="0" smtClean="0"/>
+              <a:rPr lang="ru-RU" dirty="0"/>
               <a:t>Решение проблемы константного времени – не используем </a:t>
             </a:r>
             <a:r>
-              <a:rPr lang="en-US" dirty="0" smtClean="0"/>
+              <a:rPr lang="en-US" dirty="0"/>
               <a:t>if</a:t>
             </a:r>
             <a:r>
-              <a:rPr lang="ru-RU" dirty="0" smtClean="0"/>
+              <a:rPr lang="ru-RU" dirty="0"/>
               <a:t>, используем </a:t>
             </a:r>
             <a:r>
-              <a:rPr lang="en-US" dirty="0" smtClean="0"/>
+              <a:rPr lang="en-US" dirty="0"/>
               <a:t>AND</a:t>
             </a:r>
             <a:r>
-              <a:rPr lang="ru-RU" dirty="0" smtClean="0"/>
+              <a:rPr lang="ru-RU" dirty="0"/>
               <a:t>. Вычисляем ряд значений, вычисляем </a:t>
             </a:r>
             <a:r>
-              <a:rPr lang="en-US" dirty="0" smtClean="0"/>
+              <a:rPr lang="en-US" dirty="0"/>
               <a:t>AND </a:t>
             </a:r>
             <a:r>
-              <a:rPr lang="ru-RU" dirty="0" smtClean="0"/>
+              <a:rPr lang="ru-RU" dirty="0"/>
               <a:t>от их результатов и возвращаем его.</a:t>
             </a:r>
           </a:p>
@@ -11692,26 +11441,25 @@
               <a:buNone/>
             </a:pPr>
             <a:r>
-              <a:rPr lang="ru-RU" dirty="0" smtClean="0"/>
+              <a:rPr lang="ru-RU" dirty="0"/>
               <a:t>Как отделить </a:t>
             </a:r>
             <a:r>
-              <a:rPr lang="en-US" dirty="0" smtClean="0"/>
+              <a:rPr lang="en-US" dirty="0"/>
               <a:t>MAC </a:t>
             </a:r>
             <a:r>
-              <a:rPr lang="ru-RU" dirty="0" smtClean="0"/>
+              <a:rPr lang="ru-RU" dirty="0"/>
               <a:t>от открытого текста при проверке </a:t>
             </a:r>
             <a:r>
-              <a:rPr lang="en-US" dirty="0" smtClean="0"/>
+              <a:rPr lang="en-US" dirty="0"/>
               <a:t>MAC</a:t>
             </a:r>
             <a:r>
-              <a:rPr lang="ru-RU" dirty="0" smtClean="0"/>
+              <a:rPr lang="ru-RU" dirty="0"/>
               <a:t>? Используется маска, накладываемая на открытый текст, показывающая, какие байты необходимо проверить.</a:t>
             </a:r>
-            <a:endParaRPr lang="ru-RU" dirty="0"/>
           </a:p>
         </p:txBody>
       </p:sp>
@@ -11748,13 +11496,6 @@
   <p:clrMapOvr>
     <a:masterClrMapping/>
   </p:clrMapOvr>
-  <p:timing>
-    <p:tnLst>
-      <p:par>
-        <p:cTn id="1" dur="indefinite" restart="never" nodeType="tmRoot"/>
-      </p:par>
-    </p:tnLst>
-  </p:timing>
 </p:sld>
 </file>
 
@@ -11816,43 +11557,39 @@
               <a:buNone/>
             </a:pPr>
             <a:r>
-              <a:rPr lang="ru-RU" dirty="0" smtClean="0"/>
+              <a:rPr lang="ru-RU" dirty="0"/>
               <a:t>Пример. Пусть используется </a:t>
             </a:r>
             <a:r>
-              <a:rPr lang="en-US" dirty="0" smtClean="0"/>
+              <a:rPr lang="en-US" dirty="0"/>
               <a:t>HMAC</a:t>
             </a:r>
             <a:r>
               <a:rPr lang="ru-RU" dirty="0"/>
-              <a:t> </a:t>
-            </a:r>
-            <a:r>
-              <a:rPr lang="ru-RU" dirty="0" smtClean="0"/>
-              <a:t>(20 байт). Пусть сообщение длины 32 байта. Дополнение может быть не больше 32-1-20=11 байт. На основе длины сообщения, длины </a:t>
-            </a:r>
-            <a:r>
-              <a:rPr lang="en-US" dirty="0" smtClean="0"/>
+              <a:t> (20 байт). Пусть сообщение длины 32 байта. Дополнение может быть не больше 32-1-20=11 байт. На основе длины сообщения, длины </a:t>
+            </a:r>
+            <a:r>
+              <a:rPr lang="en-US" dirty="0"/>
               <a:t>MAC </a:t>
             </a:r>
             <a:r>
-              <a:rPr lang="ru-RU" dirty="0" smtClean="0"/>
+              <a:rPr lang="ru-RU" dirty="0"/>
               <a:t>и длины дополнения вычисляется маска, производится проверка дополнения, проверка </a:t>
             </a:r>
             <a:r>
-              <a:rPr lang="en-US" dirty="0" smtClean="0"/>
+              <a:rPr lang="en-US" dirty="0"/>
               <a:t>MAC</a:t>
             </a:r>
             <a:r>
-              <a:rPr lang="ru-RU" dirty="0" smtClean="0"/>
+              <a:rPr lang="ru-RU" dirty="0"/>
               <a:t>, вычисляется </a:t>
             </a:r>
             <a:r>
-              <a:rPr lang="en-US" dirty="0" smtClean="0"/>
+              <a:rPr lang="en-US" dirty="0"/>
               <a:t>AND</a:t>
             </a:r>
             <a:r>
-              <a:rPr lang="ru-RU" dirty="0" smtClean="0"/>
+              <a:rPr lang="ru-RU" dirty="0"/>
               <a:t> от результата.</a:t>
             </a:r>
           </a:p>
@@ -11921,13 +11658,6 @@
   <p:clrMapOvr>
     <a:masterClrMapping/>
   </p:clrMapOvr>
-  <p:timing>
-    <p:tnLst>
-      <p:par>
-        <p:cTn id="1" dur="indefinite" restart="never" nodeType="tmRoot"/>
-      </p:par>
-    </p:tnLst>
-  </p:timing>
 </p:sld>
 </file>
 
@@ -11964,10 +11694,9 @@
           <a:lstStyle/>
           <a:p>
             <a:r>
-              <a:rPr lang="ru-RU" dirty="0" smtClean="0"/>
+              <a:rPr lang="ru-RU" dirty="0"/>
               <a:t>Длина дополнения</a:t>
             </a:r>
-            <a:endParaRPr lang="ru-RU" dirty="0"/>
           </a:p>
         </p:txBody>
       </p:sp>
@@ -11991,27 +11720,54 @@
           <a:bodyPr/>
           <a:lstStyle/>
           <a:p>
-            <a:r>
-              <a:rPr lang="en-US" dirty="0" err="1" smtClean="0"/>
-              <a:t>maxpad</a:t>
-            </a:r>
-            <a:r>
-              <a:rPr lang="en-US" dirty="0" smtClean="0"/>
-              <a:t> – </a:t>
-            </a:r>
-            <a:r>
-              <a:rPr lang="ru-RU" dirty="0" smtClean="0"/>
-              <a:t>максимально возможная длина дополнения</a:t>
-            </a:r>
-            <a:endParaRPr lang="en-US" dirty="0" smtClean="0"/>
-          </a:p>
-          <a:p>
             <a:pPr marL="0" indent="0">
               <a:buNone/>
             </a:pPr>
             <a:r>
-              <a:rPr lang="ru-RU" dirty="0" smtClean="0"/>
-              <a:t>Пусть мы посылаем сообщение с дополнением</a:t>
+              <a:rPr lang="en-US" dirty="0" err="1"/>
+              <a:t>maxpad</a:t>
+            </a:r>
+            <a:r>
+              <a:rPr lang="en-US" dirty="0"/>
+              <a:t> – </a:t>
+            </a:r>
+            <a:r>
+              <a:rPr lang="ru-RU" dirty="0"/>
+              <a:t>максимально возможная длина дополнения</a:t>
+            </a:r>
+            <a:endParaRPr lang="en-US" dirty="0"/>
+          </a:p>
+          <a:p>
+            <a:pPr marL="0" indent="0">
+              <a:buNone/>
+            </a:pPr>
+            <a:r>
+              <a:rPr lang="ru-RU" dirty="0"/>
+              <a:t>Пусть мы посылаем сообщение длины </a:t>
+            </a:r>
+            <a:r>
+              <a:rPr lang="en-US" dirty="0" err="1"/>
+              <a:t>len</a:t>
+            </a:r>
+            <a:r>
+              <a:rPr lang="en-US" dirty="0"/>
+              <a:t>=32</a:t>
+            </a:r>
+            <a:r>
+              <a:rPr lang="ru-RU" dirty="0"/>
+              <a:t> с дополнением</a:t>
+            </a:r>
+            <a:r>
+              <a:rPr lang="en-US" dirty="0"/>
+              <a:t> </a:t>
+            </a:r>
+            <a:r>
+              <a:rPr lang="ru-RU" dirty="0"/>
+              <a:t>большим чем </a:t>
+            </a:r>
+            <a:r>
+              <a:rPr lang="en-US" dirty="0" err="1"/>
+              <a:t>maxpad</a:t>
             </a:r>
             <a:endParaRPr lang="ru-RU" dirty="0"/>
           </a:p>
@@ -12080,7 +11836,7 @@
         </p:blipFill>
         <p:spPr>
           <a:xfrm>
-            <a:off x="706576" y="4158222"/>
+            <a:off x="781732" y="4458846"/>
             <a:ext cx="10366585" cy="833905"/>
           </a:xfrm>
           <a:prstGeom prst="rect">
@@ -12098,13 +11854,6 @@
   <p:clrMapOvr>
     <a:masterClrMapping/>
   </p:clrMapOvr>
-  <p:timing>
-    <p:tnLst>
-      <p:par>
-        <p:cTn id="1" dur="indefinite" restart="never" nodeType="tmRoot"/>
-      </p:par>
-    </p:tnLst>
-  </p:timing>
 </p:sld>
 </file>
 
@@ -12171,19 +11920,19 @@
               <a:buNone/>
             </a:pPr>
             <a:r>
-              <a:rPr lang="ru-RU" dirty="0" smtClean="0"/>
+              <a:rPr lang="ru-RU" dirty="0"/>
               <a:t>После </a:t>
             </a:r>
             <a:r>
-              <a:rPr lang="ru-RU" dirty="0" err="1" smtClean="0"/>
+              <a:rPr lang="ru-RU" dirty="0" err="1"/>
               <a:t>расшифрования</a:t>
             </a:r>
             <a:r>
-              <a:rPr lang="ru-RU" dirty="0" smtClean="0"/>
+              <a:rPr lang="ru-RU" dirty="0"/>
               <a:t> и вычисления маски</a:t>
             </a:r>
             <a:r>
-              <a:rPr lang="en-US" dirty="0" smtClean="0"/>
+              <a:rPr lang="en-US" dirty="0"/>
               <a:t>:</a:t>
             </a:r>
           </a:p>
@@ -12197,7 +11946,7 @@
             <a:pPr marL="0" indent="0">
               <a:buNone/>
             </a:pPr>
-            <a:endParaRPr lang="en-US" dirty="0" smtClean="0"/>
+            <a:endParaRPr lang="en-US" dirty="0"/>
           </a:p>
           <a:p>
             <a:pPr marL="0" indent="0">
@@ -12209,7 +11958,7 @@
             <a:pPr marL="0" indent="0">
               <a:buNone/>
             </a:pPr>
-            <a:endParaRPr lang="en-US" dirty="0" smtClean="0"/>
+            <a:endParaRPr lang="en-US" dirty="0"/>
           </a:p>
           <a:p>
             <a:pPr marL="0" indent="0">
@@ -12300,13 +12049,6 @@
   <p:clrMapOvr>
     <a:masterClrMapping/>
   </p:clrMapOvr>
-  <p:timing>
-    <p:tnLst>
-      <p:par>
-        <p:cTn id="1" dur="indefinite" restart="never" nodeType="tmRoot"/>
-      </p:par>
-    </p:tnLst>
-  </p:timing>
 </p:sld>
 </file>
 
@@ -12343,10 +12085,9 @@
           <a:lstStyle/>
           <a:p>
             <a:r>
-              <a:rPr lang="ru-RU" dirty="0" smtClean="0"/>
+              <a:rPr lang="ru-RU" dirty="0"/>
               <a:t>Вычисление маски</a:t>
             </a:r>
-            <a:endParaRPr lang="ru-RU" dirty="0"/>
           </a:p>
         </p:txBody>
       </p:sp>
@@ -12369,18 +12110,14 @@
               <a:buNone/>
             </a:pPr>
             <a:r>
-              <a:rPr lang="ru-RU" dirty="0" smtClean="0"/>
-              <a:t>Если </a:t>
-            </a:r>
-            <a:r>
-              <a:rPr lang="ru-RU" dirty="0"/>
-              <a:t>задать дополнение длины 31 байт</a:t>
-            </a:r>
-            <a:r>
-              <a:rPr lang="en-US" dirty="0" smtClean="0"/>
+              <a:rPr lang="ru-RU" dirty="0"/>
+              <a:t>Если задать дополнение длины 31 байт</a:t>
+            </a:r>
+            <a:r>
+              <a:rPr lang="en-US" dirty="0"/>
               <a:t>:</a:t>
             </a:r>
-            <a:endParaRPr lang="ru-RU" dirty="0" smtClean="0"/>
+            <a:endParaRPr lang="ru-RU" dirty="0"/>
           </a:p>
           <a:p>
             <a:pPr marL="0" indent="0">
@@ -12392,7 +12129,7 @@
             <a:pPr marL="0" indent="0">
               <a:buNone/>
             </a:pPr>
-            <a:endParaRPr lang="ru-RU" dirty="0" smtClean="0"/>
+            <a:endParaRPr lang="ru-RU" dirty="0"/>
           </a:p>
           <a:p>
             <a:pPr marL="0" indent="0">
@@ -12404,38 +12141,38 @@
             <a:pPr marL="0" indent="0">
               <a:buNone/>
             </a:pPr>
-            <a:endParaRPr lang="ru-RU" dirty="0" smtClean="0"/>
+            <a:endParaRPr lang="ru-RU" dirty="0"/>
           </a:p>
           <a:p>
             <a:pPr marL="0" indent="0">
               <a:buNone/>
             </a:pPr>
             <a:r>
-              <a:rPr lang="ru-RU" dirty="0" smtClean="0"/>
+              <a:rPr lang="ru-RU" dirty="0"/>
               <a:t>Маска для проверки </a:t>
             </a:r>
             <a:r>
-              <a:rPr lang="en-US" dirty="0" smtClean="0"/>
+              <a:rPr lang="en-US" dirty="0"/>
               <a:t>MAC </a:t>
             </a:r>
             <a:r>
-              <a:rPr lang="ru-RU" dirty="0" smtClean="0"/>
+              <a:rPr lang="ru-RU" dirty="0"/>
               <a:t>стала равна 0, т.е. </a:t>
             </a:r>
             <a:r>
-              <a:rPr lang="en-US" dirty="0" smtClean="0"/>
+              <a:rPr lang="en-US" dirty="0"/>
               <a:t>MAC </a:t>
             </a:r>
             <a:r>
-              <a:rPr lang="ru-RU" dirty="0" smtClean="0"/>
+              <a:rPr lang="ru-RU" dirty="0"/>
               <a:t>всегда </a:t>
             </a:r>
             <a:r>
-              <a:rPr lang="ru-RU" dirty="0" err="1" smtClean="0"/>
+              <a:rPr lang="ru-RU" dirty="0" err="1"/>
               <a:t>коррекнтный</a:t>
             </a:r>
             <a:r>
-              <a:rPr lang="ru-RU" dirty="0" smtClean="0"/>
+              <a:rPr lang="ru-RU" dirty="0"/>
               <a:t>. Проверка дополнения завершиться успешно, если все расшифрованные байты равны 31.</a:t>
             </a:r>
             <a:endParaRPr lang="en-US" dirty="0"/>
@@ -12502,13 +12239,6 @@
   <p:clrMapOvr>
     <a:masterClrMapping/>
   </p:clrMapOvr>
-  <p:timing>
-    <p:tnLst>
-      <p:par>
-        <p:cTn id="1" dur="indefinite" restart="never" nodeType="tmRoot"/>
-      </p:par>
-    </p:tnLst>
-  </p:timing>
 </p:sld>
 </file>
 
@@ -12545,10 +12275,9 @@
           <a:lstStyle/>
           <a:p>
             <a:r>
-              <a:rPr lang="ru-RU" dirty="0" smtClean="0"/>
+              <a:rPr lang="ru-RU" dirty="0"/>
               <a:t>Возможность для атаки</a:t>
             </a:r>
-            <a:endParaRPr lang="ru-RU" dirty="0"/>
           </a:p>
         </p:txBody>
       </p:sp>
@@ -12570,7 +12299,7 @@
               <a:lstStyle/>
               <a:p>
                 <a:r>
-                  <a:rPr lang="ru-RU" dirty="0" smtClean="0"/>
+                  <a:rPr lang="ru-RU" dirty="0"/>
                   <a:t>Противник может выяснить, состоят ли сообщение из байтов </a:t>
                 </a:r>
                 <a14:m>
@@ -12584,7 +12313,7 @@
                   </m:oMath>
                 </a14:m>
                 <a:r>
-                  <a:rPr lang="ru-RU" dirty="0" smtClean="0"/>
+                  <a:rPr lang="ru-RU" dirty="0"/>
                   <a:t>, где </a:t>
                 </a:r>
                 <a14:m>
@@ -12619,45 +12348,45 @@
                   </m:oMath>
                 </a14:m>
                 <a:r>
-                  <a:rPr lang="ru-RU" dirty="0" smtClean="0"/>
+                  <a:rPr lang="ru-RU" dirty="0"/>
                   <a:t> отправляя его серверу и ожидая ответ отличный от </a:t>
                 </a:r>
                 <a:r>
-                  <a:rPr lang="en-US" dirty="0" smtClean="0"/>
+                  <a:rPr lang="en-US" dirty="0"/>
                   <a:t>BAD_MAC. </a:t>
                 </a:r>
                 <a:r>
-                  <a:rPr lang="ru-RU" dirty="0" smtClean="0"/>
+                  <a:rPr lang="ru-RU" dirty="0"/>
                   <a:t>Работает для сообщений не более </a:t>
                 </a:r>
                 <a:r>
-                  <a:rPr lang="en-US" dirty="0" smtClean="0"/>
+                  <a:rPr lang="en-US" dirty="0"/>
                   <a:t>256-20=236 </a:t>
                 </a:r>
                 <a:r>
-                  <a:rPr lang="ru-RU" dirty="0" smtClean="0"/>
+                  <a:rPr lang="ru-RU" dirty="0"/>
                   <a:t>байт.</a:t>
                 </a:r>
               </a:p>
               <a:p>
                 <a:r>
-                  <a:rPr lang="ru-RU" dirty="0" smtClean="0"/>
+                  <a:rPr lang="ru-RU" dirty="0"/>
                   <a:t>Пусть противник контролирует префикс открытого текста, который он хочет узнать (например противник может заставлять клиента отправлять сообщения вида </a:t>
                 </a:r>
                 <a:r>
-                  <a:rPr lang="en-US" dirty="0" smtClean="0"/>
+                  <a:rPr lang="en-US" dirty="0"/>
                   <a:t>path || cookie</a:t>
                 </a:r>
                 <a:r>
-                  <a:rPr lang="ru-RU" dirty="0" smtClean="0"/>
+                  <a:rPr lang="ru-RU" dirty="0"/>
                   <a:t>, контролируя </a:t>
                 </a:r>
                 <a:r>
-                  <a:rPr lang="en-US" dirty="0" smtClean="0"/>
+                  <a:rPr lang="en-US" dirty="0"/>
                   <a:t>path</a:t>
                 </a:r>
                 <a:r>
-                  <a:rPr lang="ru-RU" dirty="0" smtClean="0"/>
+                  <a:rPr lang="ru-RU" dirty="0"/>
                   <a:t>).</a:t>
                 </a:r>
               </a:p>
@@ -12734,13 +12463,6 @@
   <p:clrMapOvr>
     <a:masterClrMapping/>
   </p:clrMapOvr>
-  <p:timing>
-    <p:tnLst>
-      <p:par>
-        <p:cTn id="1" dur="indefinite" restart="never" nodeType="tmRoot"/>
-      </p:par>
-    </p:tnLst>
-  </p:timing>
 </p:sld>
 </file>
 
@@ -12777,10 +12499,9 @@
           <a:lstStyle/>
           <a:p>
             <a:r>
-              <a:rPr lang="ru-RU" dirty="0" smtClean="0"/>
+              <a:rPr lang="ru-RU" dirty="0"/>
               <a:t>Вариант атаки 1</a:t>
             </a:r>
-            <a:endParaRPr lang="ru-RU" dirty="0"/>
           </a:p>
         </p:txBody>
       </p:sp>
@@ -12807,54 +12528,46 @@
           <a:lstStyle/>
           <a:p>
             <a:r>
-              <a:rPr lang="ru-RU" dirty="0" smtClean="0"/>
+              <a:rPr lang="ru-RU" dirty="0"/>
               <a:t>Противник создаёт шифртекст из трёх блоков, в котором ему не известен последний байт блока </a:t>
             </a:r>
             <a:r>
-              <a:rPr lang="en-US" dirty="0" smtClean="0"/>
+              <a:rPr lang="en-US" dirty="0"/>
               <a:t>X</a:t>
             </a:r>
             <a:r>
-              <a:rPr lang="ru-RU" dirty="0" smtClean="0"/>
+              <a:rPr lang="ru-RU" dirty="0"/>
               <a:t> открытого текста, а остальные байты открытого </a:t>
             </a:r>
             <a:r>
-              <a:rPr lang="ru-RU" smtClean="0"/>
+              <a:rPr lang="ru-RU"/>
               <a:t>текста имеют </a:t>
             </a:r>
             <a:r>
-              <a:rPr lang="ru-RU" dirty="0" smtClean="0"/>
+              <a:rPr lang="ru-RU" dirty="0"/>
               <a:t>значения 31. Противник </a:t>
             </a:r>
             <a:r>
-              <a:rPr lang="ru-RU" dirty="0" err="1" smtClean="0"/>
+              <a:rPr lang="ru-RU" dirty="0" err="1"/>
               <a:t>ксорит</a:t>
             </a:r>
             <a:r>
-              <a:rPr lang="ru-RU" dirty="0" smtClean="0"/>
+              <a:rPr lang="ru-RU" dirty="0"/>
               <a:t> последний байт второго блока со значением </a:t>
             </a:r>
             <a:r>
-              <a:rPr lang="en-US" dirty="0" smtClean="0"/>
+              <a:rPr lang="en-US" dirty="0"/>
               <a:t>N</a:t>
             </a:r>
             <a:r>
-              <a:rPr lang="ru-RU" dirty="0" smtClean="0"/>
+              <a:rPr lang="ru-RU" dirty="0"/>
               <a:t>.  </a:t>
             </a:r>
           </a:p>
           <a:p>
             <a:r>
               <a:rPr lang="ru-RU" dirty="0"/>
-              <a:t>Но, увы, не работает. Так как первый блок </a:t>
-            </a:r>
-            <a:r>
-              <a:rPr lang="ru-RU" dirty="0" smtClean="0"/>
-              <a:t>открытого теста состоит </a:t>
-            </a:r>
-            <a:r>
-              <a:rPr lang="ru-RU" dirty="0"/>
-              <a:t>из случайного «мусора», полученного при </a:t>
+              <a:t>Но, увы, не работает. Так как первый блок открытого теста состоит из случайного «мусора», полученного при </a:t>
             </a:r>
             <a:r>
               <a:rPr lang="ru-RU" dirty="0" err="1"/>
@@ -12870,31 +12583,7 @@
             </a:r>
             <a:r>
               <a:rPr lang="ru-RU" dirty="0"/>
-              <a:t>. </a:t>
-            </a:r>
-            <a:r>
-              <a:rPr lang="ru-RU" dirty="0" smtClean="0"/>
-              <a:t>Представим пока, </a:t>
-            </a:r>
-            <a:r>
-              <a:rPr lang="ru-RU" dirty="0"/>
-              <a:t>что </a:t>
-            </a:r>
-            <a:r>
-              <a:rPr lang="ru-RU" dirty="0" smtClean="0"/>
-              <a:t>при расшифровании получим всегда 31. </a:t>
-            </a:r>
-            <a:r>
-              <a:rPr lang="ru-RU" dirty="0"/>
-              <a:t>Решим эту </a:t>
-            </a:r>
-            <a:r>
-              <a:rPr lang="ru-RU" dirty="0" smtClean="0"/>
-              <a:t>проблему позже </a:t>
-            </a:r>
-            <a:r>
-              <a:rPr lang="ru-RU" dirty="0"/>
-              <a:t>в атаке 2.</a:t>
+              <a:t>. Представим пока, что при расшифровании получим всегда 31. Решим эту проблему позже в атаке 2.</a:t>
             </a:r>
           </a:p>
           <a:p>
@@ -12965,13 +12654,6 @@
   <p:clrMapOvr>
     <a:masterClrMapping/>
   </p:clrMapOvr>
-  <p:timing>
-    <p:tnLst>
-      <p:par>
-        <p:cTn id="1" dur="indefinite" restart="never" nodeType="tmRoot"/>
-      </p:par>
-    </p:tnLst>
-  </p:timing>
 </p:sld>
 </file>
 
@@ -13008,10 +12690,9 @@
           <a:lstStyle/>
           <a:p>
             <a:r>
-              <a:rPr lang="ru-RU" dirty="0" smtClean="0"/>
+              <a:rPr lang="ru-RU" dirty="0"/>
               <a:t>Построение защищенных каналов связи</a:t>
             </a:r>
-            <a:endParaRPr lang="ru-RU" dirty="0"/>
           </a:p>
         </p:txBody>
       </p:sp>
@@ -13034,10 +12715,10 @@
               <a:buNone/>
             </a:pPr>
             <a:r>
-              <a:rPr lang="ru-RU" dirty="0" smtClean="0"/>
+              <a:rPr lang="ru-RU" dirty="0"/>
               <a:t>Одной из задач криптографии является построение защищенных каналов связи, обеспечивающий аутентичность и конфиденциальность передаваемой информации.</a:t>
             </a:r>
-            <a:endParaRPr lang="en-US" dirty="0" smtClean="0"/>
+            <a:endParaRPr lang="en-US" dirty="0"/>
           </a:p>
           <a:p>
             <a:pPr marL="0" indent="0">
@@ -13050,10 +12731,9 @@
               <a:buNone/>
             </a:pPr>
             <a:r>
-              <a:rPr lang="ru-RU" dirty="0" smtClean="0"/>
+              <a:rPr lang="ru-RU" dirty="0"/>
               <a:t>Можно выделить 2 части данных протоколов – симметричную, обеспечивающую целостность и конфиденциальность самой передаваемой информации, и ассиметричную, обеспечивающую аутентификацию участников и позволяющую согласовать общий симметричный секрет (сессионный мастер ключ).</a:t>
             </a:r>
-            <a:endParaRPr lang="ru-RU" dirty="0"/>
           </a:p>
         </p:txBody>
       </p:sp>
@@ -13090,13 +12770,6 @@
   <p:clrMapOvr>
     <a:masterClrMapping/>
   </p:clrMapOvr>
-  <p:timing>
-    <p:tnLst>
-      <p:par>
-        <p:cTn id="1" dur="indefinite" restart="never" nodeType="tmRoot"/>
-      </p:par>
-    </p:tnLst>
-  </p:timing>
 </p:sld>
 </file>
 
@@ -13167,15 +12840,15 @@
                   <a:buNone/>
                 </a:pPr>
                 <a:r>
-                  <a:rPr lang="ru-RU" dirty="0" smtClean="0"/>
+                  <a:rPr lang="ru-RU" dirty="0"/>
                   <a:t>Противник ожидает, когда сервер ответит что то кроме </a:t>
                 </a:r>
                 <a:r>
-                  <a:rPr lang="en-US" dirty="0" err="1" smtClean="0"/>
+                  <a:rPr lang="en-US" dirty="0" err="1"/>
                   <a:t>bad_mac</a:t>
                 </a:r>
                 <a:r>
-                  <a:rPr lang="ru-RU" dirty="0" smtClean="0"/>
+                  <a:rPr lang="ru-RU" dirty="0"/>
                   <a:t>, и следовательно последний байт открытого текста равен </a:t>
                 </a:r>
                 <a14:m>
@@ -13219,7 +12892,7 @@
                   </m:oMath>
                 </a14:m>
                 <a:r>
-                  <a:rPr lang="ru-RU" dirty="0" smtClean="0"/>
+                  <a:rPr lang="ru-RU" dirty="0"/>
                   <a:t>, где </a:t>
                 </a:r>
                 <a14:m>
@@ -13233,7 +12906,7 @@
                   </m:oMath>
                 </a14:m>
                 <a:r>
-                  <a:rPr lang="ru-RU" dirty="0" smtClean="0"/>
+                  <a:rPr lang="ru-RU" dirty="0"/>
                   <a:t> искомый байт. </a:t>
                 </a:r>
               </a:p>
@@ -13242,23 +12915,23 @@
                   <a:buNone/>
                 </a:pPr>
                 <a:r>
-                  <a:rPr lang="ru-RU" dirty="0" smtClean="0"/>
+                  <a:rPr lang="ru-RU" dirty="0"/>
                   <a:t>Далее противник сдвигает открытый текст влево перед </a:t>
                 </a:r>
                 <a:r>
-                  <a:rPr lang="ru-RU" dirty="0" err="1" smtClean="0"/>
+                  <a:rPr lang="ru-RU" dirty="0" err="1"/>
                   <a:t>зашифрованием</a:t>
                 </a:r>
                 <a:r>
-                  <a:rPr lang="ru-RU" dirty="0" smtClean="0"/>
+                  <a:rPr lang="ru-RU" dirty="0"/>
                   <a:t> и находит второй байт (</a:t>
                 </a:r>
                 <a:r>
-                  <a:rPr lang="ru-RU" dirty="0" err="1" smtClean="0"/>
+                  <a:rPr lang="ru-RU" dirty="0" err="1"/>
                   <a:t>подксоривая</a:t>
                 </a:r>
                 <a:r>
-                  <a:rPr lang="ru-RU" dirty="0" smtClean="0"/>
+                  <a:rPr lang="ru-RU" dirty="0"/>
                   <a:t> второй байт с конца во втором блоке найденной величиной </a:t>
                 </a:r>
                 <a14:m>
@@ -13272,7 +12945,7 @@
                   </m:oMath>
                 </a14:m>
                 <a:r>
-                  <a:rPr lang="ru-RU" dirty="0" smtClean="0"/>
+                  <a:rPr lang="ru-RU" dirty="0"/>
                   <a:t>) на находит величину </a:t>
                 </a:r>
                 <a14:m>
@@ -13281,7 +12954,7 @@
                       <m:sSubPr>
                         <m:ctrlPr>
                           <a:rPr lang="en-US" b="0" i="1" smtClean="0">
-                            <a:latin typeface="Cambria Math"/>
+                            <a:latin typeface="Cambria Math" panose="02040503050406030204" pitchFamily="18" charset="0"/>
                           </a:rPr>
                         </m:ctrlPr>
                       </m:sSubPr>
@@ -13305,18 +12978,18 @@
                   </m:oMath>
                 </a14:m>
                 <a:r>
-                  <a:rPr lang="ru-RU" dirty="0" smtClean="0"/>
+                  <a:rPr lang="ru-RU" dirty="0"/>
                   <a:t> (которую необходимо </a:t>
                 </a:r>
                 <a:r>
-                  <a:rPr lang="ru-RU" dirty="0" err="1" smtClean="0"/>
+                  <a:rPr lang="ru-RU" dirty="0" err="1"/>
                   <a:t>подксорить</a:t>
                 </a:r>
                 <a:r>
-                  <a:rPr lang="ru-RU" dirty="0" smtClean="0"/>
+                  <a:rPr lang="ru-RU" dirty="0"/>
                   <a:t> к новому последнему байту во втором блоке для получения значения 31 в последнем байте отрытого текста).</a:t>
                 </a:r>
-                <a:endParaRPr lang="en-US" dirty="0" smtClean="0"/>
+                <a:endParaRPr lang="en-US" dirty="0"/>
               </a:p>
             </p:txBody>
           </p:sp>
@@ -13422,13 +13095,6 @@
   <p:clrMapOvr>
     <a:masterClrMapping/>
   </p:clrMapOvr>
-  <p:timing>
-    <p:tnLst>
-      <p:par>
-        <p:cTn id="1" dur="indefinite" restart="never" nodeType="tmRoot"/>
-      </p:par>
-    </p:tnLst>
-  </p:timing>
 </p:sld>
 </file>
 
@@ -13465,10 +13131,9 @@
           <a:lstStyle/>
           <a:p>
             <a:r>
-              <a:rPr lang="ru-RU" dirty="0" smtClean="0"/>
+              <a:rPr lang="ru-RU" dirty="0"/>
               <a:t>Вариант атаки 2</a:t>
             </a:r>
-            <a:endParaRPr lang="ru-RU" dirty="0"/>
           </a:p>
         </p:txBody>
       </p:sp>
@@ -13493,7 +13158,7 @@
                   <a:buNone/>
                 </a:pPr>
                 <a:r>
-                  <a:rPr lang="ru-RU" dirty="0" smtClean="0"/>
+                  <a:rPr lang="ru-RU" dirty="0"/>
                   <a:t>Решим проблему «мусора» первый атаки. Создадим атаку 2.</a:t>
                 </a:r>
               </a:p>
@@ -13502,7 +13167,7 @@
                   <a:buNone/>
                 </a:pPr>
                 <a:r>
-                  <a:rPr lang="ru-RU" dirty="0" smtClean="0"/>
+                  <a:rPr lang="ru-RU" dirty="0"/>
                   <a:t>Противник контролирует постфикс открытого текста. Постфикс состоит из двух блоков, состоящих из байтов 31.</a:t>
                 </a:r>
               </a:p>
@@ -13511,19 +13176,19 @@
                   <a:buNone/>
                 </a:pPr>
                 <a:r>
-                  <a:rPr lang="ru-RU" dirty="0" smtClean="0"/>
+                  <a:rPr lang="ru-RU" dirty="0"/>
                   <a:t>Аналогично атаке 1, ждём ответа отличного от </a:t>
                 </a:r>
                 <a:r>
-                  <a:rPr lang="en-US" dirty="0" err="1" smtClean="0"/>
+                  <a:rPr lang="en-US" dirty="0" err="1"/>
                   <a:t>bad_mac</a:t>
                 </a:r>
                 <a:r>
-                  <a:rPr lang="en-US" dirty="0" smtClean="0"/>
+                  <a:rPr lang="en-US" dirty="0"/>
                   <a:t> </a:t>
                 </a:r>
                 <a:r>
-                  <a:rPr lang="ru-RU" dirty="0" smtClean="0"/>
+                  <a:rPr lang="ru-RU" dirty="0"/>
                   <a:t>и восстанавливаем </a:t>
                 </a:r>
                 <a14:m>
@@ -13680,13 +13345,6 @@
   <p:clrMapOvr>
     <a:masterClrMapping/>
   </p:clrMapOvr>
-  <p:timing>
-    <p:tnLst>
-      <p:par>
-        <p:cTn id="1" dur="indefinite" restart="never" nodeType="tmRoot"/>
-      </p:par>
-    </p:tnLst>
-  </p:timing>
 </p:sld>
 </file>
 
@@ -13723,79 +13381,78 @@
           <a:lstStyle/>
           <a:p>
             <a:r>
-              <a:rPr lang="ru-RU" dirty="0" smtClean="0"/>
+              <a:rPr lang="ru-RU" dirty="0"/>
               <a:t>Проверка на уязвимость</a:t>
             </a:r>
+          </a:p>
+        </p:txBody>
+      </p:sp>
+      <p:sp>
+        <p:nvSpPr>
+          <p:cNvPr id="3" name="Объект 2"/>
+          <p:cNvSpPr>
+            <a:spLocks noGrp="1"/>
+          </p:cNvSpPr>
+          <p:nvPr>
+            <p:ph idx="1"/>
+          </p:nvPr>
+        </p:nvSpPr>
+        <p:spPr/>
+        <p:txBody>
+          <a:bodyPr/>
+          <a:lstStyle/>
+          <a:p>
+            <a:r>
+              <a:rPr lang="ru-RU" dirty="0"/>
+              <a:t>Запросить у сервера сообщение, </a:t>
+            </a:r>
+            <a:r>
+              <a:rPr lang="ru-RU" dirty="0" err="1"/>
+              <a:t>расшифруемое</a:t>
+            </a:r>
+            <a:r>
+              <a:rPr lang="ru-RU" dirty="0"/>
+              <a:t> как «</a:t>
+            </a:r>
+            <a:r>
+              <a:rPr lang="en-US" dirty="0"/>
+              <a:t>AAAAAAAAAAAAAAAAAAAAAAAAAAAAAAAA</a:t>
+            </a:r>
+            <a:r>
+              <a:rPr lang="ru-RU" dirty="0"/>
+              <a:t>». Если ответ «</a:t>
+            </a:r>
+            <a:r>
+              <a:rPr lang="en-US" dirty="0"/>
+              <a:t>DATA_LENGTH_TOO_LONG</a:t>
+            </a:r>
+            <a:r>
+              <a:rPr lang="ru-RU" dirty="0"/>
+              <a:t>» - сервер уязвим. Если «</a:t>
+            </a:r>
+            <a:r>
+              <a:rPr lang="en-US" dirty="0"/>
+              <a:t>BAD_RECORD_MAC</a:t>
+            </a:r>
+            <a:r>
+              <a:rPr lang="ru-RU" dirty="0"/>
+              <a:t>» - защищен.</a:t>
+            </a:r>
+          </a:p>
+          <a:p>
+            <a:r>
+              <a:rPr lang="en-US" dirty="0"/>
+              <a:t>A </a:t>
+            </a:r>
+            <a:r>
+              <a:rPr lang="ru-RU" dirty="0"/>
+              <a:t>выбрана только потому, что </a:t>
+            </a:r>
+            <a:r>
+              <a:rPr lang="en-US" dirty="0"/>
+              <a:t>A&gt;32-1</a:t>
+            </a:r>
             <a:endParaRPr lang="ru-RU" dirty="0"/>
-          </a:p>
-        </p:txBody>
-      </p:sp>
-      <p:sp>
-        <p:nvSpPr>
-          <p:cNvPr id="3" name="Объект 2"/>
-          <p:cNvSpPr>
-            <a:spLocks noGrp="1"/>
-          </p:cNvSpPr>
-          <p:nvPr>
-            <p:ph idx="1"/>
-          </p:nvPr>
-        </p:nvSpPr>
-        <p:spPr/>
-        <p:txBody>
-          <a:bodyPr/>
-          <a:lstStyle/>
-          <a:p>
-            <a:r>
-              <a:rPr lang="ru-RU" dirty="0" smtClean="0"/>
-              <a:t>Запросить у сервера сообщение, </a:t>
-            </a:r>
-            <a:r>
-              <a:rPr lang="ru-RU" dirty="0" err="1" smtClean="0"/>
-              <a:t>расшифруемое</a:t>
-            </a:r>
-            <a:r>
-              <a:rPr lang="ru-RU" dirty="0" smtClean="0"/>
-              <a:t> как «</a:t>
-            </a:r>
-            <a:r>
-              <a:rPr lang="en-US" dirty="0"/>
-              <a:t>AAAAAAAAAAAAAAAAAAAAAAAAAAAAAAAA</a:t>
-            </a:r>
-            <a:r>
-              <a:rPr lang="ru-RU" dirty="0" smtClean="0"/>
-              <a:t>». Если ответ «</a:t>
-            </a:r>
-            <a:r>
-              <a:rPr lang="en-US" dirty="0" smtClean="0"/>
-              <a:t>DATA_LENGTH_TOO_LONG</a:t>
-            </a:r>
-            <a:r>
-              <a:rPr lang="ru-RU" dirty="0" smtClean="0"/>
-              <a:t>» - сервер уязвим. Если «</a:t>
-            </a:r>
-            <a:r>
-              <a:rPr lang="en-US" dirty="0" smtClean="0"/>
-              <a:t>BAD_RECORD_MAC</a:t>
-            </a:r>
-            <a:r>
-              <a:rPr lang="ru-RU" dirty="0" smtClean="0"/>
-              <a:t>» - защищен.</a:t>
-            </a:r>
-          </a:p>
-          <a:p>
-            <a:r>
-              <a:rPr lang="en-US" dirty="0" smtClean="0"/>
-              <a:t>A </a:t>
-            </a:r>
-            <a:r>
-              <a:rPr lang="ru-RU" dirty="0" smtClean="0"/>
-              <a:t>выбрана только потому, что </a:t>
-            </a:r>
-            <a:r>
-              <a:rPr lang="en-US" dirty="0" smtClean="0"/>
-              <a:t>A&gt;32-1</a:t>
-            </a:r>
-            <a:endParaRPr lang="ru-RU" dirty="0" smtClean="0"/>
           </a:p>
           <a:p>
             <a:pPr marL="0" indent="0">
@@ -13862,13 +13519,6 @@
   <p:clrMapOvr>
     <a:masterClrMapping/>
   </p:clrMapOvr>
-  <p:timing>
-    <p:tnLst>
-      <p:par>
-        <p:cTn id="1" dur="indefinite" restart="never" nodeType="tmRoot"/>
-      </p:par>
-    </p:tnLst>
-  </p:timing>
 </p:sld>
 </file>
 
@@ -13905,10 +13555,9 @@
           <a:lstStyle/>
           <a:p>
             <a:r>
-              <a:rPr lang="ru-RU" dirty="0" smtClean="0"/>
+              <a:rPr lang="ru-RU" dirty="0"/>
               <a:t>Исправление ошибки</a:t>
             </a:r>
-            <a:endParaRPr lang="ru-RU" dirty="0"/>
           </a:p>
         </p:txBody>
       </p:sp>
@@ -13931,10 +13580,9 @@
               <a:buNone/>
             </a:pPr>
             <a:r>
-              <a:rPr lang="ru-RU" dirty="0" smtClean="0"/>
+              <a:rPr lang="ru-RU" dirty="0"/>
               <a:t>Проверка, что дополнение не выходит за разрешенные границы максимального размера дополнения.</a:t>
             </a:r>
-            <a:endParaRPr lang="ru-RU" dirty="0"/>
           </a:p>
         </p:txBody>
       </p:sp>
@@ -13995,13 +13643,6 @@
   <p:clrMapOvr>
     <a:masterClrMapping/>
   </p:clrMapOvr>
-  <p:timing>
-    <p:tnLst>
-      <p:par>
-        <p:cTn id="1" dur="indefinite" restart="never" nodeType="tmRoot"/>
-      </p:par>
-    </p:tnLst>
-  </p:timing>
 </p:sld>
 </file>
 
@@ -14038,10 +13679,9 @@
           <a:lstStyle/>
           <a:p>
             <a:r>
-              <a:rPr lang="ru-RU" dirty="0" smtClean="0"/>
+              <a:rPr lang="ru-RU" dirty="0"/>
               <a:t>Выводы</a:t>
             </a:r>
-            <a:endParaRPr lang="ru-RU" dirty="0"/>
           </a:p>
         </p:txBody>
       </p:sp>
@@ -14061,56 +13701,55 @@
           <a:lstStyle/>
           <a:p>
             <a:r>
-              <a:rPr lang="ru-RU" dirty="0" smtClean="0"/>
+              <a:rPr lang="ru-RU" dirty="0"/>
               <a:t>Лучше использовать </a:t>
             </a:r>
             <a:r>
-              <a:rPr lang="en-US" dirty="0" smtClean="0"/>
+              <a:rPr lang="en-US" dirty="0"/>
               <a:t>Encrypt-Then-MAC </a:t>
             </a:r>
             <a:r>
-              <a:rPr lang="ru-RU" dirty="0" smtClean="0"/>
+              <a:rPr lang="ru-RU" dirty="0"/>
               <a:t>или один из стандартов </a:t>
             </a:r>
             <a:r>
-              <a:rPr lang="en-US" dirty="0" smtClean="0"/>
+              <a:rPr lang="en-US" dirty="0"/>
               <a:t>AEAD </a:t>
             </a:r>
             <a:r>
-              <a:rPr lang="ru-RU" dirty="0" smtClean="0"/>
+              <a:rPr lang="ru-RU" dirty="0"/>
               <a:t>шифрования</a:t>
             </a:r>
           </a:p>
           <a:p>
             <a:r>
-              <a:rPr lang="en-US" dirty="0" smtClean="0"/>
+              <a:rPr lang="en-US" dirty="0"/>
               <a:t>Encrypt-and-MAC </a:t>
             </a:r>
             <a:r>
-              <a:rPr lang="ru-RU" dirty="0" smtClean="0"/>
+              <a:rPr lang="ru-RU" dirty="0"/>
               <a:t>и </a:t>
             </a:r>
             <a:r>
-              <a:rPr lang="en-US" smtClean="0"/>
+              <a:rPr lang="en-US"/>
               <a:t>MAC-then-Encrypt </a:t>
             </a:r>
             <a:r>
-              <a:rPr lang="ru-RU" dirty="0" smtClean="0"/>
+              <a:rPr lang="ru-RU" dirty="0"/>
               <a:t>ведут к потенциальным уязвимостям в реализации и проектировании</a:t>
             </a:r>
           </a:p>
           <a:p>
             <a:r>
-              <a:rPr lang="ru-RU" dirty="0" smtClean="0"/>
+              <a:rPr lang="ru-RU" dirty="0"/>
               <a:t>Никогда не придумывать криптографию</a:t>
             </a:r>
           </a:p>
           <a:p>
             <a:r>
-              <a:rPr lang="ru-RU" dirty="0" smtClean="0"/>
+              <a:rPr lang="ru-RU" dirty="0"/>
               <a:t>Никогда не реализовывать криптографию</a:t>
             </a:r>
-            <a:endParaRPr lang="ru-RU" dirty="0"/>
           </a:p>
         </p:txBody>
       </p:sp>
@@ -14147,13 +13786,6 @@
   <p:clrMapOvr>
     <a:masterClrMapping/>
   </p:clrMapOvr>
-  <p:timing>
-    <p:tnLst>
-      <p:par>
-        <p:cTn id="1" dur="indefinite" restart="never" nodeType="tmRoot"/>
-      </p:par>
-    </p:tnLst>
-  </p:timing>
 </p:sld>
 </file>
 
@@ -14190,14 +13822,13 @@
           <a:lstStyle/>
           <a:p>
             <a:r>
-              <a:rPr lang="en-US" dirty="0" smtClean="0"/>
+              <a:rPr lang="en-US" dirty="0"/>
               <a:t>TSL 1.3 </a:t>
             </a:r>
             <a:r>
-              <a:rPr lang="ru-RU" dirty="0" smtClean="0"/>
+              <a:rPr lang="ru-RU" dirty="0"/>
               <a:t>ссылки</a:t>
             </a:r>
-            <a:endParaRPr lang="ru-RU" dirty="0"/>
           </a:p>
         </p:txBody>
       </p:sp>
@@ -14220,45 +13851,27 @@
               <a:rPr lang="en-US" dirty="0">
                 <a:hlinkClick r:id="rId2"/>
               </a:rPr>
-              <a:t>https://tls13.ulfheim.net</a:t>
-            </a:r>
-            <a:r>
-              <a:rPr lang="en-US" dirty="0" smtClean="0">
-                <a:hlinkClick r:id="rId2"/>
-              </a:rPr>
-              <a:t>/</a:t>
-            </a:r>
-            <a:endParaRPr lang="ru-RU" dirty="0" smtClean="0"/>
+              <a:t>https://tls13.ulfheim.net/</a:t>
+            </a:r>
+            <a:endParaRPr lang="ru-RU" dirty="0"/>
           </a:p>
           <a:p>
             <a:r>
               <a:rPr lang="en-US" dirty="0">
                 <a:hlinkClick r:id="rId3"/>
               </a:rPr>
-              <a:t>https://blog.cloudflare.com/rfc-8446-aka-tls-1-3</a:t>
-            </a:r>
-            <a:r>
-              <a:rPr lang="en-US" dirty="0" smtClean="0">
-                <a:hlinkClick r:id="rId3"/>
-              </a:rPr>
-              <a:t>/</a:t>
-            </a:r>
-            <a:endParaRPr lang="en-US" dirty="0" smtClean="0"/>
+              <a:t>https://blog.cloudflare.com/rfc-8446-aka-tls-1-3/</a:t>
+            </a:r>
+            <a:endParaRPr lang="en-US" dirty="0"/>
           </a:p>
           <a:p>
             <a:r>
               <a:rPr lang="en-US" dirty="0">
                 <a:hlinkClick r:id="rId4"/>
               </a:rPr>
-              <a:t>https://davidwong.fr/tls13</a:t>
-            </a:r>
-            <a:r>
-              <a:rPr lang="en-US" dirty="0" smtClean="0">
-                <a:hlinkClick r:id="rId4"/>
-              </a:rPr>
-              <a:t>/</a:t>
-            </a:r>
-            <a:endParaRPr lang="en-US" dirty="0" smtClean="0"/>
+              <a:t>https://davidwong.fr/tls13/</a:t>
+            </a:r>
+            <a:endParaRPr lang="en-US" dirty="0"/>
           </a:p>
           <a:p>
             <a:endParaRPr lang="ru-RU" dirty="0"/>
@@ -14334,7 +13947,7 @@
           <a:lstStyle/>
           <a:p>
             <a:r>
-              <a:rPr lang="en-US" dirty="0" smtClean="0"/>
+              <a:rPr lang="en-US" dirty="0"/>
               <a:t>IPsec</a:t>
             </a:r>
             <a:endParaRPr lang="ru-RU" dirty="0"/>
@@ -14357,47 +13970,47 @@
           <a:lstStyle/>
           <a:p>
             <a:r>
-              <a:rPr lang="ru-RU" dirty="0" smtClean="0"/>
+              <a:rPr lang="ru-RU" dirty="0"/>
               <a:t>Обеспечивает целостность и конфиденциальность </a:t>
             </a:r>
             <a:r>
-              <a:rPr lang="en-US" dirty="0" smtClean="0"/>
+              <a:rPr lang="en-US" dirty="0"/>
               <a:t>IP</a:t>
             </a:r>
             <a:r>
-              <a:rPr lang="ru-RU" dirty="0" smtClean="0"/>
+              <a:rPr lang="ru-RU" dirty="0"/>
               <a:t> пакетов</a:t>
             </a:r>
           </a:p>
           <a:p>
             <a:r>
-              <a:rPr lang="ru-RU" dirty="0" smtClean="0"/>
+              <a:rPr lang="ru-RU" dirty="0"/>
               <a:t>На самом деле – семейство протоколов. Рассмотрим протокол </a:t>
             </a:r>
             <a:r>
-              <a:rPr lang="en-US" dirty="0" smtClean="0"/>
+              <a:rPr lang="en-US" dirty="0"/>
               <a:t>ESP (encapsulated security payload)</a:t>
             </a:r>
             <a:r>
-              <a:rPr lang="ru-RU" dirty="0" smtClean="0"/>
+              <a:rPr lang="ru-RU" dirty="0"/>
               <a:t> в режиме </a:t>
             </a:r>
             <a:r>
-              <a:rPr lang="ru-RU" dirty="0" err="1" smtClean="0"/>
+              <a:rPr lang="ru-RU" dirty="0" err="1"/>
               <a:t>тунелирования</a:t>
             </a:r>
             <a:r>
-              <a:rPr lang="ru-RU" dirty="0" smtClean="0"/>
+              <a:rPr lang="ru-RU" dirty="0"/>
               <a:t>.</a:t>
             </a:r>
           </a:p>
           <a:p>
             <a:r>
-              <a:rPr lang="ru-RU" dirty="0" smtClean="0"/>
+              <a:rPr lang="ru-RU" dirty="0"/>
               <a:t>Используется для построения </a:t>
             </a:r>
             <a:r>
-              <a:rPr lang="en-US" dirty="0" smtClean="0"/>
+              <a:rPr lang="en-US" dirty="0"/>
               <a:t>VPN</a:t>
             </a:r>
             <a:endParaRPr lang="ru-RU" dirty="0"/>
@@ -14497,7 +14110,7 @@
           <a:lstStyle/>
           <a:p>
             <a:r>
-              <a:rPr lang="en-US" dirty="0" smtClean="0"/>
+              <a:rPr lang="en-US" dirty="0"/>
               <a:t>IP</a:t>
             </a:r>
             <a:endParaRPr lang="ru-RU" dirty="0"/>
@@ -14530,173 +14143,157 @@
               <a:buNone/>
             </a:pPr>
             <a:r>
-              <a:rPr lang="ru-RU" dirty="0" smtClean="0"/>
+              <a:rPr lang="ru-RU" dirty="0"/>
               <a:t>Рассмотрим </a:t>
             </a:r>
             <a:r>
-              <a:rPr lang="en-US" dirty="0" smtClean="0"/>
+              <a:rPr lang="en-US" dirty="0"/>
               <a:t>IP</a:t>
             </a:r>
             <a:r>
-              <a:rPr lang="ru-RU" dirty="0" smtClean="0"/>
+              <a:rPr lang="ru-RU" dirty="0"/>
               <a:t> пакет для </a:t>
             </a:r>
             <a:r>
-              <a:rPr lang="en-US" dirty="0" smtClean="0"/>
+              <a:rPr lang="en-US" dirty="0"/>
               <a:t>IPv4.</a:t>
             </a:r>
           </a:p>
           <a:p>
             <a:r>
               <a:rPr lang="en-US" dirty="0" err="1"/>
-              <a:t>v</a:t>
-            </a:r>
-            <a:r>
-              <a:rPr lang="en-US" dirty="0" err="1" smtClean="0"/>
-              <a:t>er</a:t>
-            </a:r>
-            <a:r>
-              <a:rPr lang="en-US" dirty="0" smtClean="0"/>
+              <a:t>ver</a:t>
+            </a:r>
+            <a:r>
+              <a:rPr lang="en-US" dirty="0"/>
               <a:t> – </a:t>
             </a:r>
             <a:r>
-              <a:rPr lang="ru-RU" dirty="0" smtClean="0"/>
+              <a:rPr lang="ru-RU" dirty="0"/>
               <a:t>версия, равна 4 для </a:t>
             </a:r>
             <a:r>
-              <a:rPr lang="en-US" dirty="0" smtClean="0"/>
+              <a:rPr lang="en-US" dirty="0"/>
               <a:t>IPv4</a:t>
             </a:r>
             <a:r>
-              <a:rPr lang="ru-RU" dirty="0" smtClean="0"/>
+              <a:rPr lang="ru-RU" dirty="0"/>
               <a:t> (1 байт)</a:t>
             </a:r>
-            <a:endParaRPr lang="en-US" dirty="0" smtClean="0"/>
-          </a:p>
-          <a:p>
-            <a:r>
-              <a:rPr lang="en-US" dirty="0"/>
-              <a:t>p</a:t>
-            </a:r>
-            <a:r>
-              <a:rPr lang="en-US" dirty="0" smtClean="0"/>
-              <a:t>acket </a:t>
-            </a:r>
-            <a:r>
-              <a:rPr lang="en-US" dirty="0" err="1" smtClean="0"/>
+            <a:endParaRPr lang="en-US" dirty="0"/>
+          </a:p>
+          <a:p>
+            <a:r>
+              <a:rPr lang="en-US" dirty="0"/>
+              <a:t>packet </a:t>
+            </a:r>
+            <a:r>
+              <a:rPr lang="en-US" dirty="0" err="1"/>
               <a:t>len</a:t>
             </a:r>
             <a:r>
-              <a:rPr lang="en-US" dirty="0" smtClean="0"/>
+              <a:rPr lang="en-US" dirty="0"/>
               <a:t> – </a:t>
             </a:r>
             <a:r>
-              <a:rPr lang="ru-RU" dirty="0" smtClean="0"/>
+              <a:rPr lang="ru-RU" dirty="0"/>
               <a:t>длина </a:t>
             </a:r>
             <a:r>
-              <a:rPr lang="ru-RU" b="1" dirty="0" smtClean="0"/>
+              <a:rPr lang="ru-RU" b="1" dirty="0"/>
               <a:t>всего</a:t>
             </a:r>
             <a:r>
-              <a:rPr lang="ru-RU" dirty="0" smtClean="0"/>
+              <a:rPr lang="ru-RU" dirty="0"/>
               <a:t> пакета (2 байта)</a:t>
             </a:r>
           </a:p>
           <a:p>
             <a:r>
               <a:rPr lang="en-US" dirty="0" err="1"/>
-              <a:t>p</a:t>
-            </a:r>
-            <a:r>
-              <a:rPr lang="en-US" dirty="0" err="1" smtClean="0"/>
-              <a:t>rot</a:t>
-            </a:r>
-            <a:r>
-              <a:rPr lang="en-US" dirty="0" smtClean="0"/>
+              <a:t>prot</a:t>
+            </a:r>
+            <a:r>
+              <a:rPr lang="en-US" dirty="0"/>
               <a:t> – </a:t>
             </a:r>
             <a:r>
-              <a:rPr lang="ru-RU" dirty="0" smtClean="0"/>
+              <a:rPr lang="ru-RU" dirty="0"/>
               <a:t>описание протокола верхнего уровня (</a:t>
             </a:r>
             <a:r>
-              <a:rPr lang="en-US" dirty="0" smtClean="0"/>
+              <a:rPr lang="en-US" dirty="0"/>
               <a:t>TCP=6)</a:t>
             </a:r>
           </a:p>
           <a:p>
             <a:r>
-              <a:rPr lang="en-US" dirty="0" err="1" smtClean="0"/>
+              <a:rPr lang="en-US" dirty="0" err="1"/>
               <a:t>hdr</a:t>
             </a:r>
             <a:r>
-              <a:rPr lang="en-US" dirty="0" smtClean="0"/>
+              <a:rPr lang="en-US" dirty="0"/>
               <a:t> </a:t>
             </a:r>
             <a:r>
-              <a:rPr lang="en-US" dirty="0" err="1" smtClean="0"/>
+              <a:rPr lang="en-US" dirty="0" err="1"/>
               <a:t>checkum</a:t>
             </a:r>
             <a:r>
-              <a:rPr lang="en-US" dirty="0" smtClean="0"/>
+              <a:rPr lang="en-US" dirty="0"/>
               <a:t> – </a:t>
             </a:r>
             <a:r>
-              <a:rPr lang="ru-RU" dirty="0" smtClean="0"/>
+              <a:rPr lang="ru-RU" dirty="0"/>
               <a:t>контрольная сумма</a:t>
             </a:r>
-            <a:endParaRPr lang="en-US" dirty="0" smtClean="0"/>
-          </a:p>
-          <a:p>
-            <a:r>
-              <a:rPr lang="en-US" smtClean="0"/>
+            <a:endParaRPr lang="en-US" dirty="0"/>
+          </a:p>
+          <a:p>
+            <a:r>
+              <a:rPr lang="en-US"/>
               <a:t>source</a:t>
             </a:r>
             <a:r>
-              <a:rPr lang="en-US" dirty="0" smtClean="0"/>
+              <a:rPr lang="en-US" dirty="0"/>
               <a:t>, </a:t>
             </a:r>
             <a:r>
-              <a:rPr lang="en-US" dirty="0" err="1" smtClean="0"/>
+              <a:rPr lang="en-US" dirty="0" err="1"/>
               <a:t>dest</a:t>
             </a:r>
             <a:r>
-              <a:rPr lang="en-US" dirty="0" smtClean="0"/>
+              <a:rPr lang="en-US" dirty="0"/>
               <a:t> – </a:t>
             </a:r>
             <a:r>
-              <a:rPr lang="en-US" dirty="0" err="1" smtClean="0"/>
+              <a:rPr lang="en-US" dirty="0" err="1"/>
               <a:t>ip</a:t>
             </a:r>
             <a:r>
-              <a:rPr lang="en-US" dirty="0" smtClean="0"/>
+              <a:rPr lang="en-US" dirty="0"/>
               <a:t> </a:t>
             </a:r>
             <a:r>
-              <a:rPr lang="ru-RU" dirty="0" smtClean="0"/>
+              <a:rPr lang="ru-RU" dirty="0"/>
               <a:t>адрес получателя и отправителя пакета</a:t>
             </a:r>
             <a:r>
-              <a:rPr lang="en-US" dirty="0" smtClean="0"/>
+              <a:rPr lang="en-US" dirty="0"/>
               <a:t> </a:t>
             </a:r>
           </a:p>
           <a:p>
             <a:r>
               <a:rPr lang="en-US" dirty="0"/>
-              <a:t>p</a:t>
-            </a:r>
-            <a:r>
-              <a:rPr lang="en-US" dirty="0" smtClean="0"/>
-              <a:t>ayload – </a:t>
-            </a:r>
-            <a:r>
-              <a:rPr lang="ru-RU" dirty="0" smtClean="0"/>
+              <a:t>payload – </a:t>
+            </a:r>
+            <a:r>
+              <a:rPr lang="ru-RU" dirty="0"/>
               <a:t>данные для передачи</a:t>
             </a:r>
             <a:r>
-              <a:rPr lang="en-US" dirty="0" smtClean="0"/>
+              <a:rPr lang="en-US" dirty="0"/>
               <a:t> </a:t>
             </a:r>
             <a:endParaRPr lang="ru-RU" dirty="0"/>
@@ -14796,11 +14393,11 @@
           <a:lstStyle/>
           <a:p>
             <a:r>
-              <a:rPr lang="ru-RU" dirty="0" smtClean="0"/>
+              <a:rPr lang="ru-RU" dirty="0"/>
               <a:t>Инкапсуляция </a:t>
             </a:r>
             <a:r>
-              <a:rPr lang="en-US" dirty="0" smtClean="0"/>
+              <a:rPr lang="en-US" dirty="0"/>
               <a:t>IPsec</a:t>
             </a:r>
             <a:endParaRPr lang="ru-RU" dirty="0"/>
@@ -14833,52 +14430,50 @@
               <a:buNone/>
             </a:pPr>
             <a:r>
-              <a:rPr lang="ru-RU" dirty="0" smtClean="0"/>
+              <a:rPr lang="ru-RU" dirty="0"/>
               <a:t>На конечных точках имеет </a:t>
             </a:r>
             <a:r>
-              <a:rPr lang="en-US" dirty="0" smtClean="0"/>
+              <a:rPr lang="en-US" dirty="0"/>
               <a:t>SAD (security association database)</a:t>
             </a:r>
             <a:r>
-              <a:rPr lang="ru-RU" dirty="0" smtClean="0"/>
+              <a:rPr lang="ru-RU" dirty="0"/>
               <a:t>, записями в которой называются </a:t>
             </a:r>
             <a:r>
-              <a:rPr lang="en-US" dirty="0" smtClean="0"/>
+              <a:rPr lang="en-US" dirty="0"/>
               <a:t>SA (security association)</a:t>
             </a:r>
             <a:r>
-              <a:rPr lang="ru-RU" dirty="0" smtClean="0"/>
+              <a:rPr lang="ru-RU" dirty="0"/>
               <a:t>, индексируемые 32 битным числом </a:t>
             </a:r>
             <a:r>
-              <a:rPr lang="en-US" dirty="0" smtClean="0"/>
+              <a:rPr lang="en-US" dirty="0"/>
               <a:t>SPI (security parameter index). </a:t>
             </a:r>
-            <a:endParaRPr lang="en-US" dirty="0"/>
           </a:p>
           <a:p>
             <a:pPr marL="0" indent="0">
               <a:buNone/>
             </a:pPr>
             <a:r>
-              <a:rPr lang="en-US" dirty="0" smtClean="0"/>
+              <a:rPr lang="en-US" dirty="0"/>
               <a:t>SA </a:t>
             </a:r>
             <a:r>
-              <a:rPr lang="ru-RU" dirty="0" smtClean="0"/>
+              <a:rPr lang="ru-RU" dirty="0"/>
               <a:t>содержит набор параметров, включающих идентификаторы криптографических алгоритмов, секретные ключи, </a:t>
             </a:r>
             <a:r>
-              <a:rPr lang="en-US" dirty="0" smtClean="0"/>
+              <a:rPr lang="en-US" dirty="0"/>
               <a:t>SPI</a:t>
             </a:r>
             <a:r>
-              <a:rPr lang="ru-RU" dirty="0" smtClean="0"/>
+              <a:rPr lang="ru-RU" dirty="0"/>
               <a:t>, адреса получателей и отправителей, параметры обмена ключами </a:t>
             </a:r>
-            <a:endParaRPr lang="ru-RU" dirty="0"/>
           </a:p>
         </p:txBody>
       </p:sp>
@@ -14975,11 +14570,11 @@
           <a:lstStyle/>
           <a:p>
             <a:r>
-              <a:rPr lang="ru-RU" dirty="0" smtClean="0"/>
+              <a:rPr lang="ru-RU" dirty="0"/>
               <a:t>Инкапсуляция </a:t>
             </a:r>
             <a:r>
-              <a:rPr lang="en-US" dirty="0" smtClean="0"/>
+              <a:rPr lang="en-US" dirty="0"/>
               <a:t>IPsec</a:t>
             </a:r>
             <a:endParaRPr lang="ru-RU" dirty="0"/>
@@ -15012,15 +14607,15 @@
               <a:buNone/>
             </a:pPr>
             <a:r>
-              <a:rPr lang="ru-RU" dirty="0" smtClean="0"/>
+              <a:rPr lang="ru-RU" dirty="0"/>
               <a:t>Для отправки пакета отправитель ищет адрес получателя в </a:t>
             </a:r>
             <a:r>
-              <a:rPr lang="en-US" dirty="0" smtClean="0"/>
+              <a:rPr lang="en-US" dirty="0"/>
               <a:t>SAD</a:t>
             </a:r>
             <a:r>
-              <a:rPr lang="ru-RU" dirty="0" smtClean="0"/>
+              <a:rPr lang="ru-RU" dirty="0"/>
               <a:t>, получает параметры соединения и устанавливает защищенный канал, используя данные параметры.</a:t>
             </a:r>
           </a:p>
@@ -15029,79 +14624,79 @@
               <a:buNone/>
             </a:pPr>
             <a:r>
-              <a:rPr lang="ru-RU" dirty="0" smtClean="0"/>
+              <a:rPr lang="ru-RU" dirty="0"/>
               <a:t>Получатель, при получении пакета</a:t>
             </a:r>
             <a:r>
-              <a:rPr lang="en-US" dirty="0" smtClean="0"/>
+              <a:rPr lang="en-US" dirty="0"/>
               <a:t>:</a:t>
             </a:r>
           </a:p>
           <a:p>
             <a:r>
-              <a:rPr lang="ru-RU" dirty="0" smtClean="0"/>
+              <a:rPr lang="ru-RU" dirty="0"/>
               <a:t>Проверяет наличие </a:t>
             </a:r>
             <a:r>
-              <a:rPr lang="en-US" dirty="0" smtClean="0"/>
+              <a:rPr lang="en-US" dirty="0"/>
               <a:t>SA </a:t>
             </a:r>
             <a:r>
-              <a:rPr lang="ru-RU" dirty="0" smtClean="0"/>
+              <a:rPr lang="ru-RU" dirty="0"/>
               <a:t>в своей базе по (адрес отправителя,</a:t>
             </a:r>
             <a:r>
-              <a:rPr lang="en-US" dirty="0" smtClean="0"/>
+              <a:rPr lang="en-US" dirty="0"/>
               <a:t> </a:t>
             </a:r>
             <a:r>
-              <a:rPr lang="ru-RU" dirty="0" smtClean="0"/>
+              <a:rPr lang="ru-RU" dirty="0"/>
               <a:t>адрес получателя, </a:t>
             </a:r>
             <a:r>
-              <a:rPr lang="en-US" dirty="0" smtClean="0"/>
+              <a:rPr lang="en-US" dirty="0"/>
               <a:t>SPI)</a:t>
             </a:r>
-            <a:endParaRPr lang="ru-RU" dirty="0" smtClean="0"/>
-          </a:p>
-          <a:p>
-            <a:r>
-              <a:rPr lang="ru-RU" dirty="0" smtClean="0"/>
+            <a:endParaRPr lang="ru-RU" dirty="0"/>
+          </a:p>
+          <a:p>
+            <a:r>
+              <a:rPr lang="ru-RU" dirty="0"/>
               <a:t>Если не найдена – проверяет наличие на основе (</a:t>
             </a:r>
             <a:r>
-              <a:rPr lang="en-US" dirty="0" smtClean="0"/>
+              <a:rPr lang="en-US" dirty="0"/>
               <a:t>SPI</a:t>
             </a:r>
             <a:r>
-              <a:rPr lang="ru-RU" dirty="0" smtClean="0"/>
+              <a:rPr lang="ru-RU" dirty="0"/>
               <a:t>, адрес получателя)</a:t>
             </a:r>
           </a:p>
           <a:p>
             <a:r>
-              <a:rPr lang="ru-RU" dirty="0" smtClean="0"/>
+              <a:rPr lang="ru-RU" dirty="0"/>
               <a:t>Если не найдена – ищет только по </a:t>
             </a:r>
             <a:r>
-              <a:rPr lang="en-US" dirty="0" smtClean="0"/>
+              <a:rPr lang="en-US" dirty="0"/>
               <a:t>SPI</a:t>
             </a:r>
-            <a:endParaRPr lang="ru-RU" dirty="0" smtClean="0"/>
-          </a:p>
-          <a:p>
-            <a:r>
-              <a:rPr lang="ru-RU" dirty="0" smtClean="0"/>
+            <a:endParaRPr lang="ru-RU" dirty="0"/>
+          </a:p>
+          <a:p>
+            <a:r>
+              <a:rPr lang="ru-RU" dirty="0"/>
               <a:t>Если не найдена – отбросить пакет</a:t>
             </a:r>
           </a:p>
           <a:p>
             <a:r>
-              <a:rPr lang="ru-RU" dirty="0" smtClean="0"/>
+              <a:rPr lang="ru-RU" dirty="0"/>
               <a:t>Если найдена – расшифровать пакет с использованием ключа, записанного в </a:t>
             </a:r>
             <a:r>
-              <a:rPr lang="en-US" dirty="0" smtClean="0"/>
+              <a:rPr lang="en-US" dirty="0"/>
               <a:t>SA</a:t>
             </a:r>
           </a:p>
@@ -15203,11 +14798,11 @@
           <a:lstStyle/>
           <a:p>
             <a:r>
-              <a:rPr lang="ru-RU" dirty="0" smtClean="0"/>
+              <a:rPr lang="ru-RU" dirty="0"/>
               <a:t>Инкапсуляция </a:t>
             </a:r>
             <a:r>
-              <a:rPr lang="en-US" dirty="0" smtClean="0"/>
+              <a:rPr lang="en-US" dirty="0"/>
               <a:t>IPsec</a:t>
             </a:r>
             <a:endParaRPr lang="ru-RU" dirty="0"/>
@@ -15240,15 +14835,15 @@
               <a:buNone/>
             </a:pPr>
             <a:r>
-              <a:rPr lang="ru-RU" dirty="0" smtClean="0"/>
+              <a:rPr lang="ru-RU" dirty="0"/>
               <a:t>При двухстороннем соединении при шифровании используются два канала – от отправителя к получателю и от получателя к отправителю. Для них используются различные </a:t>
             </a:r>
             <a:r>
-              <a:rPr lang="en-US" dirty="0" smtClean="0"/>
+              <a:rPr lang="en-US" dirty="0"/>
               <a:t>SA </a:t>
             </a:r>
             <a:r>
-              <a:rPr lang="ru-RU" dirty="0" smtClean="0"/>
+              <a:rPr lang="ru-RU" dirty="0"/>
               <a:t>с различными ключами.</a:t>
             </a:r>
           </a:p>
@@ -15257,15 +14852,15 @@
               <a:buNone/>
             </a:pPr>
             <a:r>
-              <a:rPr lang="ru-RU" dirty="0" smtClean="0"/>
+              <a:rPr lang="ru-RU" dirty="0"/>
               <a:t>Т.е. в общем случае для каждого соединения в </a:t>
             </a:r>
             <a:r>
-              <a:rPr lang="en-US" dirty="0" smtClean="0"/>
+              <a:rPr lang="en-US" dirty="0"/>
               <a:t>SAD </a:t>
             </a:r>
             <a:r>
-              <a:rPr lang="ru-RU" dirty="0" smtClean="0"/>
+              <a:rPr lang="ru-RU" dirty="0"/>
               <a:t>хранятся 2 записи.</a:t>
             </a:r>
           </a:p>
@@ -15274,10 +14869,10 @@
               <a:buNone/>
             </a:pPr>
             <a:r>
-              <a:rPr lang="ru-RU" dirty="0" smtClean="0"/>
+              <a:rPr lang="ru-RU" dirty="0"/>
               <a:t>Если для соединения хранится только одна запись – соединение одностороннее.</a:t>
             </a:r>
-            <a:endParaRPr lang="en-US" dirty="0" smtClean="0"/>
+            <a:endParaRPr lang="en-US" dirty="0"/>
           </a:p>
           <a:p>
             <a:endParaRPr lang="ru-RU" dirty="0"/>
@@ -15599,7 +15194,7 @@
   <a:extraClrSchemeLst/>
   <a:extLst>
     <a:ext uri="{05A4C25C-085E-4340-85A3-A5531E510DB2}">
-      <thm15:themeFamily xmlns:thm15="http://schemas.microsoft.com/office/thememl/2012/main" xmlns="" name="Office Theme" id="{62F939B6-93AF-4DB8-9C6B-D6C7DFDC589F}" vid="{4A3C46E8-61CC-4603-A589-7422A47A8E4A}"/>
+      <thm15:themeFamily xmlns:thm15="http://schemas.microsoft.com/office/thememl/2012/main" name="Office Theme" id="{62F939B6-93AF-4DB8-9C6B-D6C7DFDC589F}" vid="{4A3C46E8-61CC-4603-A589-7422A47A8E4A}"/>
     </a:ext>
   </a:extLst>
 </a:theme>
@@ -15860,7 +15455,7 @@
   <a:extraClrSchemeLst/>
   <a:extLst>
     <a:ext uri="{05A4C25C-085E-4340-85A3-A5531E510DB2}">
-      <thm15:themeFamily xmlns:thm15="http://schemas.microsoft.com/office/thememl/2012/main" xmlns="" name="Office Theme" id="{62F939B6-93AF-4DB8-9C6B-D6C7DFDC589F}" vid="{4A3C46E8-61CC-4603-A589-7422A47A8E4A}"/>
+      <thm15:themeFamily xmlns:thm15="http://schemas.microsoft.com/office/thememl/2012/main" name="Office Theme" id="{62F939B6-93AF-4DB8-9C6B-D6C7DFDC589F}" vid="{4A3C46E8-61CC-4603-A589-7422A47A8E4A}"/>
     </a:ext>
   </a:extLst>
 </a:theme>
